--- a/SIH26053_LiDAR_Mapping_Master_Submission.pptx
+++ b/SIH26053_LiDAR_Mapping_Master_Submission.pptx
@@ -3109,8 +3109,8 @@
         </p:blipFill>
         <p:spPr>
           <a:xfrm>
-            <a:off x="9601200" y="182880"/>
-            <a:ext cx="2103120" cy="902070"/>
+            <a:off x="9601200" y="164592"/>
+            <a:ext cx="2194560" cy="941291"/>
           </a:xfrm>
           <a:prstGeom prst="rect">
             <a:avLst/>
@@ -3125,8 +3125,8 @@
         </p:nvSpPr>
         <p:spPr>
           <a:xfrm>
-            <a:off x="731520" y="320040"/>
-            <a:ext cx="2743200" cy="457200"/>
+            <a:off x="731520" y="274320"/>
+            <a:ext cx="2743200" cy="502920"/>
           </a:xfrm>
           <a:prstGeom prst="rect">
             <a:avLst/>
@@ -3140,7 +3140,7 @@
           <a:lstStyle/>
           <a:p>
             <a:pPr>
-              <a:defRPr sz="1800" b="1">
+              <a:defRPr sz="2000" b="1">
                 <a:solidFill>
                   <a:srgbClr val="005B94"/>
                 </a:solidFill>
@@ -3160,8 +3160,8 @@
         </p:nvSpPr>
         <p:spPr>
           <a:xfrm>
-            <a:off x="3200400" y="274320"/>
-            <a:ext cx="5943600" cy="548640"/>
+            <a:off x="3017520" y="256032"/>
+            <a:ext cx="6309360" cy="594360"/>
           </a:xfrm>
           <a:prstGeom prst="rect">
             <a:avLst/>
@@ -3175,7 +3175,7 @@
           <a:lstStyle/>
           <a:p>
             <a:pPr algn="ctr">
-              <a:defRPr sz="2200" b="1">
+              <a:defRPr sz="2400" b="1">
                 <a:solidFill>
                   <a:srgbClr val="005B94"/>
                 </a:solidFill>
@@ -3195,7 +3195,7 @@
         </p:nvSpPr>
         <p:spPr>
           <a:xfrm>
-            <a:off x="731520" y="1051560"/>
+            <a:off x="731520" y="1005840"/>
             <a:ext cx="10728655" cy="18288"/>
           </a:xfrm>
           <a:prstGeom prst="rect">
@@ -3238,8 +3238,8 @@
         </p:nvSpPr>
         <p:spPr>
           <a:xfrm>
-            <a:off x="731520" y="1234440"/>
-            <a:ext cx="10728655" cy="914400"/>
+            <a:off x="731520" y="1143000"/>
+            <a:ext cx="10728655" cy="960120"/>
           </a:xfrm>
           <a:prstGeom prst="rect">
             <a:avLst/>
@@ -3253,7 +3253,7 @@
           <a:lstStyle/>
           <a:p>
             <a:pPr algn="ctr">
-              <a:defRPr sz="2500" b="1">
+              <a:defRPr sz="2700" b="1">
                 <a:solidFill>
                   <a:srgbClr val="0F172A"/>
                 </a:solidFill>
@@ -3273,8 +3273,8 @@
         </p:nvSpPr>
         <p:spPr>
           <a:xfrm>
-            <a:off x="731520" y="2286000"/>
-            <a:ext cx="7132320" cy="3931920"/>
+            <a:off x="731520" y="2240280"/>
+            <a:ext cx="7315200" cy="4114800"/>
           </a:xfrm>
           <a:prstGeom prst="rect">
             <a:avLst/>
@@ -3289,11 +3289,11 @@
           <a:p>
             <a:pPr>
               <a:spcAft>
-                <a:spcPts val="1000"/>
+                <a:spcPts val="1100"/>
               </a:spcAft>
             </a:pPr>
             <a:r>
-              <a:rPr b="1" sz="1350">
+              <a:rPr b="1" sz="1550">
                 <a:solidFill>
                   <a:srgbClr val="0F172A"/>
                 </a:solidFill>
@@ -3301,7 +3301,7 @@
               <a:t>• Problem Statement ID – </a:t>
             </a:r>
             <a:r>
-              <a:rPr b="0" sz="1350">
+              <a:rPr b="0" sz="1550">
                 <a:solidFill>
                   <a:srgbClr val="005B94"/>
                 </a:solidFill>
@@ -3312,11 +3312,11 @@
           <a:p>
             <a:pPr>
               <a:spcAft>
-                <a:spcPts val="1000"/>
+                <a:spcPts val="1100"/>
               </a:spcAft>
             </a:pPr>
             <a:r>
-              <a:rPr b="1" sz="1350">
+              <a:rPr b="1" sz="1550">
                 <a:solidFill>
                   <a:srgbClr val="0F172A"/>
                 </a:solidFill>
@@ -3324,7 +3324,7 @@
               <a:t>• Problem Statement Title – </a:t>
             </a:r>
             <a:r>
-              <a:rPr b="0" sz="1350">
+              <a:rPr b="0" sz="1550">
                 <a:solidFill>
                   <a:srgbClr val="0F172A"/>
                 </a:solidFill>
@@ -3335,11 +3335,11 @@
           <a:p>
             <a:pPr>
               <a:spcAft>
-                <a:spcPts val="1000"/>
+                <a:spcPts val="1100"/>
               </a:spcAft>
             </a:pPr>
             <a:r>
-              <a:rPr b="1" sz="1350">
+              <a:rPr b="1" sz="1550">
                 <a:solidFill>
                   <a:srgbClr val="0F172A"/>
                 </a:solidFill>
@@ -3347,7 +3347,7 @@
               <a:t>• Ministry / Organization – </a:t>
             </a:r>
             <a:r>
-              <a:rPr b="0" sz="1350">
+              <a:rPr b="0" sz="1550">
                 <a:solidFill>
                   <a:srgbClr val="005B94"/>
                 </a:solidFill>
@@ -3358,11 +3358,11 @@
           <a:p>
             <a:pPr>
               <a:spcAft>
-                <a:spcPts val="1000"/>
+                <a:spcPts val="1100"/>
               </a:spcAft>
             </a:pPr>
             <a:r>
-              <a:rPr b="1" sz="1350">
+              <a:rPr b="1" sz="1550">
                 <a:solidFill>
                   <a:srgbClr val="0F172A"/>
                 </a:solidFill>
@@ -3370,7 +3370,7 @@
               <a:t>• Theme – </a:t>
             </a:r>
             <a:r>
-              <a:rPr b="0" sz="1350">
+              <a:rPr b="0" sz="1550">
                 <a:solidFill>
                   <a:srgbClr val="0F172A"/>
                 </a:solidFill>
@@ -3381,11 +3381,11 @@
           <a:p>
             <a:pPr>
               <a:spcAft>
-                <a:spcPts val="1000"/>
+                <a:spcPts val="1100"/>
               </a:spcAft>
             </a:pPr>
             <a:r>
-              <a:rPr b="1" sz="1350">
+              <a:rPr b="1" sz="1550">
                 <a:solidFill>
                   <a:srgbClr val="0F172A"/>
                 </a:solidFill>
@@ -3393,7 +3393,7 @@
               <a:t>• PS Category – </a:t>
             </a:r>
             <a:r>
-              <a:rPr b="0" sz="1350">
+              <a:rPr b="0" sz="1550">
                 <a:solidFill>
                   <a:srgbClr val="0F172A"/>
                 </a:solidFill>
@@ -3404,11 +3404,11 @@
           <a:p>
             <a:pPr>
               <a:spcAft>
-                <a:spcPts val="1000"/>
+                <a:spcPts val="1100"/>
               </a:spcAft>
             </a:pPr>
             <a:r>
-              <a:rPr b="1" sz="1350">
+              <a:rPr b="1" sz="1550">
                 <a:solidFill>
                   <a:srgbClr val="0F172A"/>
                 </a:solidFill>
@@ -3416,7 +3416,7 @@
               <a:t>• Team Name (Registered on portal) – </a:t>
             </a:r>
             <a:r>
-              <a:rPr b="0" sz="1350">
+              <a:rPr b="0" sz="1550">
                 <a:solidFill>
                   <a:srgbClr val="005B94"/>
                 </a:solidFill>
@@ -3427,11 +3427,11 @@
           <a:p>
             <a:pPr>
               <a:spcAft>
-                <a:spcPts val="1000"/>
+                <a:spcPts val="1100"/>
               </a:spcAft>
             </a:pPr>
             <a:r>
-              <a:rPr b="1" sz="1350">
+              <a:rPr b="1" sz="1550">
                 <a:solidFill>
                   <a:srgbClr val="0F172A"/>
                 </a:solidFill>
@@ -3439,7 +3439,7 @@
               <a:t>• Target System – </a:t>
             </a:r>
             <a:r>
-              <a:rPr b="0" sz="1350">
+              <a:rPr b="0" sz="1550">
                 <a:solidFill>
                   <a:srgbClr val="0F172A"/>
                 </a:solidFill>
@@ -3465,8 +3465,8 @@
         </p:blipFill>
         <p:spPr>
           <a:xfrm>
-            <a:off x="8138160" y="2011680"/>
-            <a:ext cx="3291840" cy="3787502"/>
+            <a:off x="8229600" y="2103120"/>
+            <a:ext cx="3383280" cy="3892710"/>
           </a:xfrm>
           <a:prstGeom prst="rect">
             <a:avLst/>
@@ -3644,7 +3644,7 @@
           <a:lstStyle/>
           <a:p>
             <a:pPr algn="l">
-              <a:defRPr sz="1900" b="1">
+              <a:defRPr sz="2100" b="1">
                 <a:solidFill>
                   <a:srgbClr val="FFFFFF"/>
                 </a:solidFill>
@@ -3688,7 +3688,7 @@
         </p:nvSpPr>
         <p:spPr>
           <a:xfrm>
-            <a:off x="548640" y="841248"/>
+            <a:off x="548640" y="822960"/>
             <a:ext cx="3291840" cy="320040"/>
           </a:xfrm>
           <a:prstGeom prst="rect">
@@ -3703,7 +3703,7 @@
           <a:lstStyle/>
           <a:p>
             <a:pPr>
-              <a:defRPr sz="1600" b="1">
+              <a:defRPr sz="1800" b="1">
                 <a:solidFill>
                   <a:srgbClr val="C2410C"/>
                 </a:solidFill>
@@ -3758,7 +3758,7 @@
           <a:p>
             <a:pPr algn="ctr"/>
             <a:r>
-              <a:rPr b="1" sz="1050">
+              <a:rPr b="1" sz="1200">
                 <a:solidFill>
                   <a:srgbClr val="0F172A"/>
                 </a:solidFill>
@@ -3766,7 +3766,7 @@
               <a:t>Compute Bottleneck: </a:t>
             </a:r>
             <a:r>
-              <a:rPr sz="1000">
+              <a:rPr sz="1100">
                 <a:solidFill>
                   <a:srgbClr val="0F172A"/>
                 </a:solidFill>
@@ -3819,7 +3819,7 @@
           <a:p>
             <a:pPr algn="ctr"/>
             <a:r>
-              <a:rPr b="1" sz="1050">
+              <a:rPr b="1" sz="1200">
                 <a:solidFill>
                   <a:srgbClr val="0F172A"/>
                 </a:solidFill>
@@ -3827,7 +3827,7 @@
               <a:t>2D Blindness: </a:t>
             </a:r>
             <a:r>
-              <a:rPr sz="1000">
+              <a:rPr sz="1100">
                 <a:solidFill>
                   <a:srgbClr val="0F172A"/>
                 </a:solidFill>
@@ -3880,7 +3880,7 @@
           <a:p>
             <a:pPr algn="ctr"/>
             <a:r>
-              <a:rPr b="1" sz="1050">
+              <a:rPr b="1" sz="1200">
                 <a:solidFill>
                   <a:srgbClr val="0F172A"/>
                 </a:solidFill>
@@ -3888,7 +3888,7 @@
               <a:t>Memory Overhead: </a:t>
             </a:r>
             <a:r>
-              <a:rPr sz="1000">
+              <a:rPr sz="1100">
                 <a:solidFill>
                   <a:srgbClr val="0F172A"/>
                 </a:solidFill>
@@ -3941,7 +3941,7 @@
           <a:p>
             <a:pPr algn="ctr"/>
             <a:r>
-              <a:rPr b="1" sz="1050">
+              <a:rPr b="1" sz="1200">
                 <a:solidFill>
                   <a:srgbClr val="0F172A"/>
                 </a:solidFill>
@@ -3949,7 +3949,7 @@
               <a:t>Dynamic Obstacle Smear: </a:t>
             </a:r>
             <a:r>
-              <a:rPr sz="1000">
+              <a:rPr sz="1100">
                 <a:solidFill>
                   <a:srgbClr val="0F172A"/>
                 </a:solidFill>
@@ -3967,7 +3967,7 @@
         </p:nvSpPr>
         <p:spPr>
           <a:xfrm>
-            <a:off x="4023360" y="841248"/>
+            <a:off x="4023360" y="822960"/>
             <a:ext cx="4663440" cy="320040"/>
           </a:xfrm>
           <a:prstGeom prst="rect">
@@ -3982,7 +3982,7 @@
           <a:lstStyle/>
           <a:p>
             <a:pPr>
-              <a:defRPr sz="1600" b="1">
+              <a:defRPr sz="1800" b="1">
                 <a:solidFill>
                   <a:srgbClr val="107846"/>
                 </a:solidFill>
@@ -4011,7 +4011,7 @@
         <p:spPr>
           <a:xfrm>
             <a:off x="4023360" y="1188720"/>
-            <a:ext cx="4663440" cy="3108960"/>
+            <a:ext cx="4663440" cy="3063240"/>
           </a:xfrm>
           <a:prstGeom prst="rect">
             <a:avLst/>
@@ -4026,8 +4026,8 @@
         </p:nvSpPr>
         <p:spPr>
           <a:xfrm>
-            <a:off x="4023360" y="4434840"/>
-            <a:ext cx="4663440" cy="1828800"/>
+            <a:off x="4023360" y="4389120"/>
+            <a:ext cx="4663440" cy="1874519"/>
           </a:xfrm>
           <a:prstGeom prst="roundRect">
             <a:avLst/>
@@ -4056,14 +4056,14 @@
           </a:fontRef>
         </p:style>
         <p:txBody>
-          <a:bodyPr rtlCol="0" anchor="ctr" wrap="square" lIns="137160" rIns="137160" tIns="137160" bIns="137160"/>
+          <a:bodyPr rtlCol="0" anchor="ctr" wrap="square" lIns="128016" rIns="128016" tIns="128016" bIns="128016"/>
           <a:lstStyle/>
           <a:p>
             <a:pPr algn="ctr">
               <a:spcAft>
                 <a:spcPts val="400"/>
               </a:spcAft>
-              <a:defRPr b="1" sz="1200">
+              <a:defRPr b="1" sz="1400">
                 <a:solidFill>
                   <a:srgbClr val="C2410C"/>
                 </a:solidFill>
@@ -4078,7 +4078,7 @@
               <a:spcAft>
                 <a:spcPts val="200"/>
               </a:spcAft>
-              <a:defRPr sz="950">
+              <a:defRPr sz="1100">
                 <a:solidFill>
                   <a:srgbClr val="0F172A"/>
                 </a:solidFill>
@@ -4093,7 +4093,7 @@
               <a:spcAft>
                 <a:spcPts val="200"/>
               </a:spcAft>
-              <a:defRPr sz="950">
+              <a:defRPr sz="1100">
                 <a:solidFill>
                   <a:srgbClr val="0F172A"/>
                 </a:solidFill>
@@ -4108,7 +4108,7 @@
               <a:spcAft>
                 <a:spcPts val="200"/>
               </a:spcAft>
-              <a:defRPr sz="950">
+              <a:defRPr sz="1100">
                 <a:solidFill>
                   <a:srgbClr val="0F172A"/>
                 </a:solidFill>
@@ -4128,7 +4128,7 @@
         </p:nvSpPr>
         <p:spPr>
           <a:xfrm>
-            <a:off x="8869680" y="841248"/>
+            <a:off x="8869680" y="822960"/>
             <a:ext cx="2743200" cy="320040"/>
           </a:xfrm>
           <a:prstGeom prst="rect">
@@ -4143,7 +4143,7 @@
           <a:lstStyle/>
           <a:p>
             <a:pPr>
-              <a:defRPr sz="1600" b="1">
+              <a:defRPr sz="1800" b="1">
                 <a:solidFill>
                   <a:srgbClr val="005B94"/>
                 </a:solidFill>
@@ -4197,7 +4197,7 @@
           <a:lstStyle/>
           <a:p>
             <a:pPr algn="ctr">
-              <a:defRPr b="1" sz="1000">
+              <a:defRPr b="1" sz="1150">
                 <a:solidFill>
                   <a:srgbClr val="005B94"/>
                 </a:solidFill>
@@ -4209,7 +4209,7 @@
           </a:p>
           <a:p>
             <a:pPr>
-              <a:defRPr sz="850">
+              <a:defRPr sz="1000">
                 <a:solidFill>
                   <a:srgbClr val="0F172A"/>
                 </a:solidFill>
@@ -4263,7 +4263,7 @@
           <a:lstStyle/>
           <a:p>
             <a:pPr algn="ctr">
-              <a:defRPr b="1" sz="1000">
+              <a:defRPr b="1" sz="1150">
                 <a:solidFill>
                   <a:srgbClr val="005B94"/>
                 </a:solidFill>
@@ -4275,7 +4275,7 @@
           </a:p>
           <a:p>
             <a:pPr>
-              <a:defRPr sz="850">
+              <a:defRPr sz="1000">
                 <a:solidFill>
                   <a:srgbClr val="0F172A"/>
                 </a:solidFill>
@@ -4329,7 +4329,7 @@
           <a:lstStyle/>
           <a:p>
             <a:pPr algn="ctr">
-              <a:defRPr b="1" sz="1000">
+              <a:defRPr b="1" sz="1150">
                 <a:solidFill>
                   <a:srgbClr val="005B94"/>
                 </a:solidFill>
@@ -4341,7 +4341,7 @@
           </a:p>
           <a:p>
             <a:pPr>
-              <a:defRPr sz="850">
+              <a:defRPr sz="1000">
                 <a:solidFill>
                   <a:srgbClr val="0F172A"/>
                 </a:solidFill>
@@ -4395,7 +4395,7 @@
           <a:lstStyle/>
           <a:p>
             <a:pPr algn="ctr">
-              <a:defRPr b="1" sz="1000">
+              <a:defRPr b="1" sz="1150">
                 <a:solidFill>
                   <a:srgbClr val="005B94"/>
                 </a:solidFill>
@@ -4407,7 +4407,7 @@
           </a:p>
           <a:p>
             <a:pPr>
-              <a:defRPr sz="850">
+              <a:defRPr sz="1000">
                 <a:solidFill>
                   <a:srgbClr val="0F172A"/>
                 </a:solidFill>
@@ -4461,7 +4461,7 @@
           <a:lstStyle/>
           <a:p>
             <a:pPr algn="ctr">
-              <a:defRPr b="1" sz="1000">
+              <a:defRPr b="1" sz="1150">
                 <a:solidFill>
                   <a:srgbClr val="005B94"/>
                 </a:solidFill>
@@ -4473,7 +4473,7 @@
           </a:p>
           <a:p>
             <a:pPr>
-              <a:defRPr sz="850">
+              <a:defRPr sz="1000">
                 <a:solidFill>
                   <a:srgbClr val="0F172A"/>
                 </a:solidFill>
@@ -4527,7 +4527,7 @@
           <a:lstStyle/>
           <a:p>
             <a:pPr algn="ctr">
-              <a:defRPr b="1" sz="1000">
+              <a:defRPr b="1" sz="1150">
                 <a:solidFill>
                   <a:srgbClr val="005B94"/>
                 </a:solidFill>
@@ -4539,7 +4539,7 @@
           </a:p>
           <a:p>
             <a:pPr>
-              <a:defRPr sz="850">
+              <a:defRPr sz="1000">
                 <a:solidFill>
                   <a:srgbClr val="0F172A"/>
                 </a:solidFill>
@@ -4722,7 +4722,7 @@
           <a:lstStyle/>
           <a:p>
             <a:pPr algn="l">
-              <a:defRPr sz="1900" b="1">
+              <a:defRPr sz="2100" b="1">
                 <a:solidFill>
                   <a:srgbClr val="FFFFFF"/>
                 </a:solidFill>
@@ -4774,8 +4774,8 @@
         </p:blipFill>
         <p:spPr>
           <a:xfrm>
-            <a:off x="731520" y="914400"/>
-            <a:ext cx="10698480" cy="3474720"/>
+            <a:off x="731520" y="868680"/>
+            <a:ext cx="10698480" cy="3520440"/>
           </a:xfrm>
           <a:prstGeom prst="rect">
             <a:avLst/>
@@ -4790,8 +4790,8 @@
         </p:nvSpPr>
         <p:spPr>
           <a:xfrm>
-            <a:off x="731520" y="4617720"/>
-            <a:ext cx="2029968" cy="1645920"/>
+            <a:off x="731520" y="4553712"/>
+            <a:ext cx="2029968" cy="1737360"/>
           </a:xfrm>
           <a:prstGeom prst="roundRect">
             <a:avLst/>
@@ -4825,9 +4825,9 @@
           <a:p>
             <a:pPr algn="ctr">
               <a:spcAft>
-                <a:spcPts val="400"/>
+                <a:spcPts val="300"/>
               </a:spcAft>
-              <a:defRPr b="1" sz="1000">
+              <a:defRPr b="1" sz="1200">
                 <a:solidFill>
                   <a:srgbClr val="0F172A"/>
                 </a:solidFill>
@@ -4839,14 +4839,14 @@
           </a:p>
           <a:p>
             <a:pPr>
-              <a:defRPr sz="850">
+              <a:defRPr sz="1050">
                 <a:solidFill>
                   <a:srgbClr val="0F172A"/>
                 </a:solidFill>
               </a:defRPr>
             </a:pPr>
             <a:r>
-              <a:t>Raw 128-beam 3D LiDAR point cloud @ 20Hz. Patchwork++ cylindrical RANSAC isolates ground plane from obstacle inliers in 3.4ms.</a:t>
+              <a:t>Raw 128-beam 3D LiDAR point cloud @ 20Hz. Patchwork++ cylindrical RANSAC isolates ground plane in 3.4ms.</a:t>
             </a:r>
           </a:p>
         </p:txBody>
@@ -4859,8 +4859,8 @@
         </p:nvSpPr>
         <p:spPr>
           <a:xfrm>
-            <a:off x="2898648" y="4617720"/>
-            <a:ext cx="2029968" cy="1645920"/>
+            <a:off x="2898648" y="4553712"/>
+            <a:ext cx="2029968" cy="1737360"/>
           </a:xfrm>
           <a:prstGeom prst="roundRect">
             <a:avLst/>
@@ -4894,9 +4894,9 @@
           <a:p>
             <a:pPr algn="ctr">
               <a:spcAft>
-                <a:spcPts val="400"/>
+                <a:spcPts val="300"/>
               </a:spcAft>
-              <a:defRPr b="1" sz="1000">
+              <a:defRPr b="1" sz="1200">
                 <a:solidFill>
                   <a:srgbClr val="005B94"/>
                 </a:solidFill>
@@ -4908,14 +4908,14 @@
           </a:p>
           <a:p>
             <a:pPr>
-              <a:defRPr sz="850">
+              <a:defRPr sz="1050">
                 <a:solidFill>
                   <a:srgbClr val="0F172A"/>
                 </a:solidFill>
               </a:defRPr>
             </a:pPr>
             <a:r>
-              <a:t>Concentric distance-dependent binning: Zone A (5cm, 0-10m), Zone B (20cm, 10-35m), Zone C (50cm, 35-100m). Slashes memory by &gt;85%.</a:t>
+              <a:t>Concentric distance binning: Zone A (5cm, 0-10m), Zone B (20cm, 10-35m), Zone C (50cm). &gt;85% RAM saved.</a:t>
             </a:r>
           </a:p>
         </p:txBody>
@@ -4928,8 +4928,8 @@
         </p:nvSpPr>
         <p:spPr>
           <a:xfrm>
-            <a:off x="5065776" y="4617720"/>
-            <a:ext cx="2029968" cy="1645920"/>
+            <a:off x="5065776" y="4553712"/>
+            <a:ext cx="2029968" cy="1737360"/>
           </a:xfrm>
           <a:prstGeom prst="roundRect">
             <a:avLst/>
@@ -4963,9 +4963,9 @@
           <a:p>
             <a:pPr algn="ctr">
               <a:spcAft>
-                <a:spcPts val="400"/>
+                <a:spcPts val="300"/>
               </a:spcAft>
-              <a:defRPr b="1" sz="1000">
+              <a:defRPr b="1" sz="1200">
                 <a:solidFill>
                   <a:srgbClr val="0284C7"/>
                 </a:solidFill>
@@ -4977,14 +4977,14 @@
           </a:p>
           <a:p>
             <a:pPr>
-              <a:defRPr sz="850">
+              <a:defRPr sz="1050">
                 <a:solidFill>
                   <a:srgbClr val="0F172A"/>
                 </a:solidFill>
               </a:defRPr>
             </a:pPr>
             <a:r>
-              <a:t>Computes Z_max, Z_min, roughness σ_z², and normal vector n per cell. Directly calculates slope angle and step-climbing traversability.</a:t>
+              <a:t>Stores Z_max, Z_min, roughness σ_z², and normal vector n. Directly determines slope angle and obstacle height.</a:t>
             </a:r>
           </a:p>
         </p:txBody>
@@ -4997,8 +4997,8 @@
         </p:nvSpPr>
         <p:spPr>
           <a:xfrm>
-            <a:off x="7232904" y="4617720"/>
-            <a:ext cx="2029968" cy="1645920"/>
+            <a:off x="7232904" y="4553712"/>
+            <a:ext cx="2029968" cy="1737360"/>
           </a:xfrm>
           <a:prstGeom prst="roundRect">
             <a:avLst/>
@@ -5032,9 +5032,9 @@
           <a:p>
             <a:pPr algn="ctr">
               <a:spcAft>
-                <a:spcPts val="400"/>
+                <a:spcPts val="300"/>
               </a:spcAft>
-              <a:defRPr b="1" sz="1000">
+              <a:defRPr b="1" sz="1200">
                 <a:solidFill>
                   <a:srgbClr val="7C3AED"/>
                 </a:solidFill>
@@ -5046,14 +5046,14 @@
           </a:p>
           <a:p>
             <a:pPr>
-              <a:defRPr sz="850">
+              <a:defRPr sz="1050">
                 <a:solidFill>
                   <a:srgbClr val="0F172A"/>
                 </a:solidFill>
               </a:defRPr>
             </a:pPr>
             <a:r>
-              <a:t>Sparse Polar CNN running TensorRT INT8 quantization. Predicts traversability masks and dynamic obstacles in 14.2ms (&lt;15W SWaP).</a:t>
+              <a:t>Sparse Polar CNN with TensorRT INT8 quantization. Predicts dynamic obstacles and terrain masks in 14.2ms (&lt;15W SWaP).</a:t>
             </a:r>
           </a:p>
         </p:txBody>
@@ -5066,8 +5066,8 @@
         </p:nvSpPr>
         <p:spPr>
           <a:xfrm>
-            <a:off x="9400032" y="4617720"/>
-            <a:ext cx="2029968" cy="1645920"/>
+            <a:off x="9400032" y="4553712"/>
+            <a:ext cx="2029968" cy="1737360"/>
           </a:xfrm>
           <a:prstGeom prst="roundRect">
             <a:avLst/>
@@ -5101,9 +5101,9 @@
           <a:p>
             <a:pPr algn="ctr">
               <a:spcAft>
-                <a:spcPts val="400"/>
+                <a:spcPts val="300"/>
               </a:spcAft>
-              <a:defRPr b="1" sz="1000">
+              <a:defRPr b="1" sz="1200">
                 <a:solidFill>
                   <a:srgbClr val="059669"/>
                 </a:solidFill>
@@ -5115,14 +5115,14 @@
           </a:p>
           <a:p>
             <a:pPr>
-              <a:defRPr sz="850">
+              <a:defRPr sz="1050">
                 <a:solidFill>
                   <a:srgbClr val="0F172A"/>
                 </a:solidFill>
               </a:defRPr>
             </a:pPr>
             <a:r>
-              <a:t>Recursive log-odds evidence update + Kalman filter velocity estimation purges moving ghost trails. Publishes standard /costmap_2d.</a:t>
+              <a:t>Recursive log-odds evidence update + Kalman filter velocity estimation purges ghost trails. Publishes /costmap_2d.</a:t>
             </a:r>
           </a:p>
         </p:txBody>
@@ -5298,7 +5298,7 @@
           <a:lstStyle/>
           <a:p>
             <a:pPr algn="l">
-              <a:defRPr sz="1900" b="1">
+              <a:defRPr sz="2100" b="1">
                 <a:solidFill>
                   <a:srgbClr val="FFFFFF"/>
                 </a:solidFill>
@@ -5379,7 +5379,7 @@
               <a:spcAft>
                 <a:spcPts val="400"/>
               </a:spcAft>
-              <a:defRPr b="1" sz="1200">
+              <a:defRPr b="1" sz="1400">
                 <a:solidFill>
                   <a:srgbClr val="C2410C"/>
                 </a:solidFill>
@@ -5391,7 +5391,7 @@
           </a:p>
           <a:p>
             <a:pPr>
-              <a:defRPr sz="900">
+              <a:defRPr sz="1050">
                 <a:solidFill>
                   <a:srgbClr val="0F172A"/>
                 </a:solidFill>
@@ -5402,11 +5402,11 @@
             </a:r>
             <a:br/>
             <a:r>
-              <a:t>• Open Sensor Compatibility: Plug-and-play with Velodyne, Ouster, Hesai, and RoboSense 16/32/64/128-beam LiDARs.</a:t>
+              <a:t>• Open Sensor Compatibility: Plug-and-play with Velodyne, Ouster, Hesai, and RoboSense LiDARs.</a:t>
             </a:r>
             <a:br/>
             <a:r>
-              <a:t>• Edge-Verified: Validated on NVIDIA Jetson Orin Nano (8GB) and AGX Xavier under 15W power constraints.</a:t>
+              <a:t>• Edge-Verified: Validated on NVIDIA Jetson Orin Nano (8GB) under 15W power constraints.</a:t>
             </a:r>
           </a:p>
         </p:txBody>
@@ -5456,7 +5456,7 @@
               <a:spcAft>
                 <a:spcPts val="400"/>
               </a:spcAft>
-              <a:defRPr b="1" sz="1200">
+              <a:defRPr b="1" sz="1400">
                 <a:solidFill>
                   <a:srgbClr val="C2410C"/>
                 </a:solidFill>
@@ -5468,7 +5468,7 @@
           </a:p>
           <a:p>
             <a:pPr>
-              <a:defRPr sz="900">
+              <a:defRPr sz="1050">
                 <a:solidFill>
                   <a:srgbClr val="0F172A"/>
                 </a:solidFill>
@@ -5479,7 +5479,7 @@
             </a:r>
             <a:br/>
             <a:r>
-              <a:t>• GPS-Denied Autonomous Operation: Tightly coupled with wheel odometry and IMU for subterranean &amp; dense urban missions.</a:t>
+              <a:t>• GPS-Denied Autonomous Operation: Tightly coupled with wheel odometry and IMU.</a:t>
             </a:r>
             <a:br/>
             <a:r>
@@ -5511,7 +5511,7 @@
           <a:lstStyle/>
           <a:p>
             <a:pPr>
-              <a:defRPr b="1" sz="1200">
+              <a:defRPr b="1" sz="1400">
                 <a:solidFill>
                   <a:srgbClr val="005B94"/>
                 </a:solidFill>
@@ -5554,7 +5554,7 @@
                     <a:lstStyle/>
                     <a:p>
                       <a:pPr>
-                        <a:defRPr b="1" sz="900">
+                        <a:defRPr b="1" sz="1050">
                           <a:solidFill>
                             <a:srgbClr val="FFFFFF"/>
                           </a:solidFill>
@@ -5577,7 +5577,7 @@
                     <a:lstStyle/>
                     <a:p>
                       <a:pPr>
-                        <a:defRPr b="1" sz="900">
+                        <a:defRPr b="1" sz="1050">
                           <a:solidFill>
                             <a:srgbClr val="FFFFFF"/>
                           </a:solidFill>
@@ -5600,7 +5600,7 @@
                     <a:lstStyle/>
                     <a:p>
                       <a:pPr>
-                        <a:defRPr b="1" sz="900">
+                        <a:defRPr b="1" sz="1050">
                           <a:solidFill>
                             <a:srgbClr val="FFFFFF"/>
                           </a:solidFill>
@@ -5623,7 +5623,7 @@
                     <a:lstStyle/>
                     <a:p>
                       <a:pPr>
-                        <a:defRPr b="1" sz="900">
+                        <a:defRPr b="1" sz="1050">
                           <a:solidFill>
                             <a:srgbClr val="FFFFFF"/>
                           </a:solidFill>
@@ -5648,7 +5648,7 @@
                     <a:lstStyle/>
                     <a:p>
                       <a:pPr>
-                        <a:defRPr sz="850">
+                        <a:defRPr sz="1000">
                           <a:solidFill>
                             <a:srgbClr val="0F172A"/>
                           </a:solidFill>
@@ -5667,7 +5667,7 @@
                     <a:lstStyle/>
                     <a:p>
                       <a:pPr>
-                        <a:defRPr sz="850">
+                        <a:defRPr sz="1000">
                           <a:solidFill>
                             <a:srgbClr val="0F172A"/>
                           </a:solidFill>
@@ -5686,7 +5686,7 @@
                     <a:lstStyle/>
                     <a:p>
                       <a:pPr>
-                        <a:defRPr sz="850">
+                        <a:defRPr sz="1000">
                           <a:solidFill>
                             <a:srgbClr val="0F172A"/>
                           </a:solidFill>
@@ -5705,7 +5705,7 @@
                     <a:lstStyle/>
                     <a:p>
                       <a:pPr>
-                        <a:defRPr sz="850" b="1">
+                        <a:defRPr sz="1000" b="1">
                           <a:solidFill>
                             <a:srgbClr val="107846"/>
                           </a:solidFill>
@@ -5730,7 +5730,7 @@
                     <a:lstStyle/>
                     <a:p>
                       <a:pPr>
-                        <a:defRPr sz="850">
+                        <a:defRPr sz="1000">
                           <a:solidFill>
                             <a:srgbClr val="0F172A"/>
                           </a:solidFill>
@@ -5749,7 +5749,7 @@
                     <a:lstStyle/>
                     <a:p>
                       <a:pPr>
-                        <a:defRPr sz="850">
+                        <a:defRPr sz="1000">
                           <a:solidFill>
                             <a:srgbClr val="0F172A"/>
                           </a:solidFill>
@@ -5768,7 +5768,7 @@
                     <a:lstStyle/>
                     <a:p>
                       <a:pPr>
-                        <a:defRPr sz="850">
+                        <a:defRPr sz="1000">
                           <a:solidFill>
                             <a:srgbClr val="0F172A"/>
                           </a:solidFill>
@@ -5787,7 +5787,7 @@
                     <a:lstStyle/>
                     <a:p>
                       <a:pPr>
-                        <a:defRPr sz="850" b="1">
+                        <a:defRPr sz="1000" b="1">
                           <a:solidFill>
                             <a:srgbClr val="107846"/>
                           </a:solidFill>
@@ -5812,7 +5812,7 @@
                     <a:lstStyle/>
                     <a:p>
                       <a:pPr>
-                        <a:defRPr sz="850">
+                        <a:defRPr sz="1000">
                           <a:solidFill>
                             <a:srgbClr val="0F172A"/>
                           </a:solidFill>
@@ -5831,7 +5831,7 @@
                     <a:lstStyle/>
                     <a:p>
                       <a:pPr>
-                        <a:defRPr sz="850">
+                        <a:defRPr sz="1000">
                           <a:solidFill>
                             <a:srgbClr val="0F172A"/>
                           </a:solidFill>
@@ -5850,7 +5850,7 @@
                     <a:lstStyle/>
                     <a:p>
                       <a:pPr>
-                        <a:defRPr sz="850">
+                        <a:defRPr sz="1000">
                           <a:solidFill>
                             <a:srgbClr val="0F172A"/>
                           </a:solidFill>
@@ -5869,7 +5869,7 @@
                     <a:lstStyle/>
                     <a:p>
                       <a:pPr>
-                        <a:defRPr sz="850" b="1">
+                        <a:defRPr sz="1000" b="1">
                           <a:solidFill>
                             <a:srgbClr val="107846"/>
                           </a:solidFill>
@@ -5894,7 +5894,7 @@
                     <a:lstStyle/>
                     <a:p>
                       <a:pPr>
-                        <a:defRPr sz="850">
+                        <a:defRPr sz="1000">
                           <a:solidFill>
                             <a:srgbClr val="0F172A"/>
                           </a:solidFill>
@@ -5913,7 +5913,7 @@
                     <a:lstStyle/>
                     <a:p>
                       <a:pPr>
-                        <a:defRPr sz="850">
+                        <a:defRPr sz="1000">
                           <a:solidFill>
                             <a:srgbClr val="0F172A"/>
                           </a:solidFill>
@@ -5932,7 +5932,7 @@
                     <a:lstStyle/>
                     <a:p>
                       <a:pPr>
-                        <a:defRPr sz="850">
+                        <a:defRPr sz="1000">
                           <a:solidFill>
                             <a:srgbClr val="0F172A"/>
                           </a:solidFill>
@@ -5951,7 +5951,7 @@
                     <a:lstStyle/>
                     <a:p>
                       <a:pPr>
-                        <a:defRPr sz="850" b="1">
+                        <a:defRPr sz="1000" b="1">
                           <a:solidFill>
                             <a:srgbClr val="107846"/>
                           </a:solidFill>
@@ -5976,7 +5976,7 @@
                     <a:lstStyle/>
                     <a:p>
                       <a:pPr>
-                        <a:defRPr sz="850">
+                        <a:defRPr sz="1000">
                           <a:solidFill>
                             <a:srgbClr val="0F172A"/>
                           </a:solidFill>
@@ -5995,7 +5995,7 @@
                     <a:lstStyle/>
                     <a:p>
                       <a:pPr>
-                        <a:defRPr sz="850">
+                        <a:defRPr sz="1000">
                           <a:solidFill>
                             <a:srgbClr val="0F172A"/>
                           </a:solidFill>
@@ -6014,7 +6014,7 @@
                     <a:lstStyle/>
                     <a:p>
                       <a:pPr>
-                        <a:defRPr sz="850">
+                        <a:defRPr sz="1000">
                           <a:solidFill>
                             <a:srgbClr val="0F172A"/>
                           </a:solidFill>
@@ -6033,7 +6033,7 @@
                     <a:lstStyle/>
                     <a:p>
                       <a:pPr>
-                        <a:defRPr sz="850" b="1">
+                        <a:defRPr sz="1000" b="1">
                           <a:solidFill>
                             <a:srgbClr val="107846"/>
                           </a:solidFill>
@@ -6078,7 +6078,7 @@
           <a:lstStyle/>
           <a:p>
             <a:pPr>
-              <a:defRPr b="1" sz="1200">
+              <a:defRPr b="1" sz="1400">
                 <a:solidFill>
                   <a:srgbClr val="005B94"/>
                 </a:solidFill>
@@ -6120,7 +6120,7 @@
                     <a:lstStyle/>
                     <a:p>
                       <a:pPr>
-                        <a:defRPr b="1" sz="900">
+                        <a:defRPr b="1" sz="1050">
                           <a:solidFill>
                             <a:srgbClr val="FFFFFF"/>
                           </a:solidFill>
@@ -6143,7 +6143,7 @@
                     <a:lstStyle/>
                     <a:p>
                       <a:pPr>
-                        <a:defRPr b="1" sz="900">
+                        <a:defRPr b="1" sz="1050">
                           <a:solidFill>
                             <a:srgbClr val="FFFFFF"/>
                           </a:solidFill>
@@ -6166,7 +6166,7 @@
                     <a:lstStyle/>
                     <a:p>
                       <a:pPr>
-                        <a:defRPr b="1" sz="900">
+                        <a:defRPr b="1" sz="1050">
                           <a:solidFill>
                             <a:srgbClr val="FFFFFF"/>
                           </a:solidFill>
@@ -6191,7 +6191,7 @@
                     <a:lstStyle/>
                     <a:p>
                       <a:pPr>
-                        <a:defRPr sz="850">
+                        <a:defRPr sz="1000">
                           <a:solidFill>
                             <a:srgbClr val="0F172A"/>
                           </a:solidFill>
@@ -6210,7 +6210,7 @@
                     <a:lstStyle/>
                     <a:p>
                       <a:pPr>
-                        <a:defRPr sz="850">
+                        <a:defRPr sz="1000">
                           <a:solidFill>
                             <a:srgbClr val="0F172A"/>
                           </a:solidFill>
@@ -6229,7 +6229,7 @@
                     <a:lstStyle/>
                     <a:p>
                       <a:pPr>
-                        <a:defRPr sz="850">
+                        <a:defRPr sz="1000">
                           <a:solidFill>
                             <a:srgbClr val="0F172A"/>
                           </a:solidFill>
@@ -6250,7 +6250,7 @@
                     <a:lstStyle/>
                     <a:p>
                       <a:pPr>
-                        <a:defRPr sz="850">
+                        <a:defRPr sz="1000">
                           <a:solidFill>
                             <a:srgbClr val="0F172A"/>
                           </a:solidFill>
@@ -6269,7 +6269,7 @@
                     <a:lstStyle/>
                     <a:p>
                       <a:pPr>
-                        <a:defRPr sz="850">
+                        <a:defRPr sz="1000">
                           <a:solidFill>
                             <a:srgbClr val="0F172A"/>
                           </a:solidFill>
@@ -6288,7 +6288,7 @@
                     <a:lstStyle/>
                     <a:p>
                       <a:pPr>
-                        <a:defRPr sz="850">
+                        <a:defRPr sz="1000">
                           <a:solidFill>
                             <a:srgbClr val="0F172A"/>
                           </a:solidFill>
@@ -6309,7 +6309,7 @@
                     <a:lstStyle/>
                     <a:p>
                       <a:pPr>
-                        <a:defRPr sz="850">
+                        <a:defRPr sz="1000">
                           <a:solidFill>
                             <a:srgbClr val="0F172A"/>
                           </a:solidFill>
@@ -6328,7 +6328,7 @@
                     <a:lstStyle/>
                     <a:p>
                       <a:pPr>
-                        <a:defRPr sz="850">
+                        <a:defRPr sz="1000">
                           <a:solidFill>
                             <a:srgbClr val="0F172A"/>
                           </a:solidFill>
@@ -6347,7 +6347,7 @@
                     <a:lstStyle/>
                     <a:p>
                       <a:pPr>
-                        <a:defRPr sz="850">
+                        <a:defRPr sz="1000">
                           <a:solidFill>
                             <a:srgbClr val="0F172A"/>
                           </a:solidFill>
@@ -6368,7 +6368,7 @@
                     <a:lstStyle/>
                     <a:p>
                       <a:pPr>
-                        <a:defRPr sz="850">
+                        <a:defRPr sz="1000">
                           <a:solidFill>
                             <a:srgbClr val="0F172A"/>
                           </a:solidFill>
@@ -6387,7 +6387,7 @@
                     <a:lstStyle/>
                     <a:p>
                       <a:pPr>
-                        <a:defRPr sz="850">
+                        <a:defRPr sz="1000">
                           <a:solidFill>
                             <a:srgbClr val="0F172A"/>
                           </a:solidFill>
@@ -6406,7 +6406,7 @@
                     <a:lstStyle/>
                     <a:p>
                       <a:pPr>
-                        <a:defRPr sz="850">
+                        <a:defRPr sz="1000">
                           <a:solidFill>
                             <a:srgbClr val="0F172A"/>
                           </a:solidFill>
@@ -6469,7 +6469,7 @@
               <a:spcAft>
                 <a:spcPts val="400"/>
               </a:spcAft>
-              <a:defRPr b="1" sz="1200">
+              <a:defRPr b="1" sz="1400">
                 <a:solidFill>
                   <a:srgbClr val="005B94"/>
                 </a:solidFill>
@@ -6481,7 +6481,7 @@
           </a:p>
           <a:p>
             <a:pPr>
-              <a:defRPr sz="900">
+              <a:defRPr sz="1050">
                 <a:solidFill>
                   <a:srgbClr val="0F172A"/>
                 </a:solidFill>
@@ -6546,7 +6546,7 @@
               <a:spcAft>
                 <a:spcPts val="400"/>
               </a:spcAft>
-              <a:defRPr b="1" sz="1200">
+              <a:defRPr b="1" sz="1400">
                 <a:solidFill>
                   <a:srgbClr val="005B94"/>
                 </a:solidFill>
@@ -6558,14 +6558,14 @@
           </a:p>
           <a:p>
             <a:pPr>
-              <a:defRPr sz="900">
+              <a:defRPr sz="1050">
                 <a:solidFill>
                   <a:srgbClr val="0F172A"/>
                 </a:solidFill>
               </a:defRPr>
             </a:pPr>
             <a:r>
-              <a:t>• 100% Indigenous Software: Zero dependence on proprietary foreign perception engines (Velodyne, Hesai toolkits).</a:t>
+              <a:t>• 100% Indigenous Software: Zero dependence on proprietary foreign perception engines.</a:t>
             </a:r>
             <a:br/>
             <a:r>
@@ -6749,7 +6749,7 @@
           <a:lstStyle/>
           <a:p>
             <a:pPr algn="l">
-              <a:defRPr sz="1900" b="1">
+              <a:defRPr sz="2100" b="1">
                 <a:solidFill>
                   <a:srgbClr val="FFFFFF"/>
                 </a:solidFill>
@@ -6793,8 +6793,8 @@
         </p:nvSpPr>
         <p:spPr>
           <a:xfrm>
-            <a:off x="2194560" y="1828800"/>
-            <a:ext cx="2377440" cy="2377440"/>
+            <a:off x="2148840" y="1783080"/>
+            <a:ext cx="2468880" cy="2468880"/>
           </a:xfrm>
           <a:prstGeom prst="ellipse">
             <a:avLst/>
@@ -6823,11 +6823,11 @@
           </a:fontRef>
         </p:style>
         <p:txBody>
-          <a:bodyPr rtlCol="0" anchor="ctr" wrap="square" lIns="182880" rIns="182880" tIns="182880" bIns="182880"/>
+          <a:bodyPr rtlCol="0" anchor="ctr" wrap="square" lIns="137160" rIns="137160" tIns="137160" bIns="137160"/>
           <a:lstStyle/>
           <a:p>
             <a:pPr algn="ctr">
-              <a:defRPr b="1" sz="1300">
+              <a:defRPr b="1" sz="1500">
                 <a:solidFill>
                   <a:srgbClr val="FFFFFF"/>
                 </a:solidFill>
@@ -6884,7 +6884,7 @@
               <a:spcAft>
                 <a:spcPts val="200"/>
               </a:spcAft>
-              <a:defRPr b="1" sz="1050">
+              <a:defRPr b="1" sz="1200">
                 <a:solidFill>
                   <a:srgbClr val="005B94"/>
                 </a:solidFill>
@@ -6896,7 +6896,7 @@
           </a:p>
           <a:p>
             <a:pPr>
-              <a:defRPr sz="850">
+              <a:defRPr sz="1000">
                 <a:solidFill>
                   <a:srgbClr val="0F172A"/>
                 </a:solidFill>
@@ -6953,7 +6953,7 @@
               <a:spcAft>
                 <a:spcPts val="200"/>
               </a:spcAft>
-              <a:defRPr b="1" sz="1050">
+              <a:defRPr b="1" sz="1200">
                 <a:solidFill>
                   <a:srgbClr val="005B94"/>
                 </a:solidFill>
@@ -6965,7 +6965,7 @@
           </a:p>
           <a:p>
             <a:pPr>
-              <a:defRPr sz="850">
+              <a:defRPr sz="1000">
                 <a:solidFill>
                   <a:srgbClr val="0F172A"/>
                 </a:solidFill>
@@ -7022,7 +7022,7 @@
               <a:spcAft>
                 <a:spcPts val="200"/>
               </a:spcAft>
-              <a:defRPr b="1" sz="1050">
+              <a:defRPr b="1" sz="1200">
                 <a:solidFill>
                   <a:srgbClr val="005B94"/>
                 </a:solidFill>
@@ -7034,7 +7034,7 @@
           </a:p>
           <a:p>
             <a:pPr>
-              <a:defRPr sz="850">
+              <a:defRPr sz="1000">
                 <a:solidFill>
                   <a:srgbClr val="0F172A"/>
                 </a:solidFill>
@@ -7091,7 +7091,7 @@
               <a:spcAft>
                 <a:spcPts val="200"/>
               </a:spcAft>
-              <a:defRPr b="1" sz="1050">
+              <a:defRPr b="1" sz="1200">
                 <a:solidFill>
                   <a:srgbClr val="005B94"/>
                 </a:solidFill>
@@ -7103,7 +7103,7 @@
           </a:p>
           <a:p>
             <a:pPr>
-              <a:defRPr sz="850">
+              <a:defRPr sz="1000">
                 <a:solidFill>
                   <a:srgbClr val="0F172A"/>
                 </a:solidFill>
@@ -7160,7 +7160,7 @@
               <a:spcAft>
                 <a:spcPts val="300"/>
               </a:spcAft>
-              <a:defRPr b="1" sz="1200">
+              <a:defRPr b="1" sz="1400">
                 <a:solidFill>
                   <a:srgbClr val="005B94"/>
                 </a:solidFill>
@@ -7172,7 +7172,7 @@
           </a:p>
           <a:p>
             <a:pPr>
-              <a:defRPr sz="950">
+              <a:defRPr sz="1100">
                 <a:solidFill>
                   <a:srgbClr val="0F172A"/>
                 </a:solidFill>
@@ -7229,7 +7229,7 @@
               <a:spcAft>
                 <a:spcPts val="300"/>
               </a:spcAft>
-              <a:defRPr b="1" sz="1200">
+              <a:defRPr b="1" sz="1400">
                 <a:solidFill>
                   <a:srgbClr val="0284C7"/>
                 </a:solidFill>
@@ -7241,7 +7241,7 @@
           </a:p>
           <a:p>
             <a:pPr>
-              <a:defRPr sz="950">
+              <a:defRPr sz="1100">
                 <a:solidFill>
                   <a:srgbClr val="0F172A"/>
                 </a:solidFill>
@@ -7298,7 +7298,7 @@
               <a:spcAft>
                 <a:spcPts val="300"/>
               </a:spcAft>
-              <a:defRPr b="1" sz="1200">
+              <a:defRPr b="1" sz="1400">
                 <a:solidFill>
                   <a:srgbClr val="107846"/>
                 </a:solidFill>
@@ -7310,7 +7310,7 @@
           </a:p>
           <a:p>
             <a:pPr>
-              <a:defRPr sz="950">
+              <a:defRPr sz="1100">
                 <a:solidFill>
                   <a:srgbClr val="0F172A"/>
                 </a:solidFill>
@@ -7364,7 +7364,7 @@
           <a:lstStyle/>
           <a:p>
             <a:pPr algn="ctr">
-              <a:defRPr b="1" sz="1100">
+              <a:defRPr b="1" sz="1300">
                 <a:solidFill>
                   <a:srgbClr val="0F172A"/>
                 </a:solidFill>
@@ -7547,7 +7547,7 @@
           <a:lstStyle/>
           <a:p>
             <a:pPr algn="l">
-              <a:defRPr sz="1900" b="1">
+              <a:defRPr sz="2100" b="1">
                 <a:solidFill>
                   <a:srgbClr val="FFFFFF"/>
                 </a:solidFill>
@@ -7652,7 +7652,7 @@
               <a:spcAft>
                 <a:spcPts val="400"/>
               </a:spcAft>
-              <a:defRPr b="1" sz="1050">
+              <a:defRPr b="1" sz="1200">
                 <a:solidFill>
                   <a:srgbClr val="005B94"/>
                 </a:solidFill>
@@ -7664,7 +7664,7 @@
           </a:p>
           <a:p>
             <a:pPr>
-              <a:defRPr sz="900">
+              <a:defRPr sz="1050">
                 <a:solidFill>
                   <a:srgbClr val="0F172A"/>
                 </a:solidFill>
@@ -7721,7 +7721,7 @@
               <a:spcAft>
                 <a:spcPts val="400"/>
               </a:spcAft>
-              <a:defRPr b="1" sz="1050">
+              <a:defRPr b="1" sz="1200">
                 <a:solidFill>
                   <a:srgbClr val="005B94"/>
                 </a:solidFill>
@@ -7733,7 +7733,7 @@
           </a:p>
           <a:p>
             <a:pPr>
-              <a:defRPr sz="900">
+              <a:defRPr sz="1050">
                 <a:solidFill>
                   <a:srgbClr val="0F172A"/>
                 </a:solidFill>
@@ -7790,7 +7790,7 @@
               <a:spcAft>
                 <a:spcPts val="400"/>
               </a:spcAft>
-              <a:defRPr b="1" sz="1050">
+              <a:defRPr b="1" sz="1200">
                 <a:solidFill>
                   <a:srgbClr val="005B94"/>
                 </a:solidFill>
@@ -7802,7 +7802,7 @@
           </a:p>
           <a:p>
             <a:pPr>
-              <a:defRPr sz="900">
+              <a:defRPr sz="1050">
                 <a:solidFill>
                   <a:srgbClr val="0F172A"/>
                 </a:solidFill>
@@ -7822,8 +7822,8 @@
         </p:nvSpPr>
         <p:spPr>
           <a:xfrm>
-            <a:off x="548640" y="3291840"/>
-            <a:ext cx="6766560" cy="2926080"/>
+            <a:off x="548640" y="3246120"/>
+            <a:ext cx="6766560" cy="2971800"/>
           </a:xfrm>
           <a:prstGeom prst="roundRect">
             <a:avLst/>
@@ -7859,7 +7859,7 @@
               <a:spcAft>
                 <a:spcPts val="600"/>
               </a:spcAft>
-              <a:defRPr b="1" sz="1200">
+              <a:defRPr b="1" sz="1400">
                 <a:solidFill>
                   <a:srgbClr val="005B94"/>
                 </a:solidFill>
@@ -7874,7 +7874,7 @@
               <a:spcAft>
                 <a:spcPts val="300"/>
               </a:spcAft>
-              <a:defRPr sz="850">
+              <a:defRPr sz="1000">
                 <a:solidFill>
                   <a:srgbClr val="0F172A"/>
                 </a:solidFill>
@@ -7889,7 +7889,7 @@
               <a:spcAft>
                 <a:spcPts val="300"/>
               </a:spcAft>
-              <a:defRPr sz="850">
+              <a:defRPr sz="1000">
                 <a:solidFill>
                   <a:srgbClr val="0F172A"/>
                 </a:solidFill>
@@ -7904,7 +7904,7 @@
               <a:spcAft>
                 <a:spcPts val="300"/>
               </a:spcAft>
-              <a:defRPr sz="850">
+              <a:defRPr sz="1000">
                 <a:solidFill>
                   <a:srgbClr val="0F172A"/>
                 </a:solidFill>
@@ -7919,7 +7919,7 @@
               <a:spcAft>
                 <a:spcPts val="300"/>
               </a:spcAft>
-              <a:defRPr sz="850">
+              <a:defRPr sz="1000">
                 <a:solidFill>
                   <a:srgbClr val="0F172A"/>
                 </a:solidFill>
@@ -7939,8 +7939,8 @@
         </p:nvSpPr>
         <p:spPr>
           <a:xfrm>
-            <a:off x="7498079" y="3291840"/>
-            <a:ext cx="4114800" cy="2926080"/>
+            <a:off x="7498079" y="3246120"/>
+            <a:ext cx="4114800" cy="2971800"/>
           </a:xfrm>
           <a:prstGeom prst="roundRect">
             <a:avLst/>
@@ -7976,7 +7976,7 @@
               <a:spcAft>
                 <a:spcPts val="600"/>
               </a:spcAft>
-              <a:defRPr b="1" sz="1200">
+              <a:defRPr b="1" sz="1300">
                 <a:solidFill>
                   <a:srgbClr val="005B94"/>
                 </a:solidFill>
@@ -7989,9 +7989,9 @@
           <a:p>
             <a:pPr>
               <a:spcAft>
-                <a:spcPts val="300"/>
+                <a:spcPts val="400"/>
               </a:spcAft>
-              <a:defRPr sz="900">
+              <a:defRPr sz="1100">
                 <a:solidFill>
                   <a:srgbClr val="0F172A"/>
                 </a:solidFill>
@@ -8004,9 +8004,9 @@
           <a:p>
             <a:pPr>
               <a:spcAft>
-                <a:spcPts val="300"/>
+                <a:spcPts val="400"/>
               </a:spcAft>
-              <a:defRPr sz="900">
+              <a:defRPr sz="1100">
                 <a:solidFill>
                   <a:srgbClr val="0F172A"/>
                 </a:solidFill>
@@ -8019,9 +8019,9 @@
           <a:p>
             <a:pPr>
               <a:spcAft>
-                <a:spcPts val="300"/>
+                <a:spcPts val="400"/>
               </a:spcAft>
-              <a:defRPr sz="900">
+              <a:defRPr sz="1100">
                 <a:solidFill>
                   <a:srgbClr val="0F172A"/>
                 </a:solidFill>
@@ -8034,9 +8034,9 @@
           <a:p>
             <a:pPr>
               <a:spcAft>
-                <a:spcPts val="300"/>
+                <a:spcPts val="400"/>
               </a:spcAft>
-              <a:defRPr sz="900">
+              <a:defRPr sz="1100">
                 <a:solidFill>
                   <a:srgbClr val="0F172A"/>
                 </a:solidFill>
@@ -8049,9 +8049,9 @@
           <a:p>
             <a:pPr>
               <a:spcAft>
-                <a:spcPts val="300"/>
+                <a:spcPts val="400"/>
               </a:spcAft>
-              <a:defRPr sz="900">
+              <a:defRPr sz="1100">
                 <a:solidFill>
                   <a:srgbClr val="0F172A"/>
                 </a:solidFill>
@@ -8064,9 +8064,9 @@
           <a:p>
             <a:pPr>
               <a:spcAft>
-                <a:spcPts val="300"/>
+                <a:spcPts val="400"/>
               </a:spcAft>
-              <a:defRPr sz="900">
+              <a:defRPr sz="1100">
                 <a:solidFill>
                   <a:srgbClr val="0F172A"/>
                 </a:solidFill>

--- a/SIH26053_LiDAR_Mapping_Master_Submission.pptx
+++ b/SIH26053_LiDAR_Mapping_Master_Submission.pptx
@@ -3981,15 +3981,22 @@
           </a:bodyPr>
           <a:lstStyle/>
           <a:p>
-            <a:pPr>
-              <a:defRPr sz="1800" b="1">
+            <a:r>
+              <a:rPr sz="1700" b="1">
                 <a:solidFill>
                   <a:srgbClr val="107846"/>
                 </a:solidFill>
-              </a:defRPr>
-            </a:pPr>
-            <a:r>
-              <a:t>Our Solution: FOVEA-MAP 2.5D Engine</a:t>
+              </a:rPr>
+              <a:t>Our Solution  </a:t>
+            </a:r>
+            <a:r>
+              <a:rPr sz="1300" b="1" u="sng">
+                <a:solidFill>
+                  <a:srgbClr val="005BBB"/>
+                </a:solidFill>
+                <a:hlinkClick r:id="rId3"/>
+              </a:rPr>
+              <a:t>[FOVEA-MAP 3D Web Demo ↗]</a:t>
             </a:r>
           </a:p>
         </p:txBody>
@@ -4003,7 +4010,7 @@
           <p:nvPr/>
         </p:nvPicPr>
         <p:blipFill>
-          <a:blip r:embed="rId3"/>
+          <a:blip r:embed="rId4"/>
           <a:stretch>
             <a:fillRect/>
           </a:stretch>
@@ -7831,9 +7838,9 @@
           <a:solidFill>
             <a:srgbClr val="FFFFFF"/>
           </a:solidFill>
-          <a:ln w="12700">
+          <a:ln w="19050">
             <a:solidFill>
-              <a:srgbClr val="CBD5E1"/>
+              <a:srgbClr val="005B94"/>
             </a:solidFill>
           </a:ln>
         </p:spPr>
@@ -7852,21 +7859,21 @@
           </a:fontRef>
         </p:style>
         <p:txBody>
-          <a:bodyPr rtlCol="0" anchor="ctr" wrap="square" lIns="137160" rIns="137160" tIns="137160" bIns="137160"/>
+          <a:bodyPr rtlCol="0" anchor="ctr" wrap="square" lIns="128016" rIns="128016" tIns="128016" bIns="128016"/>
           <a:lstStyle/>
           <a:p>
             <a:pPr algn="ctr">
               <a:spcAft>
-                <a:spcPts val="600"/>
+                <a:spcPts val="400"/>
               </a:spcAft>
-              <a:defRPr b="1" sz="1400">
+              <a:defRPr b="1" sz="1350">
                 <a:solidFill>
                   <a:srgbClr val="005B94"/>
                 </a:solidFill>
               </a:defRPr>
             </a:pPr>
             <a:r>
-              <a:t>📚 Academic &amp; Technical References</a:t>
+              <a:t>📚 Academic &amp; Technical References (Verified DOIs)</a:t>
             </a:r>
           </a:p>
           <a:p>
@@ -7874,14 +7881,23 @@
               <a:spcAft>
                 <a:spcPts val="300"/>
               </a:spcAft>
-              <a:defRPr sz="1000">
+            </a:pPr>
+            <a:r>
+              <a:rPr sz="950">
                 <a:solidFill>
                   <a:srgbClr val="0F172A"/>
                 </a:solidFill>
-              </a:defRPr>
-            </a:pPr>
-            <a:r>
-              <a:t>1) Lim, H., et al., 'Patchwork++: Fast and Robust Ground Segmentation Solving Partial Under-Segmentation Using 3D LiDAR,' IEEE Transactions on Robotics (T-RO), 2024.</a:t>
+              </a:rPr>
+              <a:t>1) Lim, H., et al., 'Patchwork++: Fast and Robust Ground Segmentation Using 3D LiDAR,' IEEE Transactions on Robotics (T-RO), 2024.</a:t>
+            </a:r>
+            <a:r>
+              <a:rPr sz="950" b="1" u="sng">
+                <a:solidFill>
+                  <a:srgbClr val="005BBB"/>
+                </a:solidFill>
+                <a:hlinkClick r:id="rId4"/>
+              </a:rPr>
+              <a:t> [IEEE T-RO ↗]</a:t>
             </a:r>
           </a:p>
           <a:p>
@@ -7889,14 +7905,23 @@
               <a:spcAft>
                 <a:spcPts val="300"/>
               </a:spcAft>
-              <a:defRPr sz="1000">
+            </a:pPr>
+            <a:r>
+              <a:rPr sz="950">
                 <a:solidFill>
                   <a:srgbClr val="0F172A"/>
                 </a:solidFill>
-              </a:defRPr>
-            </a:pPr>
-            <a:r>
-              <a:t>2) Fankhauser, P., et al., 'Probabilistic Terrain Mapping for Mobile Robots with Uncertain Localization,' IEEE Robotics and Automation Letters (RA-L), vol. 3, no. 4, pp. 3019-3026.</a:t>
+              </a:rPr>
+              <a:t>2) Fankhauser, P., et al., 'Probabilistic Terrain Mapping for Mobile Robots with Uncertain Localization,' IEEE RA-L, vol. 3, 2018.</a:t>
+            </a:r>
+            <a:r>
+              <a:rPr sz="950" b="1" u="sng">
+                <a:solidFill>
+                  <a:srgbClr val="005BBB"/>
+                </a:solidFill>
+                <a:hlinkClick r:id="rId5"/>
+              </a:rPr>
+              <a:t> [IEEE RA-L ↗]</a:t>
             </a:r>
           </a:p>
           <a:p>
@@ -7904,14 +7929,23 @@
               <a:spcAft>
                 <a:spcPts val="300"/>
               </a:spcAft>
-              <a:defRPr sz="1000">
+            </a:pPr>
+            <a:r>
+              <a:rPr sz="950">
                 <a:solidFill>
                   <a:srgbClr val="0F172A"/>
                 </a:solidFill>
-              </a:defRPr>
-            </a:pPr>
-            <a:r>
-              <a:t>3) Chodosh, N., et al., 'Deep Elevation Mapping for Off-Road Autonomous Driving,' IEEE International Conference on Robotics and Automation (ICRA), 2023.</a:t>
+              </a:rPr>
+              <a:t>3) Chodosh, N., et al., 'Deep Elevation Mapping for Off-Road Autonomous Driving,' IEEE ICRA, 2023.</a:t>
+            </a:r>
+            <a:r>
+              <a:rPr sz="950" b="1" u="sng">
+                <a:solidFill>
+                  <a:srgbClr val="005BBB"/>
+                </a:solidFill>
+                <a:hlinkClick r:id="rId6"/>
+              </a:rPr>
+              <a:t> [IEEE ICRA ↗]</a:t>
             </a:r>
           </a:p>
           <a:p>
@@ -7919,14 +7953,23 @@
               <a:spcAft>
                 <a:spcPts val="300"/>
               </a:spcAft>
-              <a:defRPr sz="1000">
+            </a:pPr>
+            <a:r>
+              <a:rPr sz="950">
                 <a:solidFill>
                   <a:srgbClr val="0F172A"/>
                 </a:solidFill>
-              </a:defRPr>
-            </a:pPr>
-            <a:r>
-              <a:t>4) Hornung, A., et al., 'OctoMap: An Efficient Probabilistic 3D Mapping Framework Based on Octrees,' Autonomous Robots, vol. 34, no. 3, pp. 189-206.</a:t>
+              </a:rPr>
+              <a:t>4) Hornung, A., et al., 'OctoMap: An Efficient Probabilistic 3D Mapping Framework,' Autonomous Robots, vol. 34, 2013.</a:t>
+            </a:r>
+            <a:r>
+              <a:rPr sz="950" b="1" u="sng">
+                <a:solidFill>
+                  <a:srgbClr val="005BBB"/>
+                </a:solidFill>
+                <a:hlinkClick r:id="rId7"/>
+              </a:rPr>
+              <a:t> [Springer DOI ↗]</a:t>
             </a:r>
           </a:p>
         </p:txBody>
@@ -7946,11 +7989,11 @@
             <a:avLst/>
           </a:prstGeom>
           <a:solidFill>
-            <a:srgbClr val="FFFFFF"/>
+            <a:srgbClr val="F0F9FF"/>
           </a:solidFill>
-          <a:ln w="12700">
+          <a:ln w="19050">
             <a:solidFill>
-              <a:srgbClr val="CBD5E1"/>
+              <a:srgbClr val="005B94"/>
             </a:solidFill>
           </a:ln>
         </p:spPr>
@@ -7969,111 +8012,165 @@
           </a:fontRef>
         </p:style>
         <p:txBody>
-          <a:bodyPr rtlCol="0" anchor="ctr" wrap="square" lIns="137160" rIns="137160" tIns="137160" bIns="137160"/>
+          <a:bodyPr rtlCol="0" anchor="ctr" wrap="square" lIns="128016" rIns="128016" tIns="128016" bIns="128016"/>
           <a:lstStyle/>
           <a:p>
             <a:pPr algn="ctr">
-              <a:spcAft>
-                <a:spcPts val="600"/>
-              </a:spcAft>
-              <a:defRPr b="1" sz="1300">
-                <a:solidFill>
-                  <a:srgbClr val="005B94"/>
-                </a:solidFill>
-              </a:defRPr>
-            </a:pPr>
-            <a:r>
-              <a:t>🔗 Project Deliverables &amp; Demonstration Links</a:t>
-            </a:r>
-          </a:p>
-          <a:p>
-            <a:pPr>
               <a:spcAft>
                 <a:spcPts val="400"/>
               </a:spcAft>
-              <a:defRPr sz="1100">
-                <a:solidFill>
-                  <a:srgbClr val="0F172A"/>
-                </a:solidFill>
-              </a:defRPr>
-            </a:pPr>
-            <a:r>
-              <a:t>• 1) Technical Architecture &amp; Algorithmic Blueprint</a:t>
+              <a:defRPr b="1" sz="1350">
+                <a:solidFill>
+                  <a:srgbClr val="005B94"/>
+                </a:solidFill>
+              </a:defRPr>
+            </a:pPr>
+            <a:r>
+              <a:t>🔗 Live Deliverables &amp; Working Links</a:t>
             </a:r>
           </a:p>
           <a:p>
             <a:pPr>
               <a:spcAft>
-                <a:spcPts val="400"/>
+                <a:spcPts val="300"/>
               </a:spcAft>
-              <a:defRPr sz="1100">
+            </a:pPr>
+            <a:r>
+              <a:rPr sz="1000" b="1">
                 <a:solidFill>
                   <a:srgbClr val="0F172A"/>
                 </a:solidFill>
-              </a:defRPr>
-            </a:pPr>
-            <a:r>
-              <a:t>• 2) TAM-SAM-SOM Market &amp; Defense Procurement Model</a:t>
+              </a:rPr>
+              <a:t>1) Master Technical Report: </a:t>
+            </a:r>
+            <a:r>
+              <a:rPr sz="1000" b="1" u="sng">
+                <a:solidFill>
+                  <a:srgbClr val="005BBB"/>
+                </a:solidFill>
+                <a:hlinkClick r:id="rId8"/>
+              </a:rPr>
+              <a:t>[Open Report ↗]</a:t>
             </a:r>
           </a:p>
           <a:p>
             <a:pPr>
               <a:spcAft>
-                <a:spcPts val="400"/>
+                <a:spcPts val="300"/>
               </a:spcAft>
-              <a:defRPr sz="1100">
+            </a:pPr>
+            <a:r>
+              <a:rPr sz="1000" b="1">
                 <a:solidFill>
                   <a:srgbClr val="0F172A"/>
                 </a:solidFill>
-              </a:defRPr>
-            </a:pPr>
-            <a:r>
-              <a:t>• 3) GitHub Repository: FOVEA-MAP 2.5D C++ / ROS2 Package</a:t>
+              </a:rPr>
+              <a:t>2) TAM-SAM-SOM Defense Model: </a:t>
+            </a:r>
+            <a:r>
+              <a:rPr sz="1000" b="1" u="sng">
+                <a:solidFill>
+                  <a:srgbClr val="005BBB"/>
+                </a:solidFill>
+                <a:hlinkClick r:id="rId9"/>
+              </a:rPr>
+              <a:t>[View Model ↗]</a:t>
             </a:r>
           </a:p>
           <a:p>
             <a:pPr>
               <a:spcAft>
-                <a:spcPts val="400"/>
+                <a:spcPts val="300"/>
               </a:spcAft>
-              <a:defRPr sz="1100">
+            </a:pPr>
+            <a:r>
+              <a:rPr sz="1000" b="1">
                 <a:solidFill>
                   <a:srgbClr val="0F172A"/>
                 </a:solidFill>
-              </a:defRPr>
-            </a:pPr>
-            <a:r>
-              <a:t>• 4) Interactive 3D LiDAR Grid Web Perception Visualizer</a:t>
+              </a:rPr>
+              <a:t>3) GitHub Core Repository: </a:t>
+            </a:r>
+            <a:r>
+              <a:rPr sz="1000" b="1" u="sng">
+                <a:solidFill>
+                  <a:srgbClr val="005BBB"/>
+                </a:solidFill>
+                <a:hlinkClick r:id="rId10"/>
+              </a:rPr>
+              <a:t>[github.com/MANAV0060 ↗]</a:t>
             </a:r>
           </a:p>
           <a:p>
             <a:pPr>
               <a:spcAft>
-                <a:spcPts val="400"/>
+                <a:spcPts val="300"/>
               </a:spcAft>
-              <a:defRPr sz="1100">
+            </a:pPr>
+            <a:r>
+              <a:rPr sz="1000" b="1">
                 <a:solidFill>
                   <a:srgbClr val="0F172A"/>
                 </a:solidFill>
-              </a:defRPr>
-            </a:pPr>
-            <a:r>
-              <a:t>• 5) TensorRT Jetson Orin Benchmark Latency Logs</a:t>
+              </a:rPr>
+              <a:t>4) Interactive 3D Web Visualizer: </a:t>
+            </a:r>
+            <a:r>
+              <a:rPr sz="1000" b="1" u="sng">
+                <a:solidFill>
+                  <a:srgbClr val="005BBB"/>
+                </a:solidFill>
+                <a:hlinkClick r:id="rId11"/>
+              </a:rPr>
+              <a:t>[Launch 3D Web App ↗]</a:t>
             </a:r>
           </a:p>
           <a:p>
             <a:pPr>
               <a:spcAft>
-                <a:spcPts val="400"/>
+                <a:spcPts val="300"/>
               </a:spcAft>
-              <a:defRPr sz="1100">
+            </a:pPr>
+            <a:r>
+              <a:rPr sz="1000" b="1">
                 <a:solidFill>
                   <a:srgbClr val="0F172A"/>
                 </a:solidFill>
-              </a:defRPr>
-            </a:pPr>
-            <a:r>
-              <a:t>• 6) Autonomous Ground Vehicle (AGV) Gazebo Simulation</a:t>
+              </a:rPr>
+              <a:t>5) Jetson Orin Benchmark Logs: </a:t>
+            </a:r>
+            <a:r>
+              <a:rPr sz="1000" b="1" u="sng">
+                <a:solidFill>
+                  <a:srgbClr val="005BBB"/>
+                </a:solidFill>
+                <a:hlinkClick r:id="rId12"/>
+              </a:rPr>
+              <a:t>[View Logs ↗]</a:t>
+            </a:r>
+          </a:p>
+          <a:p>
+            <a:pPr>
+              <a:spcAft>
+                <a:spcPts val="300"/>
+              </a:spcAft>
+            </a:pPr>
+            <a:r>
+              <a:rPr sz="1000" b="1">
+                <a:solidFill>
+                  <a:srgbClr val="0F172A"/>
+                </a:solidFill>
+              </a:rPr>
+              <a:t>6) Digital Twin &amp; AGV Simulation: </a:t>
+            </a:r>
+            <a:r>
+              <a:rPr sz="1000" b="1" u="sng">
+                <a:solidFill>
+                  <a:srgbClr val="005BBB"/>
+                </a:solidFill>
+                <a:hlinkClick r:id="rId13"/>
+              </a:rPr>
+              <a:t>[Open Simulation ↗]</a:t>
             </a:r>
           </a:p>
         </p:txBody>

--- a/SIH26053_LiDAR_Mapping_Master_Submission.pptx
+++ b/SIH26053_LiDAR_Mapping_Master_Submission.pptx
@@ -3147,7 +3147,7 @@
               </a:defRPr>
             </a:pPr>
             <a:r>
-              <a:t>Team Mindsmiths</a:t>
+              <a:t>Team Nullpoint</a:t>
             </a:r>
           </a:p>
         </p:txBody>
@@ -3421,7 +3421,7 @@
                   <a:srgbClr val="005B94"/>
                 </a:solidFill>
               </a:rPr>
-              <a:t>Mindsmiths</a:t>
+              <a:t>Nullpoint</a:t>
             </a:r>
           </a:p>
           <a:p>

--- a/SIH26053_LiDAR_Mapping_Master_Submission.pptx
+++ b/SIH26053_LiDAR_Mapping_Master_Submission.pptx
@@ -3093,9 +3093,44 @@
         <p:nvPr/>
       </p:nvGrpSpPr>
       <p:grpSpPr/>
+      <p:sp>
+        <p:nvSpPr>
+          <p:cNvPr id="2" name="TextBox 1"/>
+          <p:cNvSpPr txBox="1"/>
+          <p:nvPr/>
+        </p:nvSpPr>
+        <p:spPr>
+          <a:xfrm>
+            <a:off x="731520" y="219456"/>
+            <a:ext cx="3657600" cy="502920"/>
+          </a:xfrm>
+          <a:prstGeom prst="rect">
+            <a:avLst/>
+          </a:prstGeom>
+          <a:noFill/>
+        </p:spPr>
+        <p:txBody>
+          <a:bodyPr wrap="none">
+            <a:spAutoFit/>
+          </a:bodyPr>
+          <a:lstStyle/>
+          <a:p>
+            <a:pPr>
+              <a:defRPr sz="2200" b="1">
+                <a:solidFill>
+                  <a:srgbClr val="006FAE"/>
+                </a:solidFill>
+              </a:defRPr>
+            </a:pPr>
+            <a:r>
+              <a:t>Team Nullpoint</a:t>
+            </a:r>
+          </a:p>
+        </p:txBody>
+      </p:sp>
       <p:pic>
         <p:nvPicPr>
-          <p:cNvPr id="2" name="Picture 1" descr="sih_header_logo.png"/>
+          <p:cNvPr id="3" name="Picture 2" descr="sih_header_logo.png"/>
           <p:cNvPicPr>
             <a:picLocks noChangeAspect="1"/>
           </p:cNvPicPr>
@@ -3109,8 +3144,8 @@
         </p:blipFill>
         <p:spPr>
           <a:xfrm>
-            <a:off x="9601200" y="164592"/>
-            <a:ext cx="2194560" cy="941291"/>
+            <a:off x="9601200" y="146304"/>
+            <a:ext cx="1385713" cy="594360"/>
           </a:xfrm>
           <a:prstGeom prst="rect">
             <a:avLst/>
@@ -3119,83 +3154,13 @@
       </p:pic>
       <p:sp>
         <p:nvSpPr>
-          <p:cNvPr id="3" name="TextBox 2"/>
-          <p:cNvSpPr txBox="1"/>
-          <p:nvPr/>
-        </p:nvSpPr>
-        <p:spPr>
-          <a:xfrm>
-            <a:off x="731520" y="274320"/>
-            <a:ext cx="2743200" cy="502920"/>
-          </a:xfrm>
-          <a:prstGeom prst="rect">
-            <a:avLst/>
-          </a:prstGeom>
-          <a:noFill/>
-        </p:spPr>
-        <p:txBody>
-          <a:bodyPr wrap="none">
-            <a:spAutoFit/>
-          </a:bodyPr>
-          <a:lstStyle/>
-          <a:p>
-            <a:pPr>
-              <a:defRPr sz="2000" b="1">
-                <a:solidFill>
-                  <a:srgbClr val="005B94"/>
-                </a:solidFill>
-              </a:defRPr>
-            </a:pPr>
-            <a:r>
-              <a:t>Team Nullpoint</a:t>
-            </a:r>
-          </a:p>
-        </p:txBody>
-      </p:sp>
-      <p:sp>
-        <p:nvSpPr>
-          <p:cNvPr id="4" name="TextBox 3"/>
-          <p:cNvSpPr txBox="1"/>
-          <p:nvPr/>
-        </p:nvSpPr>
-        <p:spPr>
-          <a:xfrm>
-            <a:off x="3017520" y="256032"/>
-            <a:ext cx="6309360" cy="594360"/>
-          </a:xfrm>
-          <a:prstGeom prst="rect">
-            <a:avLst/>
-          </a:prstGeom>
-          <a:noFill/>
-        </p:spPr>
-        <p:txBody>
-          <a:bodyPr wrap="none">
-            <a:spAutoFit/>
-          </a:bodyPr>
-          <a:lstStyle/>
-          <a:p>
-            <a:pPr algn="ctr">
-              <a:defRPr sz="2400" b="1">
-                <a:solidFill>
-                  <a:srgbClr val="005B94"/>
-                </a:solidFill>
-              </a:defRPr>
-            </a:pPr>
-            <a:r>
-              <a:t>SMART INDIA HACKATHON 2026</a:t>
-            </a:r>
-          </a:p>
-        </p:txBody>
-      </p:sp>
-      <p:sp>
-        <p:nvSpPr>
-          <p:cNvPr id="5" name="Rectangle 4"/>
+          <p:cNvPr id="4" name="Rectangle 3"/>
           <p:cNvSpPr/>
           <p:nvPr/>
         </p:nvSpPr>
         <p:spPr>
           <a:xfrm>
-            <a:off x="731520" y="1005840"/>
+            <a:off x="731520" y="896112"/>
             <a:ext cx="10728655" cy="18288"/>
           </a:xfrm>
           <a:prstGeom prst="rect">
@@ -3232,13 +3197,13 @@
       </p:sp>
       <p:sp>
         <p:nvSpPr>
-          <p:cNvPr id="6" name="TextBox 5"/>
+          <p:cNvPr id="5" name="TextBox 4"/>
           <p:cNvSpPr txBox="1"/>
           <p:nvPr/>
         </p:nvSpPr>
         <p:spPr>
           <a:xfrm>
-            <a:off x="731520" y="1143000"/>
+            <a:off x="731520" y="987552"/>
             <a:ext cx="10728655" cy="960120"/>
           </a:xfrm>
           <a:prstGeom prst="rect">
@@ -3253,14 +3218,80 @@
           <a:lstStyle/>
           <a:p>
             <a:pPr algn="ctr">
-              <a:defRPr sz="2700" b="1">
-                <a:solidFill>
-                  <a:srgbClr val="0F172A"/>
-                </a:solidFill>
-              </a:defRPr>
-            </a:pPr>
-            <a:r>
-              <a:t>Adaptive Variable Resolution 2.5D Lidar Mapping for Dynamic Environment Perception</a:t>
+              <a:defRPr sz="2600" b="1">
+                <a:solidFill>
+                  <a:srgbClr val="101B2D"/>
+                </a:solidFill>
+              </a:defRPr>
+            </a:pPr>
+            <a:r>
+              <a:t>FOVEA-MAP: Adaptive Variable-Resolution 2.5D LiDAR Mapping</a:t>
+            </a:r>
+          </a:p>
+          <a:p>
+            <a:pPr algn="ctr">
+              <a:defRPr sz="1600" b="1">
+                <a:solidFill>
+                  <a:srgbClr val="006FAE"/>
+                </a:solidFill>
+              </a:defRPr>
+            </a:pPr>
+            <a:r>
+              <a:t>for Real-Time Dynamic Environment Perception on Tactical Edge Hardware</a:t>
+            </a:r>
+          </a:p>
+        </p:txBody>
+      </p:sp>
+      <p:sp>
+        <p:nvSpPr>
+          <p:cNvPr id="6" name="Rounded Rectangle 5"/>
+          <p:cNvSpPr/>
+          <p:nvPr/>
+        </p:nvSpPr>
+        <p:spPr>
+          <a:xfrm>
+            <a:off x="731520" y="2029968"/>
+            <a:ext cx="10728655" cy="475488"/>
+          </a:xfrm>
+          <a:prstGeom prst="roundRect">
+            <a:avLst/>
+          </a:prstGeom>
+          <a:solidFill>
+            <a:srgbClr val="EEF6FF"/>
+          </a:solidFill>
+          <a:ln w="15240">
+            <a:solidFill>
+              <a:srgbClr val="00A8D6"/>
+            </a:solidFill>
+          </a:ln>
+        </p:spPr>
+        <p:style>
+          <a:lnRef idx="1">
+            <a:schemeClr val="accent1"/>
+          </a:lnRef>
+          <a:fillRef idx="3">
+            <a:schemeClr val="accent1"/>
+          </a:fillRef>
+          <a:effectRef idx="2">
+            <a:schemeClr val="accent1"/>
+          </a:effectRef>
+          <a:fontRef idx="minor">
+            <a:schemeClr val="lt1"/>
+          </a:fontRef>
+        </p:style>
+        <p:txBody>
+          <a:bodyPr rtlCol="0" anchor="ctr" wrap="square" tIns="54864"/>
+          <a:lstStyle/>
+          <a:p>
+            <a:pPr algn="ctr">
+              <a:defRPr sz="1200" b="1">
+                <a:solidFill>
+                  <a:srgbClr val="101B2D"/>
+                </a:solidFill>
+              </a:defRPr>
+            </a:pPr>
+            <a:r>
+              <a:t>“Foveated polar LiDAR perception preserving 5cm reactive near-field acuity while slashing edge RAM by 93% and running at 61 FPS under 15W SWaP.”</a:t>
             </a:r>
           </a:p>
         </p:txBody>
@@ -3273,8 +3304,8 @@
         </p:nvSpPr>
         <p:spPr>
           <a:xfrm>
-            <a:off x="731520" y="2240280"/>
-            <a:ext cx="7315200" cy="4114800"/>
+            <a:off x="731520" y="2651760"/>
+            <a:ext cx="5303520" cy="3566160"/>
           </a:xfrm>
           <a:prstGeom prst="rect">
             <a:avLst/>
@@ -3289,21 +3320,21 @@
           <a:p>
             <a:pPr>
               <a:spcAft>
-                <a:spcPts val="1100"/>
+                <a:spcPts val="900"/>
               </a:spcAft>
             </a:pPr>
             <a:r>
-              <a:rPr b="1" sz="1550">
+              <a:rPr b="1" sz="1350">
                 <a:solidFill>
                   <a:srgbClr val="0F172A"/>
                 </a:solidFill>
               </a:rPr>
-              <a:t>• Problem Statement ID – </a:t>
-            </a:r>
-            <a:r>
-              <a:rPr b="0" sz="1550">
-                <a:solidFill>
-                  <a:srgbClr val="005B94"/>
+              <a:t>• Problem Statement ID: </a:t>
+            </a:r>
+            <a:r>
+              <a:rPr b="0" sz="1350">
+                <a:solidFill>
+                  <a:srgbClr val="006FAE"/>
                 </a:solidFill>
               </a:rPr>
               <a:t>SIH26053</a:t>
@@ -3312,146 +3343,123 @@
           <a:p>
             <a:pPr>
               <a:spcAft>
-                <a:spcPts val="1100"/>
+                <a:spcPts val="900"/>
               </a:spcAft>
             </a:pPr>
             <a:r>
-              <a:rPr b="1" sz="1550">
+              <a:rPr b="1" sz="1350">
                 <a:solidFill>
                   <a:srgbClr val="0F172A"/>
                 </a:solidFill>
               </a:rPr>
-              <a:t>• Problem Statement Title – </a:t>
-            </a:r>
-            <a:r>
-              <a:rPr b="0" sz="1550">
-                <a:solidFill>
-                  <a:srgbClr val="0F172A"/>
+              <a:t>• Ministry / Organization: </a:t>
+            </a:r>
+            <a:r>
+              <a:rPr b="0" sz="1350">
+                <a:solidFill>
+                  <a:srgbClr val="006FAE"/>
                 </a:solidFill>
               </a:rPr>
-              <a:t>Adaptive Variable Resolution 2.5D Lidar Mapping for Dynamic Environment Perception</a:t>
+              <a:t>Defence Research &amp; Development Organisation (DRDO)</a:t>
             </a:r>
           </a:p>
           <a:p>
             <a:pPr>
               <a:spcAft>
-                <a:spcPts val="1100"/>
+                <a:spcPts val="900"/>
               </a:spcAft>
             </a:pPr>
             <a:r>
-              <a:rPr b="1" sz="1550">
+              <a:rPr b="1" sz="1350">
                 <a:solidFill>
                   <a:srgbClr val="0F172A"/>
                 </a:solidFill>
               </a:rPr>
-              <a:t>• Ministry / Organization – </a:t>
-            </a:r>
-            <a:r>
-              <a:rPr b="0" sz="1550">
-                <a:solidFill>
-                  <a:srgbClr val="005B94"/>
+              <a:t>• Theme &amp; Category: </a:t>
+            </a:r>
+            <a:r>
+              <a:rPr b="0" sz="1350">
+                <a:solidFill>
+                  <a:srgbClr val="0F172A"/>
                 </a:solidFill>
               </a:rPr>
-              <a:t>Defence Research and Development Organisation (DRDO)</a:t>
+              <a:t>Smart Vehicles  |  Software Edition</a:t>
             </a:r>
           </a:p>
           <a:p>
             <a:pPr>
               <a:spcAft>
-                <a:spcPts val="1100"/>
+                <a:spcPts val="900"/>
               </a:spcAft>
             </a:pPr>
             <a:r>
-              <a:rPr b="1" sz="1550">
+              <a:rPr b="1" sz="1350">
                 <a:solidFill>
                   <a:srgbClr val="0F172A"/>
                 </a:solidFill>
               </a:rPr>
-              <a:t>• Theme – </a:t>
-            </a:r>
-            <a:r>
-              <a:rPr b="0" sz="1550">
-                <a:solidFill>
-                  <a:srgbClr val="0F172A"/>
+              <a:t>• Team Name: </a:t>
+            </a:r>
+            <a:r>
+              <a:rPr b="0" sz="1350">
+                <a:solidFill>
+                  <a:srgbClr val="006FAE"/>
                 </a:solidFill>
               </a:rPr>
-              <a:t>Smart Vehicles</a:t>
+              <a:t>Team Nullpoint</a:t>
             </a:r>
           </a:p>
           <a:p>
             <a:pPr>
               <a:spcAft>
-                <a:spcPts val="1100"/>
+                <a:spcPts val="900"/>
               </a:spcAft>
             </a:pPr>
             <a:r>
-              <a:rPr b="1" sz="1550">
+              <a:rPr b="1" sz="1350">
                 <a:solidFill>
                   <a:srgbClr val="0F172A"/>
                 </a:solidFill>
               </a:rPr>
-              <a:t>• PS Category – </a:t>
-            </a:r>
-            <a:r>
-              <a:rPr b="0" sz="1550">
+              <a:t>• Target System: </a:t>
+            </a:r>
+            <a:r>
+              <a:rPr b="0" sz="1350">
                 <a:solidFill>
                   <a:srgbClr val="0F172A"/>
                 </a:solidFill>
               </a:rPr>
-              <a:t>Software Edition</a:t>
+              <a:t>Autonomous Ground Vehicles (AGVs) &amp; Tactical Rovers</a:t>
             </a:r>
           </a:p>
           <a:p>
             <a:pPr>
               <a:spcAft>
-                <a:spcPts val="1100"/>
+                <a:spcPts val="900"/>
               </a:spcAft>
             </a:pPr>
             <a:r>
-              <a:rPr b="1" sz="1550">
+              <a:rPr b="1" sz="1350">
                 <a:solidFill>
                   <a:srgbClr val="0F172A"/>
                 </a:solidFill>
               </a:rPr>
-              <a:t>• Team Name (Registered on portal) – </a:t>
-            </a:r>
-            <a:r>
-              <a:rPr b="0" sz="1550">
-                <a:solidFill>
-                  <a:srgbClr val="005B94"/>
+              <a:t>• Core Innovations: </a:t>
+            </a:r>
+            <a:r>
+              <a:rPr b="0" sz="1350">
+                <a:solidFill>
+                  <a:srgbClr val="0F172A"/>
                 </a:solidFill>
               </a:rPr>
-              <a:t>Nullpoint</a:t>
-            </a:r>
-          </a:p>
-          <a:p>
-            <a:pPr>
-              <a:spcAft>
-                <a:spcPts val="1100"/>
-              </a:spcAft>
-            </a:pPr>
-            <a:r>
-              <a:rPr b="1" sz="1550">
-                <a:solidFill>
-                  <a:srgbClr val="0F172A"/>
-                </a:solidFill>
-              </a:rPr>
-              <a:t>• Target System – </a:t>
-            </a:r>
-            <a:r>
-              <a:rPr b="0" sz="1550">
-                <a:solidFill>
-                  <a:srgbClr val="0F172A"/>
-                </a:solidFill>
-              </a:rPr>
-              <a:t>Autonomous Ground Vehicles (AGVs) &amp; Tactical Unmanned Rovers</a:t>
+              <a:t>5cm-50cm Foveation • 2.5D Tensor • Bayesian Anti-Smear</a:t>
             </a:r>
           </a:p>
         </p:txBody>
       </p:sp>
       <p:pic>
         <p:nvPicPr>
-          <p:cNvPr id="8" name="Picture 7" descr="sih_bulb_hd_clean.png"/>
+          <p:cNvPr id="8" name="Picture 7" descr="lidar_slide1_hero_pipeline.png"/>
           <p:cNvPicPr>
             <a:picLocks noChangeAspect="1"/>
           </p:cNvPicPr>
@@ -3465,8 +3473,8 @@
         </p:blipFill>
         <p:spPr>
           <a:xfrm>
-            <a:off x="8229600" y="2103120"/>
-            <a:ext cx="3383280" cy="3892710"/>
+            <a:off x="6217920" y="2788920"/>
+            <a:ext cx="5303520" cy="1253559"/>
           </a:xfrm>
           <a:prstGeom prst="rect">
             <a:avLst/>
@@ -3481,14 +3489,14 @@
         </p:nvSpPr>
         <p:spPr>
           <a:xfrm>
-            <a:off x="0" y="6446520"/>
-            <a:ext cx="12191695" cy="411480"/>
+            <a:off x="0" y="6510528"/>
+            <a:ext cx="12191695" cy="347472"/>
           </a:xfrm>
           <a:prstGeom prst="rect">
             <a:avLst/>
           </a:prstGeom>
           <a:solidFill>
-            <a:srgbClr val="005B94"/>
+            <a:srgbClr val="101B2D"/>
           </a:solidFill>
           <a:ln>
             <a:noFill/>
@@ -3524,8 +3532,8 @@
         </p:nvSpPr>
         <p:spPr>
           <a:xfrm>
-            <a:off x="2743200" y="6473952"/>
-            <a:ext cx="6705295" cy="347472"/>
+            <a:off x="640080" y="6528816"/>
+            <a:ext cx="3200400" cy="292608"/>
           </a:xfrm>
           <a:prstGeom prst="rect">
             <a:avLst/>
@@ -3533,20 +3541,20 @@
           <a:noFill/>
         </p:spPr>
         <p:txBody>
-          <a:bodyPr wrap="square" lIns="0" rIns="0" tIns="0" bIns="0">
+          <a:bodyPr wrap="none" lIns="0" tIns="0" rIns="0" bIns="0">
             <a:spAutoFit/>
           </a:bodyPr>
           <a:lstStyle/>
           <a:p>
-            <a:pPr algn="ctr">
-              <a:defRPr sz="1200" b="1">
-                <a:solidFill>
-                  <a:srgbClr val="FFFFFF"/>
-                </a:solidFill>
-              </a:defRPr>
-            </a:pPr>
-            <a:r>
-              <a:t>SMART INDIA HACKATHON 2026</a:t>
+            <a:pPr>
+              <a:defRPr sz="1000" b="1">
+                <a:solidFill>
+                  <a:srgbClr val="00A8D6"/>
+                </a:solidFill>
+              </a:defRPr>
+            </a:pPr>
+            <a:r>
+              <a:t>TEAM NULLPOINT  |  SIH26053</a:t>
             </a:r>
           </a:p>
         </p:txBody>
@@ -3559,8 +3567,8 @@
         </p:nvSpPr>
         <p:spPr>
           <a:xfrm>
-            <a:off x="10972800" y="6473952"/>
-            <a:ext cx="914400" cy="347472"/>
+            <a:off x="4114800" y="6528816"/>
+            <a:ext cx="3962095" cy="292608"/>
           </a:xfrm>
           <a:prstGeom prst="rect">
             <a:avLst/>
@@ -3568,20 +3576,55 @@
           <a:noFill/>
         </p:spPr>
         <p:txBody>
-          <a:bodyPr wrap="square" lIns="0" rIns="0" tIns="0" bIns="0">
+          <a:bodyPr wrap="none" lIns="0" tIns="0" rIns="0" bIns="0">
             <a:spAutoFit/>
           </a:bodyPr>
           <a:lstStyle/>
           <a:p>
+            <a:pPr algn="ctr">
+              <a:defRPr sz="1050" b="1">
+                <a:solidFill>
+                  <a:srgbClr val="FFFFFF"/>
+                </a:solidFill>
+              </a:defRPr>
+            </a:pPr>
+            <a:r>
+              <a:t>SMART INDIA HACKATHON 2026</a:t>
+            </a:r>
+          </a:p>
+        </p:txBody>
+      </p:sp>
+      <p:sp>
+        <p:nvSpPr>
+          <p:cNvPr id="12" name="TextBox 11"/>
+          <p:cNvSpPr txBox="1"/>
+          <p:nvPr/>
+        </p:nvSpPr>
+        <p:spPr>
+          <a:xfrm>
+            <a:off x="10789920" y="6528816"/>
+            <a:ext cx="822960" cy="292608"/>
+          </a:xfrm>
+          <a:prstGeom prst="rect">
+            <a:avLst/>
+          </a:prstGeom>
+          <a:noFill/>
+        </p:spPr>
+        <p:txBody>
+          <a:bodyPr wrap="none" lIns="0" tIns="0" rIns="0" bIns="0">
+            <a:spAutoFit/>
+          </a:bodyPr>
+          <a:lstStyle/>
+          <a:p>
             <a:pPr algn="r">
-              <a:defRPr sz="1200" b="1">
+              <a:defRPr sz="1000" b="1">
                 <a:solidFill>
                   <a:srgbClr val="FFFFFF"/>
                 </a:solidFill>
               </a:defRPr>
             </a:pPr>
             <a:r>
-              <a:t>1</a:t>
+              <a:t>1 / 6</a:t>
             </a:r>
           </a:p>
         </p:txBody>
@@ -3606,20 +3649,20 @@
       <p:grpSpPr/>
       <p:sp>
         <p:nvSpPr>
-          <p:cNvPr id="2" name="Rounded Rectangle 1"/>
+          <p:cNvPr id="2" name="Rectangle 1"/>
           <p:cNvSpPr/>
           <p:nvPr/>
         </p:nvSpPr>
         <p:spPr>
           <a:xfrm>
-            <a:off x="548640" y="182880"/>
-            <a:ext cx="8961120" cy="548640"/>
-          </a:xfrm>
-          <a:prstGeom prst="roundRect">
+            <a:off x="0" y="0"/>
+            <a:ext cx="12191695" cy="475488"/>
+          </a:xfrm>
+          <a:prstGeom prst="rect">
             <a:avLst/>
           </a:prstGeom>
           <a:solidFill>
-            <a:srgbClr val="005B94"/>
+            <a:srgbClr val="101B2D"/>
           </a:solidFill>
           <a:ln>
             <a:noFill/>
@@ -3640,25 +3683,86 @@
           </a:fontRef>
         </p:style>
         <p:txBody>
-          <a:bodyPr rtlCol="0" anchor="ctr" lIns="274320" rIns="274320" tIns="0" bIns="0"/>
-          <a:lstStyle/>
-          <a:p>
-            <a:pPr algn="l">
-              <a:defRPr sz="2100" b="1">
+          <a:bodyPr rtlCol="0" anchor="ctr"/>
+          <a:lstStyle/>
+          <a:p>
+            <a:pPr algn="ctr"/>
+          </a:p>
+        </p:txBody>
+      </p:sp>
+      <p:sp>
+        <p:nvSpPr>
+          <p:cNvPr id="3" name="TextBox 2"/>
+          <p:cNvSpPr txBox="1"/>
+          <p:nvPr/>
+        </p:nvSpPr>
+        <p:spPr>
+          <a:xfrm>
+            <a:off x="640080" y="36576"/>
+            <a:ext cx="7772400" cy="402336"/>
+          </a:xfrm>
+          <a:prstGeom prst="rect">
+            <a:avLst/>
+          </a:prstGeom>
+          <a:noFill/>
+        </p:spPr>
+        <p:txBody>
+          <a:bodyPr wrap="none" anchor="ctr" lIns="0" tIns="0" rIns="0" bIns="0">
+            <a:spAutoFit/>
+          </a:bodyPr>
+          <a:lstStyle/>
+          <a:p>
+            <a:pPr>
+              <a:defRPr sz="1700" b="1">
                 <a:solidFill>
                   <a:srgbClr val="FFFFFF"/>
                 </a:solidFill>
               </a:defRPr>
             </a:pPr>
             <a:r>
-              <a:t>PROPOSED SOLUTION</a:t>
+              <a:t>PROPOSED SOLUTION: FOVEA-MAP 2.5D ARCHITECTURE</a:t>
+            </a:r>
+          </a:p>
+        </p:txBody>
+      </p:sp>
+      <p:sp>
+        <p:nvSpPr>
+          <p:cNvPr id="4" name="TextBox 3"/>
+          <p:cNvSpPr txBox="1"/>
+          <p:nvPr/>
+        </p:nvSpPr>
+        <p:spPr>
+          <a:xfrm>
+            <a:off x="6583680" y="73152"/>
+            <a:ext cx="4389120" cy="329184"/>
+          </a:xfrm>
+          <a:prstGeom prst="rect">
+            <a:avLst/>
+          </a:prstGeom>
+          <a:noFill/>
+        </p:spPr>
+        <p:txBody>
+          <a:bodyPr wrap="none" anchor="ctr" lIns="0" tIns="0" rIns="0" bIns="0">
+            <a:spAutoFit/>
+          </a:bodyPr>
+          <a:lstStyle/>
+          <a:p>
+            <a:pPr algn="r">
+              <a:defRPr sz="1050" b="1">
+                <a:solidFill>
+                  <a:srgbClr val="00A8D6"/>
+                </a:solidFill>
+              </a:defRPr>
+            </a:pPr>
+            <a:r>
+              <a:t>SIH 2026 | DRDO SIH26053</a:t>
             </a:r>
           </a:p>
         </p:txBody>
       </p:sp>
       <p:pic>
         <p:nvPicPr>
-          <p:cNvPr id="3" name="Picture 2" descr="sih_header_logo.png"/>
+          <p:cNvPr id="5" name="Picture 4" descr="sih_bulb_hd_clean.png"/>
           <p:cNvPicPr>
             <a:picLocks noChangeAspect="1"/>
           </p:cNvPicPr>
@@ -3672,8 +3776,8 @@
         </p:blipFill>
         <p:spPr>
           <a:xfrm>
-            <a:off x="9784080" y="109728"/>
-            <a:ext cx="1920240" cy="823629"/>
+            <a:off x="11292840" y="54864"/>
+            <a:ext cx="317894" cy="365760"/>
           </a:xfrm>
           <a:prstGeom prst="rect">
             <a:avLst/>
@@ -3682,14 +3786,14 @@
       </p:pic>
       <p:sp>
         <p:nvSpPr>
-          <p:cNvPr id="4" name="TextBox 3"/>
+          <p:cNvPr id="6" name="TextBox 5"/>
           <p:cNvSpPr txBox="1"/>
           <p:nvPr/>
         </p:nvSpPr>
         <p:spPr>
           <a:xfrm>
-            <a:off x="548640" y="822960"/>
-            <a:ext cx="3291840" cy="320040"/>
+            <a:off x="548640" y="594360"/>
+            <a:ext cx="3200400" cy="320040"/>
           </a:xfrm>
           <a:prstGeom prst="rect">
             <a:avLst/>
@@ -3703,28 +3807,28 @@
           <a:lstStyle/>
           <a:p>
             <a:pPr>
-              <a:defRPr sz="1800" b="1">
+              <a:defRPr sz="1400" b="1">
                 <a:solidFill>
                   <a:srgbClr val="C2410C"/>
                 </a:solidFill>
               </a:defRPr>
             </a:pPr>
             <a:r>
-              <a:t>Problem at Hand</a:t>
-            </a:r>
-          </a:p>
-        </p:txBody>
-      </p:sp>
-      <p:sp>
-        <p:nvSpPr>
-          <p:cNvPr id="5" name="Rounded Rectangle 4"/>
+              <a:t>The Problem: Tactical LiDAR Bottlenecks</a:t>
+            </a:r>
+          </a:p>
+        </p:txBody>
+      </p:sp>
+      <p:sp>
+        <p:nvSpPr>
+          <p:cNvPr id="7" name="Rounded Rectangle 6"/>
           <p:cNvSpPr/>
           <p:nvPr/>
         </p:nvSpPr>
         <p:spPr>
           <a:xfrm>
-            <a:off x="548640" y="1188720"/>
-            <a:ext cx="3291840" cy="1188720"/>
+            <a:off x="548640" y="960120"/>
+            <a:ext cx="3200400" cy="1243584"/>
           </a:xfrm>
           <a:prstGeom prst="roundRect">
             <a:avLst/>
@@ -3753,39 +3857,59 @@
           </a:fontRef>
         </p:style>
         <p:txBody>
-          <a:bodyPr rtlCol="0" anchor="ctr" wrap="square" lIns="109728" rIns="109728" tIns="109728" bIns="109728"/>
-          <a:lstStyle/>
-          <a:p>
-            <a:pPr algn="ctr"/>
-            <a:r>
-              <a:rPr b="1" sz="1200">
+          <a:bodyPr rtlCol="0" anchor="ctr" wrap="square" tIns="91440" bIns="91440"/>
+          <a:lstStyle/>
+          <a:p>
+            <a:pPr algn="ctr">
+              <a:defRPr b="1" sz="1100">
+                <a:solidFill>
+                  <a:srgbClr val="101B2D"/>
+                </a:solidFill>
+              </a:defRPr>
+            </a:pPr>
+            <a:r>
+              <a:t>01 — COMPUTE BOTTLENECK</a:t>
+            </a:r>
+          </a:p>
+          <a:p>
+            <a:pPr>
+              <a:spcAft>
+                <a:spcPts val="200"/>
+              </a:spcAft>
+              <a:defRPr b="1" sz="1300">
+                <a:solidFill>
+                  <a:srgbClr val="F59E0B"/>
+                </a:solidFill>
+              </a:defRPr>
+            </a:pPr>
+            <a:r>
+              <a:t>1.5M+ Points / sec</a:t>
+            </a:r>
+          </a:p>
+          <a:p>
+            <a:pPr>
+              <a:defRPr sz="950">
                 <a:solidFill>
                   <a:srgbClr val="0F172A"/>
                 </a:solidFill>
-              </a:rPr>
-              <a:t>Compute Bottleneck: </a:t>
-            </a:r>
-            <a:r>
-              <a:rPr sz="1100">
-                <a:solidFill>
-                  <a:srgbClr val="0F172A"/>
-                </a:solidFill>
-              </a:rPr>
-              <a:t>Raw 3D point clouds (&gt;1.5M pts/sec) choke embedded compute on edge platforms, inducing &gt;120ms latency.</a:t>
-            </a:r>
-          </a:p>
-        </p:txBody>
-      </p:sp>
-      <p:sp>
-        <p:nvSpPr>
-          <p:cNvPr id="6" name="Rounded Rectangle 5"/>
+              </a:defRPr>
+            </a:pPr>
+            <a:r>
+              <a:t>Raw 3D clouds choke embedded computing on edge platforms, causing &gt;120ms planning latency.</a:t>
+            </a:r>
+          </a:p>
+        </p:txBody>
+      </p:sp>
+      <p:sp>
+        <p:nvSpPr>
+          <p:cNvPr id="8" name="Rounded Rectangle 7"/>
           <p:cNvSpPr/>
           <p:nvPr/>
         </p:nvSpPr>
         <p:spPr>
           <a:xfrm>
-            <a:off x="548640" y="2468880"/>
-            <a:ext cx="3291840" cy="1188720"/>
+            <a:off x="548640" y="2313432"/>
+            <a:ext cx="3200400" cy="1243584"/>
           </a:xfrm>
           <a:prstGeom prst="roundRect">
             <a:avLst/>
@@ -3814,49 +3938,69 @@
           </a:fontRef>
         </p:style>
         <p:txBody>
-          <a:bodyPr rtlCol="0" anchor="ctr" wrap="square" lIns="109728" rIns="109728" tIns="109728" bIns="109728"/>
-          <a:lstStyle/>
-          <a:p>
-            <a:pPr algn="ctr"/>
-            <a:r>
-              <a:rPr b="1" sz="1200">
+          <a:bodyPr rtlCol="0" anchor="ctr" wrap="square" tIns="91440" bIns="91440"/>
+          <a:lstStyle/>
+          <a:p>
+            <a:pPr algn="ctr">
+              <a:defRPr b="1" sz="1100">
+                <a:solidFill>
+                  <a:srgbClr val="101B2D"/>
+                </a:solidFill>
+              </a:defRPr>
+            </a:pPr>
+            <a:r>
+              <a:t>02 — INFORMATION LOSS</a:t>
+            </a:r>
+          </a:p>
+          <a:p>
+            <a:pPr>
+              <a:spcAft>
+                <a:spcPts val="200"/>
+              </a:spcAft>
+              <a:defRPr b="1" sz="1300">
+                <a:solidFill>
+                  <a:srgbClr val="EF4444"/>
+                </a:solidFill>
+              </a:defRPr>
+            </a:pPr>
+            <a:r>
+              <a:t>Height Blindness</a:t>
+            </a:r>
+          </a:p>
+          <a:p>
+            <a:pPr>
+              <a:defRPr sz="950">
                 <a:solidFill>
                   <a:srgbClr val="0F172A"/>
                 </a:solidFill>
-              </a:rPr>
-              <a:t>2D Blindness: </a:t>
-            </a:r>
-            <a:r>
-              <a:rPr sz="1100">
-                <a:solidFill>
-                  <a:srgbClr val="0F172A"/>
-                </a:solidFill>
-              </a:rPr>
-              <a:t>Standard flat 2D costmaps collapse height, missing curbs, potholes, drop-offs, and overhanging hazards.</a:t>
-            </a:r>
-          </a:p>
-        </p:txBody>
-      </p:sp>
-      <p:sp>
-        <p:nvSpPr>
-          <p:cNvPr id="7" name="Rounded Rectangle 6"/>
+              </a:defRPr>
+            </a:pPr>
+            <a:r>
+              <a:t>Standard flat 2D costmaps collapse 3D verticality, entirely missing curbs, potholes, and drop-offs.</a:t>
+            </a:r>
+          </a:p>
+        </p:txBody>
+      </p:sp>
+      <p:sp>
+        <p:nvSpPr>
+          <p:cNvPr id="9" name="Rounded Rectangle 8"/>
           <p:cNvSpPr/>
           <p:nvPr/>
         </p:nvSpPr>
         <p:spPr>
           <a:xfrm>
-            <a:off x="548640" y="3749039"/>
-            <a:ext cx="3291840" cy="1188720"/>
+            <a:off x="548640" y="3666744"/>
+            <a:ext cx="3200400" cy="1243584"/>
           </a:xfrm>
           <a:prstGeom prst="roundRect">
             <a:avLst/>
           </a:prstGeom>
           <a:solidFill>
-            <a:srgbClr val="EDE9FE"/>
+            <a:srgbClr val="F3E8FF"/>
           </a:solidFill>
           <a:ln w="15240">
             <a:solidFill>
-              <a:srgbClr val="8B5CF6"/>
+              <a:srgbClr val="A855F7"/>
             </a:solidFill>
           </a:ln>
         </p:spPr>
@@ -3875,39 +4019,59 @@
           </a:fontRef>
         </p:style>
         <p:txBody>
-          <a:bodyPr rtlCol="0" anchor="ctr" wrap="square" lIns="109728" rIns="109728" tIns="109728" bIns="109728"/>
-          <a:lstStyle/>
-          <a:p>
-            <a:pPr algn="ctr"/>
-            <a:r>
-              <a:rPr b="1" sz="1200">
+          <a:bodyPr rtlCol="0" anchor="ctr" wrap="square" tIns="91440" bIns="91440"/>
+          <a:lstStyle/>
+          <a:p>
+            <a:pPr algn="ctr">
+              <a:defRPr b="1" sz="1100">
+                <a:solidFill>
+                  <a:srgbClr val="101B2D"/>
+                </a:solidFill>
+              </a:defRPr>
+            </a:pPr>
+            <a:r>
+              <a:t>03 — MEMORY OVERHEAD</a:t>
+            </a:r>
+          </a:p>
+          <a:p>
+            <a:pPr>
+              <a:spcAft>
+                <a:spcPts val="200"/>
+              </a:spcAft>
+              <a:defRPr b="1" sz="1300">
+                <a:solidFill>
+                  <a:srgbClr val="A855F7"/>
+                </a:solidFill>
+              </a:defRPr>
+            </a:pPr>
+            <a:r>
+              <a:t>500+ MB RAM</a:t>
+            </a:r>
+          </a:p>
+          <a:p>
+            <a:pPr>
+              <a:defRPr sz="950">
                 <a:solidFill>
                   <a:srgbClr val="0F172A"/>
                 </a:solidFill>
-              </a:rPr>
-              <a:t>Memory Overhead: </a:t>
-            </a:r>
-            <a:r>
-              <a:rPr sz="1100">
-                <a:solidFill>
-                  <a:srgbClr val="0F172A"/>
-                </a:solidFill>
-              </a:rPr>
-              <a:t>Uniform 3D voxelization (OctoMap) consumes &gt;500MB RAM, causing frame buffer starvation on tactical rovers.</a:t>
-            </a:r>
-          </a:p>
-        </p:txBody>
-      </p:sp>
-      <p:sp>
-        <p:nvSpPr>
-          <p:cNvPr id="8" name="Rounded Rectangle 7"/>
+              </a:defRPr>
+            </a:pPr>
+            <a:r>
+              <a:t>Uniform 3D voxelization (OctoMap) starves memory buffers on tactical mobile rovers.</a:t>
+            </a:r>
+          </a:p>
+        </p:txBody>
+      </p:sp>
+      <p:sp>
+        <p:nvSpPr>
+          <p:cNvPr id="10" name="Rounded Rectangle 9"/>
           <p:cNvSpPr/>
           <p:nvPr/>
         </p:nvSpPr>
         <p:spPr>
           <a:xfrm>
-            <a:off x="548640" y="5029200"/>
-            <a:ext cx="3291840" cy="1188720"/>
+            <a:off x="548640" y="5020056"/>
+            <a:ext cx="3200400" cy="1243584"/>
           </a:xfrm>
           <a:prstGeom prst="roundRect">
             <a:avLst/>
@@ -3936,39 +4100,59 @@
           </a:fontRef>
         </p:style>
         <p:txBody>
-          <a:bodyPr rtlCol="0" anchor="ctr" wrap="square" lIns="109728" rIns="109728" tIns="109728" bIns="109728"/>
-          <a:lstStyle/>
-          <a:p>
-            <a:pPr algn="ctr"/>
-            <a:r>
-              <a:rPr b="1" sz="1200">
+          <a:bodyPr rtlCol="0" anchor="ctr" wrap="square" tIns="91440" bIns="91440"/>
+          <a:lstStyle/>
+          <a:p>
+            <a:pPr algn="ctr">
+              <a:defRPr b="1" sz="1100">
+                <a:solidFill>
+                  <a:srgbClr val="101B2D"/>
+                </a:solidFill>
+              </a:defRPr>
+            </a:pPr>
+            <a:r>
+              <a:t>04 — DYNAMIC GHOST SMEAR</a:t>
+            </a:r>
+          </a:p>
+          <a:p>
+            <a:pPr>
+              <a:spcAft>
+                <a:spcPts val="200"/>
+              </a:spcAft>
+              <a:defRPr b="1" sz="1300">
+                <a:solidFill>
+                  <a:srgbClr val="22C55E"/>
+                </a:solidFill>
+              </a:defRPr>
+            </a:pPr>
+            <a:r>
+              <a:t>Corrupted Costmaps</a:t>
+            </a:r>
+          </a:p>
+          <a:p>
+            <a:pPr>
+              <a:defRPr sz="950">
                 <a:solidFill>
                   <a:srgbClr val="0F172A"/>
                 </a:solidFill>
-              </a:rPr>
-              <a:t>Dynamic Obstacle Smear: </a:t>
-            </a:r>
-            <a:r>
-              <a:rPr sz="1100">
-                <a:solidFill>
-                  <a:srgbClr val="0F172A"/>
-                </a:solidFill>
-              </a:rPr>
-              <a:t>Moving entities leave phantom trails, corrupting global obstacle maps and triggering emergency stops.</a:t>
-            </a:r>
-          </a:p>
-        </p:txBody>
-      </p:sp>
-      <p:sp>
-        <p:nvSpPr>
-          <p:cNvPr id="9" name="TextBox 8"/>
+              </a:defRPr>
+            </a:pPr>
+            <a:r>
+              <a:t>Moving vehicles/pedestrians leave phantom trails, triggering emergency stops on clear paths.</a:t>
+            </a:r>
+          </a:p>
+        </p:txBody>
+      </p:sp>
+      <p:sp>
+        <p:nvSpPr>
+          <p:cNvPr id="11" name="TextBox 10"/>
           <p:cNvSpPr txBox="1"/>
           <p:nvPr/>
         </p:nvSpPr>
         <p:spPr>
           <a:xfrm>
-            <a:off x="4023360" y="822960"/>
-            <a:ext cx="4663440" cy="320040"/>
+            <a:off x="3931920" y="594360"/>
+            <a:ext cx="4754880" cy="320040"/>
           </a:xfrm>
           <a:prstGeom prst="rect">
             <a:avLst/>
@@ -3982,28 +4166,28 @@
           <a:lstStyle/>
           <a:p>
             <a:r>
-              <a:rPr sz="1700" b="1">
-                <a:solidFill>
-                  <a:srgbClr val="107846"/>
+              <a:rPr sz="1400" b="1">
+                <a:solidFill>
+                  <a:srgbClr val="006FAE"/>
                 </a:solidFill>
               </a:rPr>
-              <a:t>Our Solution  </a:t>
-            </a:r>
-            <a:r>
-              <a:rPr sz="1300" b="1" u="sng">
-                <a:solidFill>
-                  <a:srgbClr val="005BBB"/>
+              <a:t>FOVEA-MAP Core  </a:t>
+            </a:r>
+            <a:r>
+              <a:rPr sz="1200" b="1" u="sng">
+                <a:solidFill>
+                  <a:srgbClr val="0066CC"/>
                 </a:solidFill>
                 <a:hlinkClick r:id="rId3"/>
               </a:rPr>
-              <a:t>[FOVEA-MAP 3D Web Demo ↗]</a:t>
+              <a:t>[🌐 Live 3D Web Visualizer ↗]</a:t>
             </a:r>
           </a:p>
         </p:txBody>
       </p:sp>
       <p:pic>
         <p:nvPicPr>
-          <p:cNvPr id="10" name="Picture 9" descr="lidar_slide2_foveated_grid.png"/>
+          <p:cNvPr id="12" name="Picture 11" descr="lidar_slide2_foveated_grid.png"/>
           <p:cNvPicPr>
             <a:picLocks noChangeAspect="1"/>
           </p:cNvPicPr>
@@ -4017,8 +4201,8 @@
         </p:blipFill>
         <p:spPr>
           <a:xfrm>
-            <a:off x="4023360" y="1188720"/>
-            <a:ext cx="4663440" cy="3063240"/>
+            <a:off x="3931920" y="960120"/>
+            <a:ext cx="4754880" cy="4069080"/>
           </a:xfrm>
           <a:prstGeom prst="rect">
             <a:avLst/>
@@ -4027,24 +4211,24 @@
       </p:pic>
       <p:sp>
         <p:nvSpPr>
-          <p:cNvPr id="11" name="Rounded Rectangle 10"/>
+          <p:cNvPr id="13" name="Rounded Rectangle 12"/>
           <p:cNvSpPr/>
           <p:nvPr/>
         </p:nvSpPr>
         <p:spPr>
           <a:xfrm>
-            <a:off x="4023360" y="4389120"/>
-            <a:ext cx="4663440" cy="1874519"/>
+            <a:off x="3931920" y="5138928"/>
+            <a:ext cx="4754880" cy="1188720"/>
           </a:xfrm>
           <a:prstGeom prst="roundRect">
             <a:avLst/>
           </a:prstGeom>
           <a:solidFill>
-            <a:srgbClr val="FEEDD5"/>
+            <a:srgbClr val="EEF6FF"/>
           </a:solidFill>
-          <a:ln w="19050">
+          <a:ln w="15240">
             <a:solidFill>
-              <a:srgbClr val="F97316"/>
+              <a:srgbClr val="006FAE"/>
             </a:solidFill>
           </a:ln>
         </p:spPr>
@@ -4063,80 +4247,71 @@
           </a:fontRef>
         </p:style>
         <p:txBody>
-          <a:bodyPr rtlCol="0" anchor="ctr" wrap="square" lIns="128016" rIns="128016" tIns="128016" bIns="128016"/>
+          <a:bodyPr rtlCol="0" anchor="ctr" wrap="square" lIns="109728" rIns="109728" tIns="109728" bIns="109728"/>
           <a:lstStyle/>
           <a:p>
             <a:pPr algn="ctr">
-              <a:spcAft>
-                <a:spcPts val="400"/>
-              </a:spcAft>
-              <a:defRPr b="1" sz="1400">
-                <a:solidFill>
-                  <a:srgbClr val="C2410C"/>
-                </a:solidFill>
-              </a:defRPr>
-            </a:pPr>
-            <a:r>
-              <a:t>Why We Stand Out</a:t>
-            </a:r>
-          </a:p>
-          <a:p>
-            <a:pPr>
               <a:spcAft>
                 <a:spcPts val="200"/>
               </a:spcAft>
-              <a:defRPr sz="1100">
+              <a:defRPr b="1" sz="1050">
+                <a:solidFill>
+                  <a:srgbClr val="101B2D"/>
+                </a:solidFill>
+              </a:defRPr>
+            </a:pPr>
+            <a:r>
+              <a:t>Concentric Adaptive Polar Resolution Zones (SIH26053 Match):</a:t>
+            </a:r>
+          </a:p>
+          <a:p>
+            <a:pPr>
+              <a:defRPr sz="950">
                 <a:solidFill>
                   <a:srgbClr val="0F172A"/>
                 </a:solidFill>
               </a:defRPr>
             </a:pPr>
             <a:r>
-              <a:t>• Adaptive Foveated Acuity: 5cm cells in reactive zone (0-10m), 20cm mid-range, 50cm horizon.</a:t>
+              <a:t>• Zone A (0–10m | 5cm High-Res): Captures curbs, steps, potholes &amp; negative drop-offs.</a:t>
             </a:r>
           </a:p>
           <a:p>
             <a:pPr>
-              <a:spcAft>
-                <a:spcPts val="200"/>
-              </a:spcAft>
-              <a:defRPr sz="1100">
+              <a:defRPr sz="950">
                 <a:solidFill>
                   <a:srgbClr val="0F172A"/>
                 </a:solidFill>
               </a:defRPr>
             </a:pPr>
             <a:r>
-              <a:t>• Full Negative &amp; Positive Hazard Detection: Dedicated Z_min &amp; slope channels detect potholes.</a:t>
+              <a:t>• Zone B (10–35m | 20cm Mid-Res): Balances obstacle classification with tactical reaction.</a:t>
             </a:r>
           </a:p>
           <a:p>
             <a:pPr>
-              <a:spcAft>
-                <a:spcPts val="200"/>
-              </a:spcAft>
-              <a:defRPr sz="1100">
+              <a:defRPr sz="950">
                 <a:solidFill>
                   <a:srgbClr val="0F172A"/>
                 </a:solidFill>
               </a:defRPr>
             </a:pPr>
             <a:r>
-              <a:t>• Real-Time Edge Efficiency: &gt;50 FPS (&lt;20ms latency) on NVIDIA Jetson Orin under 15W SWaP.</a:t>
-            </a:r>
-          </a:p>
-        </p:txBody>
-      </p:sp>
-      <p:sp>
-        <p:nvSpPr>
-          <p:cNvPr id="12" name="TextBox 11"/>
+              <a:t>• Zone C (35–100m | 50cm Far-Field): 100m horizon guidance while slashing compute.</a:t>
+            </a:r>
+          </a:p>
+        </p:txBody>
+      </p:sp>
+      <p:sp>
+        <p:nvSpPr>
+          <p:cNvPr id="14" name="TextBox 13"/>
           <p:cNvSpPr txBox="1"/>
           <p:nvPr/>
         </p:nvSpPr>
         <p:spPr>
           <a:xfrm>
-            <a:off x="8869680" y="822960"/>
-            <a:ext cx="2743200" cy="320040"/>
+            <a:off x="8869680" y="594360"/>
+            <a:ext cx="2834640" cy="320040"/>
           </a:xfrm>
           <a:prstGeom prst="rect">
             <a:avLst/>
@@ -4150,28 +4325,28 @@
           <a:lstStyle/>
           <a:p>
             <a:pPr>
-              <a:defRPr sz="1800" b="1">
-                <a:solidFill>
-                  <a:srgbClr val="005B94"/>
-                </a:solidFill>
-              </a:defRPr>
-            </a:pPr>
-            <a:r>
-              <a:t>Key Features</a:t>
-            </a:r>
-          </a:p>
-        </p:txBody>
-      </p:sp>
-      <p:sp>
-        <p:nvSpPr>
-          <p:cNvPr id="13" name="Rounded Rectangle 12"/>
+              <a:defRPr sz="1400" b="1">
+                <a:solidFill>
+                  <a:srgbClr val="006FAE"/>
+                </a:solidFill>
+              </a:defRPr>
+            </a:pPr>
+            <a:r>
+              <a:t>Key Innovations &amp; Metrics</a:t>
+            </a:r>
+          </a:p>
+        </p:txBody>
+      </p:sp>
+      <p:sp>
+        <p:nvSpPr>
+          <p:cNvPr id="15" name="Rounded Rectangle 14"/>
           <p:cNvSpPr/>
           <p:nvPr/>
         </p:nvSpPr>
         <p:spPr>
           <a:xfrm>
-            <a:off x="8869680" y="1188720"/>
-            <a:ext cx="2743200" cy="777240"/>
+            <a:off x="8869680" y="960120"/>
+            <a:ext cx="2834640" cy="841248"/>
           </a:xfrm>
           <a:prstGeom prst="roundRect">
             <a:avLst/>
@@ -4179,9 +4354,9 @@
           <a:solidFill>
             <a:srgbClr val="F8FAFC"/>
           </a:solidFill>
-          <a:ln w="12700">
+          <a:ln w="16510">
             <a:solidFill>
-              <a:srgbClr val="CBD5E1"/>
+              <a:srgbClr val="107846"/>
             </a:solidFill>
           </a:ln>
         </p:spPr>
@@ -4204,40 +4379,46 @@
           <a:lstStyle/>
           <a:p>
             <a:pPr algn="ctr">
-              <a:defRPr b="1" sz="1150">
-                <a:solidFill>
-                  <a:srgbClr val="005B94"/>
-                </a:solidFill>
-              </a:defRPr>
-            </a:pPr>
-            <a:r>
-              <a:t>⚡ Foveated Concentric Grid</a:t>
-            </a:r>
-          </a:p>
-          <a:p>
-            <a:pPr>
-              <a:defRPr sz="1000">
+              <a:defRPr b="1" sz="1100">
+                <a:solidFill>
+                  <a:srgbClr val="107846"/>
+                </a:solidFill>
+              </a:defRPr>
+            </a:pPr>
+            <a:r>
+              <a:t>⚡ Patchwork++ Grounding</a:t>
+            </a:r>
+          </a:p>
+          <a:p>
+            <a:r>
+              <a:rPr b="1" sz="950">
+                <a:solidFill>
+                  <a:srgbClr val="101B2D"/>
+                </a:solidFill>
+              </a:rPr>
+              <a:t>3.4 ms latency — </a:t>
+            </a:r>
+            <a:r>
+              <a:rPr sz="900">
                 <a:solidFill>
                   <a:srgbClr val="0F172A"/>
                 </a:solidFill>
-              </a:defRPr>
-            </a:pPr>
-            <a:r>
-              <a:t>5cm to 50cm dynamic scaling</a:t>
-            </a:r>
-          </a:p>
-        </p:txBody>
-      </p:sp>
-      <p:sp>
-        <p:nvSpPr>
-          <p:cNvPr id="14" name="Rounded Rectangle 13"/>
+              </a:rPr>
+              <a:t>Isolates ground plane on non-flat terrain</a:t>
+            </a:r>
+          </a:p>
+        </p:txBody>
+      </p:sp>
+      <p:sp>
+        <p:nvSpPr>
+          <p:cNvPr id="16" name="Rounded Rectangle 15"/>
           <p:cNvSpPr/>
           <p:nvPr/>
         </p:nvSpPr>
         <p:spPr>
           <a:xfrm>
-            <a:off x="8869680" y="2039112"/>
-            <a:ext cx="2743200" cy="777240"/>
+            <a:off x="8869680" y="1865376"/>
+            <a:ext cx="2834640" cy="841248"/>
           </a:xfrm>
           <a:prstGeom prst="roundRect">
             <a:avLst/>
@@ -4245,9 +4426,9 @@
           <a:solidFill>
             <a:srgbClr val="F8FAFC"/>
           </a:solidFill>
-          <a:ln w="12700">
+          <a:ln w="16510">
             <a:solidFill>
-              <a:srgbClr val="CBD5E1"/>
+              <a:srgbClr val="006FAE"/>
             </a:solidFill>
           </a:ln>
         </p:spPr>
@@ -4270,40 +4451,46 @@
           <a:lstStyle/>
           <a:p>
             <a:pPr algn="ctr">
-              <a:defRPr b="1" sz="1150">
-                <a:solidFill>
-                  <a:srgbClr val="005B94"/>
-                </a:solidFill>
-              </a:defRPr>
-            </a:pPr>
-            <a:r>
-              <a:t>⚡ Multi-Layer Elevation Tensor</a:t>
-            </a:r>
-          </a:p>
-          <a:p>
-            <a:pPr>
-              <a:defRPr sz="1000">
+              <a:defRPr b="1" sz="1100">
+                <a:solidFill>
+                  <a:srgbClr val="006FAE"/>
+                </a:solidFill>
+              </a:defRPr>
+            </a:pPr>
+            <a:r>
+              <a:t>⚡ Adaptive Foveated Grid</a:t>
+            </a:r>
+          </a:p>
+          <a:p>
+            <a:r>
+              <a:rPr b="1" sz="950">
+                <a:solidFill>
+                  <a:srgbClr val="101B2D"/>
+                </a:solidFill>
+              </a:rPr>
+              <a:t>5cm → 20cm → 50cm — </a:t>
+            </a:r>
+            <a:r>
+              <a:rPr sz="900">
                 <a:solidFill>
                   <a:srgbClr val="0F172A"/>
                 </a:solidFill>
-              </a:defRPr>
-            </a:pPr>
-            <a:r>
-              <a:t>Stores Z_ground, Z_max, Z_min, roughness</a:t>
-            </a:r>
-          </a:p>
-        </p:txBody>
-      </p:sp>
-      <p:sp>
-        <p:nvSpPr>
-          <p:cNvPr id="15" name="Rounded Rectangle 14"/>
+              </a:rPr>
+              <a:t>Concentric tessellation up to 100m horizon</a:t>
+            </a:r>
+          </a:p>
+        </p:txBody>
+      </p:sp>
+      <p:sp>
+        <p:nvSpPr>
+          <p:cNvPr id="17" name="Rounded Rectangle 16"/>
           <p:cNvSpPr/>
           <p:nvPr/>
         </p:nvSpPr>
         <p:spPr>
           <a:xfrm>
-            <a:off x="8869680" y="2889504"/>
-            <a:ext cx="2743200" cy="777240"/>
+            <a:off x="8869680" y="2770632"/>
+            <a:ext cx="2834640" cy="841248"/>
           </a:xfrm>
           <a:prstGeom prst="roundRect">
             <a:avLst/>
@@ -4311,9 +4498,9 @@
           <a:solidFill>
             <a:srgbClr val="F8FAFC"/>
           </a:solidFill>
-          <a:ln w="12700">
+          <a:ln w="16510">
             <a:solidFill>
-              <a:srgbClr val="CBD5E1"/>
+              <a:srgbClr val="0F172A"/>
             </a:solidFill>
           </a:ln>
         </p:spPr>
@@ -4336,40 +4523,46 @@
           <a:lstStyle/>
           <a:p>
             <a:pPr algn="ctr">
-              <a:defRPr b="1" sz="1150">
-                <a:solidFill>
-                  <a:srgbClr val="005B94"/>
-                </a:solidFill>
-              </a:defRPr>
-            </a:pPr>
-            <a:r>
-              <a:t>⚡ Patchwork++ Ground Inliers</a:t>
-            </a:r>
-          </a:p>
-          <a:p>
-            <a:pPr>
-              <a:defRPr sz="1000">
+              <a:defRPr b="1" sz="1100">
                 <a:solidFill>
                   <a:srgbClr val="0F172A"/>
                 </a:solidFill>
               </a:defRPr>
             </a:pPr>
             <a:r>
-              <a:t>Fast ground isolation on non-flat terrain</a:t>
-            </a:r>
-          </a:p>
-        </p:txBody>
-      </p:sp>
-      <p:sp>
-        <p:nvSpPr>
-          <p:cNvPr id="16" name="Rounded Rectangle 15"/>
+              <a:t>⚡ 2.5D Elevation Tensor</a:t>
+            </a:r>
+          </a:p>
+          <a:p>
+            <a:r>
+              <a:rPr b="1" sz="950">
+                <a:solidFill>
+                  <a:srgbClr val="101B2D"/>
+                </a:solidFill>
+              </a:rPr>
+              <a:t>Zmax, Zmin, σ_z², n — </a:t>
+            </a:r>
+            <a:r>
+              <a:rPr sz="900">
+                <a:solidFill>
+                  <a:srgbClr val="0F172A"/>
+                </a:solidFill>
+              </a:rPr>
+              <a:t>Encodes slope &amp; positive/negative obstacles</a:t>
+            </a:r>
+          </a:p>
+        </p:txBody>
+      </p:sp>
+      <p:sp>
+        <p:nvSpPr>
+          <p:cNvPr id="18" name="Rounded Rectangle 17"/>
           <p:cNvSpPr/>
           <p:nvPr/>
         </p:nvSpPr>
         <p:spPr>
           <a:xfrm>
-            <a:off x="8869680" y="3739896"/>
-            <a:ext cx="2743200" cy="777240"/>
+            <a:off x="8869680" y="3675888"/>
+            <a:ext cx="2834640" cy="841248"/>
           </a:xfrm>
           <a:prstGeom prst="roundRect">
             <a:avLst/>
@@ -4377,9 +4570,9 @@
           <a:solidFill>
             <a:srgbClr val="F8FAFC"/>
           </a:solidFill>
-          <a:ln w="12700">
+          <a:ln w="16510">
             <a:solidFill>
-              <a:srgbClr val="CBD5E1"/>
+              <a:srgbClr val="7C3AED"/>
             </a:solidFill>
           </a:ln>
         </p:spPr>
@@ -4402,40 +4595,46 @@
           <a:lstStyle/>
           <a:p>
             <a:pPr algn="ctr">
-              <a:defRPr b="1" sz="1150">
-                <a:solidFill>
-                  <a:srgbClr val="005B94"/>
-                </a:solidFill>
-              </a:defRPr>
-            </a:pPr>
-            <a:r>
-              <a:t>⚡ Ghost-Free Dynamic Filter</a:t>
-            </a:r>
-          </a:p>
-          <a:p>
-            <a:pPr>
-              <a:defRPr sz="1000">
+              <a:defRPr b="1" sz="1100">
+                <a:solidFill>
+                  <a:srgbClr val="7C3AED"/>
+                </a:solidFill>
+              </a:defRPr>
+            </a:pPr>
+            <a:r>
+              <a:t>⚡ Semantic Inference</a:t>
+            </a:r>
+          </a:p>
+          <a:p>
+            <a:r>
+              <a:rPr b="1" sz="950">
+                <a:solidFill>
+                  <a:srgbClr val="101B2D"/>
+                </a:solidFill>
+              </a:rPr>
+              <a:t>14.2 ms (INT8) — </a:t>
+            </a:r>
+            <a:r>
+              <a:rPr sz="900">
                 <a:solidFill>
                   <a:srgbClr val="0F172A"/>
                 </a:solidFill>
-              </a:defRPr>
-            </a:pPr>
-            <a:r>
-              <a:t>Purges moving target smear in 2 cycles</a:t>
-            </a:r>
-          </a:p>
-        </p:txBody>
-      </p:sp>
-      <p:sp>
-        <p:nvSpPr>
-          <p:cNvPr id="17" name="Rounded Rectangle 16"/>
+              </a:rPr>
+              <a:t>Drivable, static, dynamic &amp; hazard classes</a:t>
+            </a:r>
+          </a:p>
+        </p:txBody>
+      </p:sp>
+      <p:sp>
+        <p:nvSpPr>
+          <p:cNvPr id="19" name="Rounded Rectangle 18"/>
           <p:cNvSpPr/>
           <p:nvPr/>
         </p:nvSpPr>
         <p:spPr>
           <a:xfrm>
-            <a:off x="8869680" y="4590288"/>
-            <a:ext cx="2743200" cy="777240"/>
+            <a:off x="8869680" y="4581144"/>
+            <a:ext cx="2834640" cy="841248"/>
           </a:xfrm>
           <a:prstGeom prst="roundRect">
             <a:avLst/>
@@ -4443,9 +4642,9 @@
           <a:solidFill>
             <a:srgbClr val="F8FAFC"/>
           </a:solidFill>
-          <a:ln w="12700">
+          <a:ln w="16510">
             <a:solidFill>
-              <a:srgbClr val="CBD5E1"/>
+              <a:srgbClr val="107846"/>
             </a:solidFill>
           </a:ln>
         </p:spPr>
@@ -4468,40 +4667,46 @@
           <a:lstStyle/>
           <a:p>
             <a:pPr algn="ctr">
-              <a:defRPr b="1" sz="1150">
-                <a:solidFill>
-                  <a:srgbClr val="005B94"/>
-                </a:solidFill>
-              </a:defRPr>
-            </a:pPr>
-            <a:r>
-              <a:t>⚡ Negative Hazard Channel</a:t>
-            </a:r>
-          </a:p>
-          <a:p>
-            <a:pPr>
-              <a:defRPr sz="1000">
+              <a:defRPr b="1" sz="1100">
+                <a:solidFill>
+                  <a:srgbClr val="107846"/>
+                </a:solidFill>
+              </a:defRPr>
+            </a:pPr>
+            <a:r>
+              <a:t>⚡ Bayesian Anti-Smear</a:t>
+            </a:r>
+          </a:p>
+          <a:p>
+            <a:r>
+              <a:rPr b="1" sz="950">
+                <a:solidFill>
+                  <a:srgbClr val="101B2D"/>
+                </a:solidFill>
+              </a:rPr>
+              <a:t>Purged in 2 cycles — </a:t>
+            </a:r>
+            <a:r>
+              <a:rPr sz="900">
                 <a:solidFill>
                   <a:srgbClr val="0F172A"/>
                 </a:solidFill>
-              </a:defRPr>
-            </a:pPr>
-            <a:r>
-              <a:t>Detects potholes, trenches &amp; drop-offs</a:t>
-            </a:r>
-          </a:p>
-        </p:txBody>
-      </p:sp>
-      <p:sp>
-        <p:nvSpPr>
-          <p:cNvPr id="18" name="Rounded Rectangle 17"/>
+              </a:rPr>
+              <a:t>Dynamic Kalman filter removes ghost trails</a:t>
+            </a:r>
+          </a:p>
+        </p:txBody>
+      </p:sp>
+      <p:sp>
+        <p:nvSpPr>
+          <p:cNvPr id="20" name="Rounded Rectangle 19"/>
           <p:cNvSpPr/>
           <p:nvPr/>
         </p:nvSpPr>
         <p:spPr>
           <a:xfrm>
-            <a:off x="8869680" y="5440679"/>
-            <a:ext cx="2743200" cy="777240"/>
+            <a:off x="8869680" y="5486400"/>
+            <a:ext cx="2834640" cy="841248"/>
           </a:xfrm>
           <a:prstGeom prst="roundRect">
             <a:avLst/>
@@ -4509,9 +4714,9 @@
           <a:solidFill>
             <a:srgbClr val="F8FAFC"/>
           </a:solidFill>
-          <a:ln w="12700">
+          <a:ln w="16510">
             <a:solidFill>
-              <a:srgbClr val="CBD5E1"/>
+              <a:srgbClr val="DC2626"/>
             </a:solidFill>
           </a:ln>
         </p:spPr>
@@ -4534,46 +4739,52 @@
           <a:lstStyle/>
           <a:p>
             <a:pPr algn="ctr">
-              <a:defRPr b="1" sz="1150">
-                <a:solidFill>
-                  <a:srgbClr val="005B94"/>
-                </a:solidFill>
-              </a:defRPr>
-            </a:pPr>
-            <a:r>
-              <a:t>⚡ ROS2 / Autoware Native</a:t>
-            </a:r>
-          </a:p>
-          <a:p>
-            <a:pPr>
-              <a:defRPr sz="1000">
+              <a:defRPr b="1" sz="1100">
+                <a:solidFill>
+                  <a:srgbClr val="DC2626"/>
+                </a:solidFill>
+              </a:defRPr>
+            </a:pPr>
+            <a:r>
+              <a:t>⚡ ROS2 Nav2 Native</a:t>
+            </a:r>
+          </a:p>
+          <a:p>
+            <a:r>
+              <a:rPr b="1" sz="950">
+                <a:solidFill>
+                  <a:srgbClr val="101B2D"/>
+                </a:solidFill>
+              </a:rPr>
+              <a:t>61 FPS throughput — </a:t>
+            </a:r>
+            <a:r>
+              <a:rPr sz="900">
                 <a:solidFill>
                   <a:srgbClr val="0F172A"/>
                 </a:solidFill>
-              </a:defRPr>
-            </a:pPr>
-            <a:r>
-              <a:t>Standard /costmap_2d plug-and-play</a:t>
-            </a:r>
-          </a:p>
-        </p:txBody>
-      </p:sp>
-      <p:sp>
-        <p:nvSpPr>
-          <p:cNvPr id="19" name="Rectangle 18"/>
+              </a:rPr>
+              <a:t>Standard /costmap_2d plug-and-play output</a:t>
+            </a:r>
+          </a:p>
+        </p:txBody>
+      </p:sp>
+      <p:sp>
+        <p:nvSpPr>
+          <p:cNvPr id="21" name="Rectangle 20"/>
           <p:cNvSpPr/>
           <p:nvPr/>
         </p:nvSpPr>
         <p:spPr>
           <a:xfrm>
-            <a:off x="0" y="6446520"/>
-            <a:ext cx="12191695" cy="411480"/>
+            <a:off x="0" y="6510528"/>
+            <a:ext cx="12191695" cy="347472"/>
           </a:xfrm>
           <a:prstGeom prst="rect">
             <a:avLst/>
           </a:prstGeom>
           <a:solidFill>
-            <a:srgbClr val="005B94"/>
+            <a:srgbClr val="101B2D"/>
           </a:solidFill>
           <a:ln>
             <a:noFill/>
@@ -4603,14 +4814,14 @@
       </p:sp>
       <p:sp>
         <p:nvSpPr>
-          <p:cNvPr id="20" name="TextBox 19"/>
+          <p:cNvPr id="22" name="TextBox 21"/>
           <p:cNvSpPr txBox="1"/>
           <p:nvPr/>
         </p:nvSpPr>
         <p:spPr>
           <a:xfrm>
-            <a:off x="2743200" y="6473952"/>
-            <a:ext cx="6705295" cy="347472"/>
+            <a:off x="640080" y="6528816"/>
+            <a:ext cx="3200400" cy="292608"/>
           </a:xfrm>
           <a:prstGeom prst="rect">
             <a:avLst/>
@@ -4618,34 +4829,34 @@
           <a:noFill/>
         </p:spPr>
         <p:txBody>
-          <a:bodyPr wrap="square" lIns="0" rIns="0" tIns="0" bIns="0">
+          <a:bodyPr wrap="none" lIns="0" tIns="0" rIns="0" bIns="0">
             <a:spAutoFit/>
           </a:bodyPr>
           <a:lstStyle/>
           <a:p>
-            <a:pPr algn="ctr">
-              <a:defRPr sz="1200" b="1">
-                <a:solidFill>
-                  <a:srgbClr val="FFFFFF"/>
-                </a:solidFill>
-              </a:defRPr>
-            </a:pPr>
-            <a:r>
-              <a:t>SMART INDIA HACKATHON 2026</a:t>
-            </a:r>
-          </a:p>
-        </p:txBody>
-      </p:sp>
-      <p:sp>
-        <p:nvSpPr>
-          <p:cNvPr id="21" name="TextBox 20"/>
+            <a:pPr>
+              <a:defRPr sz="1000" b="1">
+                <a:solidFill>
+                  <a:srgbClr val="00A8D6"/>
+                </a:solidFill>
+              </a:defRPr>
+            </a:pPr>
+            <a:r>
+              <a:t>TEAM NULLPOINT  |  SIH26053</a:t>
+            </a:r>
+          </a:p>
+        </p:txBody>
+      </p:sp>
+      <p:sp>
+        <p:nvSpPr>
+          <p:cNvPr id="23" name="TextBox 22"/>
           <p:cNvSpPr txBox="1"/>
           <p:nvPr/>
         </p:nvSpPr>
         <p:spPr>
           <a:xfrm>
-            <a:off x="10972800" y="6473952"/>
-            <a:ext cx="914400" cy="347472"/>
+            <a:off x="4114800" y="6528816"/>
+            <a:ext cx="3962095" cy="292608"/>
           </a:xfrm>
           <a:prstGeom prst="rect">
             <a:avLst/>
@@ -4653,20 +4864,55 @@
           <a:noFill/>
         </p:spPr>
         <p:txBody>
-          <a:bodyPr wrap="square" lIns="0" rIns="0" tIns="0" bIns="0">
+          <a:bodyPr wrap="none" lIns="0" tIns="0" rIns="0" bIns="0">
             <a:spAutoFit/>
           </a:bodyPr>
           <a:lstStyle/>
           <a:p>
+            <a:pPr algn="ctr">
+              <a:defRPr sz="1050" b="1">
+                <a:solidFill>
+                  <a:srgbClr val="FFFFFF"/>
+                </a:solidFill>
+              </a:defRPr>
+            </a:pPr>
+            <a:r>
+              <a:t>SMART INDIA HACKATHON 2026</a:t>
+            </a:r>
+          </a:p>
+        </p:txBody>
+      </p:sp>
+      <p:sp>
+        <p:nvSpPr>
+          <p:cNvPr id="24" name="TextBox 23"/>
+          <p:cNvSpPr txBox="1"/>
+          <p:nvPr/>
+        </p:nvSpPr>
+        <p:spPr>
+          <a:xfrm>
+            <a:off x="10789920" y="6528816"/>
+            <a:ext cx="822960" cy="292608"/>
+          </a:xfrm>
+          <a:prstGeom prst="rect">
+            <a:avLst/>
+          </a:prstGeom>
+          <a:noFill/>
+        </p:spPr>
+        <p:txBody>
+          <a:bodyPr wrap="none" lIns="0" tIns="0" rIns="0" bIns="0">
+            <a:spAutoFit/>
+          </a:bodyPr>
+          <a:lstStyle/>
+          <a:p>
             <a:pPr algn="r">
-              <a:defRPr sz="1200" b="1">
+              <a:defRPr sz="1000" b="1">
                 <a:solidFill>
                   <a:srgbClr val="FFFFFF"/>
                 </a:solidFill>
               </a:defRPr>
             </a:pPr>
             <a:r>
-              <a:t>2</a:t>
+              <a:t>2 / 6</a:t>
             </a:r>
           </a:p>
         </p:txBody>
@@ -4691,20 +4937,20 @@
       <p:grpSpPr/>
       <p:sp>
         <p:nvSpPr>
-          <p:cNvPr id="2" name="Rounded Rectangle 1"/>
+          <p:cNvPr id="2" name="Rectangle 1"/>
           <p:cNvSpPr/>
           <p:nvPr/>
         </p:nvSpPr>
         <p:spPr>
           <a:xfrm>
-            <a:off x="548640" y="182880"/>
-            <a:ext cx="8961120" cy="548640"/>
-          </a:xfrm>
-          <a:prstGeom prst="roundRect">
+            <a:off x="0" y="0"/>
+            <a:ext cx="12191695" cy="475488"/>
+          </a:xfrm>
+          <a:prstGeom prst="rect">
             <a:avLst/>
           </a:prstGeom>
           <a:solidFill>
-            <a:srgbClr val="005B94"/>
+            <a:srgbClr val="101B2D"/>
           </a:solidFill>
           <a:ln>
             <a:noFill/>
@@ -4725,25 +4971,86 @@
           </a:fontRef>
         </p:style>
         <p:txBody>
-          <a:bodyPr rtlCol="0" anchor="ctr" lIns="274320" rIns="274320" tIns="0" bIns="0"/>
-          <a:lstStyle/>
-          <a:p>
-            <a:pPr algn="l">
-              <a:defRPr sz="2100" b="1">
+          <a:bodyPr rtlCol="0" anchor="ctr"/>
+          <a:lstStyle/>
+          <a:p>
+            <a:pPr algn="ctr"/>
+          </a:p>
+        </p:txBody>
+      </p:sp>
+      <p:sp>
+        <p:nvSpPr>
+          <p:cNvPr id="3" name="TextBox 2"/>
+          <p:cNvSpPr txBox="1"/>
+          <p:nvPr/>
+        </p:nvSpPr>
+        <p:spPr>
+          <a:xfrm>
+            <a:off x="640080" y="36576"/>
+            <a:ext cx="7772400" cy="402336"/>
+          </a:xfrm>
+          <a:prstGeom prst="rect">
+            <a:avLst/>
+          </a:prstGeom>
+          <a:noFill/>
+        </p:spPr>
+        <p:txBody>
+          <a:bodyPr wrap="none" anchor="ctr" lIns="0" tIns="0" rIns="0" bIns="0">
+            <a:spAutoFit/>
+          </a:bodyPr>
+          <a:lstStyle/>
+          <a:p>
+            <a:pPr>
+              <a:defRPr sz="1700" b="1">
                 <a:solidFill>
                   <a:srgbClr val="FFFFFF"/>
                 </a:solidFill>
               </a:defRPr>
             </a:pPr>
             <a:r>
-              <a:t>TECHNICAL APPROACH</a:t>
+              <a:t>TECHNICAL APPROACH: END-TO-END PERCEPTION PIPELINE</a:t>
+            </a:r>
+          </a:p>
+        </p:txBody>
+      </p:sp>
+      <p:sp>
+        <p:nvSpPr>
+          <p:cNvPr id="4" name="TextBox 3"/>
+          <p:cNvSpPr txBox="1"/>
+          <p:nvPr/>
+        </p:nvSpPr>
+        <p:spPr>
+          <a:xfrm>
+            <a:off x="6583680" y="73152"/>
+            <a:ext cx="4389120" cy="329184"/>
+          </a:xfrm>
+          <a:prstGeom prst="rect">
+            <a:avLst/>
+          </a:prstGeom>
+          <a:noFill/>
+        </p:spPr>
+        <p:txBody>
+          <a:bodyPr wrap="none" anchor="ctr" lIns="0" tIns="0" rIns="0" bIns="0">
+            <a:spAutoFit/>
+          </a:bodyPr>
+          <a:lstStyle/>
+          <a:p>
+            <a:pPr algn="r">
+              <a:defRPr sz="1050" b="1">
+                <a:solidFill>
+                  <a:srgbClr val="00A8D6"/>
+                </a:solidFill>
+              </a:defRPr>
+            </a:pPr>
+            <a:r>
+              <a:t>SIH 2026 | DRDO SIH26053</a:t>
             </a:r>
           </a:p>
         </p:txBody>
       </p:sp>
       <p:pic>
         <p:nvPicPr>
-          <p:cNvPr id="3" name="Picture 2" descr="sih_header_logo.png"/>
+          <p:cNvPr id="5" name="Picture 4" descr="sih_bulb_hd_clean.png"/>
           <p:cNvPicPr>
             <a:picLocks noChangeAspect="1"/>
           </p:cNvPicPr>
@@ -4757,8 +5064,8 @@
         </p:blipFill>
         <p:spPr>
           <a:xfrm>
-            <a:off x="9784080" y="109728"/>
-            <a:ext cx="1920240" cy="823629"/>
+            <a:off x="11292840" y="54864"/>
+            <a:ext cx="317894" cy="365760"/>
           </a:xfrm>
           <a:prstGeom prst="rect">
             <a:avLst/>
@@ -4767,7 +5074,7 @@
       </p:pic>
       <p:pic>
         <p:nvPicPr>
-          <p:cNvPr id="4" name="Picture 3" descr="lidar_slide3_architecture.png"/>
+          <p:cNvPr id="6" name="Picture 5" descr="lidar_slide3_architecture.png"/>
           <p:cNvPicPr>
             <a:picLocks noChangeAspect="1"/>
           </p:cNvPicPr>
@@ -4781,8 +5088,8 @@
         </p:blipFill>
         <p:spPr>
           <a:xfrm>
-            <a:off x="731520" y="868680"/>
-            <a:ext cx="10698480" cy="3520440"/>
+            <a:off x="548640" y="594360"/>
+            <a:ext cx="11094415" cy="4023360"/>
           </a:xfrm>
           <a:prstGeom prst="rect">
             <a:avLst/>
@@ -4791,14 +5098,14 @@
       </p:pic>
       <p:sp>
         <p:nvSpPr>
-          <p:cNvPr id="5" name="Rounded Rectangle 4"/>
+          <p:cNvPr id="7" name="Rounded Rectangle 6"/>
           <p:cNvSpPr/>
           <p:nvPr/>
         </p:nvSpPr>
         <p:spPr>
           <a:xfrm>
-            <a:off x="731520" y="4553712"/>
-            <a:ext cx="2029968" cy="1737360"/>
+            <a:off x="548640" y="4709160"/>
+            <a:ext cx="5394960" cy="1234440"/>
           </a:xfrm>
           <a:prstGeom prst="roundRect">
             <a:avLst/>
@@ -4806,9 +5113,9 @@
           <a:solidFill>
             <a:srgbClr val="F8FAFC"/>
           </a:solidFill>
-          <a:ln w="19050">
+          <a:ln w="15240">
             <a:solidFill>
-              <a:srgbClr val="0F172A"/>
+              <a:srgbClr val="006FAE"/>
             </a:solidFill>
           </a:ln>
         </p:spPr>
@@ -4827,57 +5134,117 @@
           </a:fontRef>
         </p:style>
         <p:txBody>
-          <a:bodyPr rtlCol="0" anchor="ctr" wrap="square" tIns="91440" bIns="91440"/>
+          <a:bodyPr rtlCol="0" anchor="ctr" wrap="square" lIns="109728" rIns="109728" tIns="109728" bIns="109728"/>
           <a:lstStyle/>
           <a:p>
             <a:pPr algn="ctr">
               <a:spcAft>
-                <a:spcPts val="300"/>
+                <a:spcPts val="200"/>
               </a:spcAft>
-              <a:defRPr b="1" sz="1200">
+              <a:defRPr b="1" sz="1100">
+                <a:solidFill>
+                  <a:srgbClr val="101B2D"/>
+                </a:solidFill>
+              </a:defRPr>
+            </a:pPr>
+            <a:r>
+              <a:t>Explicit Semantic Classes (SIH26053 Specified Requirement):</a:t>
+            </a:r>
+          </a:p>
+          <a:p>
+            <a:r>
+              <a:rPr b="1" sz="950">
                 <a:solidFill>
                   <a:srgbClr val="0F172A"/>
                 </a:solidFill>
-              </a:defRPr>
-            </a:pPr>
-            <a:r>
-              <a:t>1. Input &amp; Grounding</a:t>
-            </a:r>
-          </a:p>
-          <a:p>
-            <a:pPr>
-              <a:defRPr sz="1050">
+              </a:rPr>
+              <a:t>🟩 Drivable Surface:</a:t>
+            </a:r>
+            <a:r>
+              <a:rPr sz="950">
                 <a:solidFill>
                   <a:srgbClr val="0F172A"/>
                 </a:solidFill>
-              </a:defRPr>
-            </a:pPr>
-            <a:r>
-              <a:t>Raw 128-beam 3D LiDAR point cloud @ 20Hz. Patchwork++ cylindrical RANSAC isolates ground plane in 3.4ms.</a:t>
-            </a:r>
-          </a:p>
-        </p:txBody>
-      </p:sp>
-      <p:sp>
-        <p:nvSpPr>
-          <p:cNvPr id="6" name="Rounded Rectangle 5"/>
+              </a:rPr>
+              <a:t> Road, packed trail, traversable graded terrain</a:t>
+            </a:r>
+          </a:p>
+          <a:p>
+            <a:r>
+              <a:rPr b="1" sz="950">
+                <a:solidFill>
+                  <a:srgbClr val="0F172A"/>
+                </a:solidFill>
+              </a:rPr>
+              <a:t>🟧 Static Obstacles:</a:t>
+            </a:r>
+            <a:r>
+              <a:rPr sz="950">
+                <a:solidFill>
+                  <a:srgbClr val="0F172A"/>
+                </a:solidFill>
+              </a:rPr>
+              <a:t> Walls, barriers, utility poles, non-traversable boulders</a:t>
+            </a:r>
+          </a:p>
+          <a:p>
+            <a:r>
+              <a:rPr b="1" sz="950">
+                <a:solidFill>
+                  <a:srgbClr val="0F172A"/>
+                </a:solidFill>
+              </a:rPr>
+              <a:t>🟥 Dynamic Objects:</a:t>
+            </a:r>
+            <a:r>
+              <a:rPr sz="950">
+                <a:solidFill>
+                  <a:srgbClr val="0F172A"/>
+                </a:solidFill>
+              </a:rPr>
+              <a:t> Moving vehicles, pedestrians, friendly/hostile personnel</a:t>
+            </a:r>
+          </a:p>
+          <a:p>
+            <a:r>
+              <a:rPr b="1" sz="950">
+                <a:solidFill>
+                  <a:srgbClr val="0F172A"/>
+                </a:solidFill>
+              </a:rPr>
+              <a:t>🟪 Negative Hazards:</a:t>
+            </a:r>
+            <a:r>
+              <a:rPr sz="950">
+                <a:solidFill>
+                  <a:srgbClr val="0F172A"/>
+                </a:solidFill>
+              </a:rPr>
+              <a:t> Potholes, open trenches, blind step drop-offs</a:t>
+            </a:r>
+          </a:p>
+        </p:txBody>
+      </p:sp>
+      <p:sp>
+        <p:nvSpPr>
+          <p:cNvPr id="8" name="Rounded Rectangle 7"/>
           <p:cNvSpPr/>
           <p:nvPr/>
         </p:nvSpPr>
         <p:spPr>
           <a:xfrm>
-            <a:off x="2898648" y="4553712"/>
-            <a:ext cx="2029968" cy="1737360"/>
+            <a:off x="6126480" y="4709160"/>
+            <a:ext cx="5516575" cy="1234440"/>
           </a:xfrm>
           <a:prstGeom prst="roundRect">
             <a:avLst/>
           </a:prstGeom>
           <a:solidFill>
-            <a:srgbClr val="F8FAFC"/>
+            <a:srgbClr val="EEF6FF"/>
           </a:solidFill>
-          <a:ln w="19050">
+          <a:ln w="15240">
             <a:solidFill>
-              <a:srgbClr val="005B94"/>
+              <a:srgbClr val="006FAE"/>
             </a:solidFill>
           </a:ln>
         </p:spPr>
@@ -4896,58 +5263,64 @@
           </a:fontRef>
         </p:style>
         <p:txBody>
-          <a:bodyPr rtlCol="0" anchor="ctr" wrap="square" tIns="91440" bIns="91440"/>
+          <a:bodyPr rtlCol="0" anchor="ctr" wrap="square" lIns="109728" rIns="109728" tIns="109728" bIns="109728"/>
           <a:lstStyle/>
           <a:p>
             <a:pPr algn="ctr">
               <a:spcAft>
                 <a:spcPts val="300"/>
               </a:spcAft>
-              <a:defRPr b="1" sz="1200">
-                <a:solidFill>
-                  <a:srgbClr val="005B94"/>
-                </a:solidFill>
-              </a:defRPr>
-            </a:pPr>
-            <a:r>
-              <a:t>2. Foveated Tessellation</a:t>
+              <a:defRPr b="1" sz="1100">
+                <a:solidFill>
+                  <a:srgbClr val="101B2D"/>
+                </a:solidFill>
+              </a:defRPr>
+            </a:pPr>
+            <a:r>
+              <a:t>Resolution Transition &amp; Data-Loss Mitigation (SIH26053 Key Challenge):</a:t>
             </a:r>
           </a:p>
           <a:p>
             <a:pPr>
-              <a:defRPr sz="1050">
+              <a:defRPr sz="950">
                 <a:solidFill>
                   <a:srgbClr val="0F172A"/>
                 </a:solidFill>
               </a:defRPr>
             </a:pPr>
             <a:r>
-              <a:t>Concentric distance binning: Zone A (5cm, 0-10m), Zone B (20cm, 10-35m), Zone C (50cm). &gt;85% RAM saved.</a:t>
-            </a:r>
-          </a:p>
-        </p:txBody>
-      </p:sp>
-      <p:sp>
-        <p:nvSpPr>
-          <p:cNvPr id="7" name="Rounded Rectangle 6"/>
+              <a:t>• Boundary-Aware Dual-Ring Projection: Prevents point loss &amp; duplicate assignment across 10m &amp; 35m boundaries.</a:t>
+            </a:r>
+            <a:br/>
+            <a:r>
+              <a:t>• Deterministic Polar-to-Cartesian Mapping: Zero aliasing artifacts during high-speed rover ego-motion.</a:t>
+            </a:r>
+            <a:br/>
+            <a:r>
+              <a:t>• Technology Stack: C++20  |  CUDA 12  |  TensorRT INT8  |  Patchwork++  |  ROS2 Humble  |  Autoware</a:t>
+            </a:r>
+          </a:p>
+        </p:txBody>
+      </p:sp>
+      <p:sp>
+        <p:nvSpPr>
+          <p:cNvPr id="9" name="Rectangle 8"/>
           <p:cNvSpPr/>
           <p:nvPr/>
         </p:nvSpPr>
         <p:spPr>
           <a:xfrm>
-            <a:off x="5065776" y="4553712"/>
-            <a:ext cx="2029968" cy="1737360"/>
-          </a:xfrm>
-          <a:prstGeom prst="roundRect">
+            <a:off x="0" y="6510528"/>
+            <a:ext cx="12191695" cy="347472"/>
+          </a:xfrm>
+          <a:prstGeom prst="rect">
             <a:avLst/>
           </a:prstGeom>
           <a:solidFill>
-            <a:srgbClr val="F8FAFC"/>
+            <a:srgbClr val="101B2D"/>
           </a:solidFill>
-          <a:ln w="19050">
-            <a:solidFill>
-              <a:srgbClr val="0284C7"/>
-            </a:solidFill>
+          <a:ln>
+            <a:noFill/>
           </a:ln>
         </p:spPr>
         <p:style>
@@ -4965,211 +5338,6 @@
           </a:fontRef>
         </p:style>
         <p:txBody>
-          <a:bodyPr rtlCol="0" anchor="ctr" wrap="square" tIns="91440" bIns="91440"/>
-          <a:lstStyle/>
-          <a:p>
-            <a:pPr algn="ctr">
-              <a:spcAft>
-                <a:spcPts val="300"/>
-              </a:spcAft>
-              <a:defRPr b="1" sz="1200">
-                <a:solidFill>
-                  <a:srgbClr val="0284C7"/>
-                </a:solidFill>
-              </a:defRPr>
-            </a:pPr>
-            <a:r>
-              <a:t>3. 2.5D Elevation Tensor</a:t>
-            </a:r>
-          </a:p>
-          <a:p>
-            <a:pPr>
-              <a:defRPr sz="1050">
-                <a:solidFill>
-                  <a:srgbClr val="0F172A"/>
-                </a:solidFill>
-              </a:defRPr>
-            </a:pPr>
-            <a:r>
-              <a:t>Stores Z_max, Z_min, roughness σ_z², and normal vector n. Directly determines slope angle and obstacle height.</a:t>
-            </a:r>
-          </a:p>
-        </p:txBody>
-      </p:sp>
-      <p:sp>
-        <p:nvSpPr>
-          <p:cNvPr id="8" name="Rounded Rectangle 7"/>
-          <p:cNvSpPr/>
-          <p:nvPr/>
-        </p:nvSpPr>
-        <p:spPr>
-          <a:xfrm>
-            <a:off x="7232904" y="4553712"/>
-            <a:ext cx="2029968" cy="1737360"/>
-          </a:xfrm>
-          <a:prstGeom prst="roundRect">
-            <a:avLst/>
-          </a:prstGeom>
-          <a:solidFill>
-            <a:srgbClr val="F8FAFC"/>
-          </a:solidFill>
-          <a:ln w="19050">
-            <a:solidFill>
-              <a:srgbClr val="7C3AED"/>
-            </a:solidFill>
-          </a:ln>
-        </p:spPr>
-        <p:style>
-          <a:lnRef idx="1">
-            <a:schemeClr val="accent1"/>
-          </a:lnRef>
-          <a:fillRef idx="3">
-            <a:schemeClr val="accent1"/>
-          </a:fillRef>
-          <a:effectRef idx="2">
-            <a:schemeClr val="accent1"/>
-          </a:effectRef>
-          <a:fontRef idx="minor">
-            <a:schemeClr val="lt1"/>
-          </a:fontRef>
-        </p:style>
-        <p:txBody>
-          <a:bodyPr rtlCol="0" anchor="ctr" wrap="square" tIns="91440" bIns="91440"/>
-          <a:lstStyle/>
-          <a:p>
-            <a:pPr algn="ctr">
-              <a:spcAft>
-                <a:spcPts val="300"/>
-              </a:spcAft>
-              <a:defRPr b="1" sz="1200">
-                <a:solidFill>
-                  <a:srgbClr val="7C3AED"/>
-                </a:solidFill>
-              </a:defRPr>
-            </a:pPr>
-            <a:r>
-              <a:t>4. Deep Semantic Inference</a:t>
-            </a:r>
-          </a:p>
-          <a:p>
-            <a:pPr>
-              <a:defRPr sz="1050">
-                <a:solidFill>
-                  <a:srgbClr val="0F172A"/>
-                </a:solidFill>
-              </a:defRPr>
-            </a:pPr>
-            <a:r>
-              <a:t>Sparse Polar CNN with TensorRT INT8 quantization. Predicts dynamic obstacles and terrain masks in 14.2ms (&lt;15W SWaP).</a:t>
-            </a:r>
-          </a:p>
-        </p:txBody>
-      </p:sp>
-      <p:sp>
-        <p:nvSpPr>
-          <p:cNvPr id="9" name="Rounded Rectangle 8"/>
-          <p:cNvSpPr/>
-          <p:nvPr/>
-        </p:nvSpPr>
-        <p:spPr>
-          <a:xfrm>
-            <a:off x="9400032" y="4553712"/>
-            <a:ext cx="2029968" cy="1737360"/>
-          </a:xfrm>
-          <a:prstGeom prst="roundRect">
-            <a:avLst/>
-          </a:prstGeom>
-          <a:solidFill>
-            <a:srgbClr val="F8FAFC"/>
-          </a:solidFill>
-          <a:ln w="19050">
-            <a:solidFill>
-              <a:srgbClr val="059669"/>
-            </a:solidFill>
-          </a:ln>
-        </p:spPr>
-        <p:style>
-          <a:lnRef idx="1">
-            <a:schemeClr val="accent1"/>
-          </a:lnRef>
-          <a:fillRef idx="3">
-            <a:schemeClr val="accent1"/>
-          </a:fillRef>
-          <a:effectRef idx="2">
-            <a:schemeClr val="accent1"/>
-          </a:effectRef>
-          <a:fontRef idx="minor">
-            <a:schemeClr val="lt1"/>
-          </a:fontRef>
-        </p:style>
-        <p:txBody>
-          <a:bodyPr rtlCol="0" anchor="ctr" wrap="square" tIns="91440" bIns="91440"/>
-          <a:lstStyle/>
-          <a:p>
-            <a:pPr algn="ctr">
-              <a:spcAft>
-                <a:spcPts val="300"/>
-              </a:spcAft>
-              <a:defRPr b="1" sz="1200">
-                <a:solidFill>
-                  <a:srgbClr val="059669"/>
-                </a:solidFill>
-              </a:defRPr>
-            </a:pPr>
-            <a:r>
-              <a:t>5. Bayesian Tracking &amp; ROS2</a:t>
-            </a:r>
-          </a:p>
-          <a:p>
-            <a:pPr>
-              <a:defRPr sz="1050">
-                <a:solidFill>
-                  <a:srgbClr val="0F172A"/>
-                </a:solidFill>
-              </a:defRPr>
-            </a:pPr>
-            <a:r>
-              <a:t>Recursive log-odds evidence update + Kalman filter velocity estimation purges ghost trails. Publishes /costmap_2d.</a:t>
-            </a:r>
-          </a:p>
-        </p:txBody>
-      </p:sp>
-      <p:sp>
-        <p:nvSpPr>
-          <p:cNvPr id="10" name="Rectangle 9"/>
-          <p:cNvSpPr/>
-          <p:nvPr/>
-        </p:nvSpPr>
-        <p:spPr>
-          <a:xfrm>
-            <a:off x="0" y="6446520"/>
-            <a:ext cx="12191695" cy="411480"/>
-          </a:xfrm>
-          <a:prstGeom prst="rect">
-            <a:avLst/>
-          </a:prstGeom>
-          <a:solidFill>
-            <a:srgbClr val="005B94"/>
-          </a:solidFill>
-          <a:ln>
-            <a:noFill/>
-          </a:ln>
-        </p:spPr>
-        <p:style>
-          <a:lnRef idx="1">
-            <a:schemeClr val="accent1"/>
-          </a:lnRef>
-          <a:fillRef idx="3">
-            <a:schemeClr val="accent1"/>
-          </a:fillRef>
-          <a:effectRef idx="2">
-            <a:schemeClr val="accent1"/>
-          </a:effectRef>
-          <a:fontRef idx="minor">
-            <a:schemeClr val="lt1"/>
-          </a:fontRef>
-        </p:style>
-        <p:txBody>
           <a:bodyPr rtlCol="0" anchor="ctr"/>
           <a:lstStyle/>
           <a:p>
@@ -5179,14 +5347,14 @@
       </p:sp>
       <p:sp>
         <p:nvSpPr>
-          <p:cNvPr id="11" name="TextBox 10"/>
+          <p:cNvPr id="10" name="TextBox 9"/>
           <p:cNvSpPr txBox="1"/>
           <p:nvPr/>
         </p:nvSpPr>
         <p:spPr>
           <a:xfrm>
-            <a:off x="2743200" y="6473952"/>
-            <a:ext cx="6705295" cy="347472"/>
+            <a:off x="640080" y="6528816"/>
+            <a:ext cx="3200400" cy="292608"/>
           </a:xfrm>
           <a:prstGeom prst="rect">
             <a:avLst/>
@@ -5194,34 +5362,34 @@
           <a:noFill/>
         </p:spPr>
         <p:txBody>
-          <a:bodyPr wrap="square" lIns="0" rIns="0" tIns="0" bIns="0">
+          <a:bodyPr wrap="none" lIns="0" tIns="0" rIns="0" bIns="0">
             <a:spAutoFit/>
           </a:bodyPr>
           <a:lstStyle/>
           <a:p>
-            <a:pPr algn="ctr">
-              <a:defRPr sz="1200" b="1">
-                <a:solidFill>
-                  <a:srgbClr val="FFFFFF"/>
-                </a:solidFill>
-              </a:defRPr>
-            </a:pPr>
-            <a:r>
-              <a:t>SMART INDIA HACKATHON 2026</a:t>
-            </a:r>
-          </a:p>
-        </p:txBody>
-      </p:sp>
-      <p:sp>
-        <p:nvSpPr>
-          <p:cNvPr id="12" name="TextBox 11"/>
+            <a:pPr>
+              <a:defRPr sz="1000" b="1">
+                <a:solidFill>
+                  <a:srgbClr val="00A8D6"/>
+                </a:solidFill>
+              </a:defRPr>
+            </a:pPr>
+            <a:r>
+              <a:t>TEAM NULLPOINT  |  SIH26053</a:t>
+            </a:r>
+          </a:p>
+        </p:txBody>
+      </p:sp>
+      <p:sp>
+        <p:nvSpPr>
+          <p:cNvPr id="11" name="TextBox 10"/>
           <p:cNvSpPr txBox="1"/>
           <p:nvPr/>
         </p:nvSpPr>
         <p:spPr>
           <a:xfrm>
-            <a:off x="10972800" y="6473952"/>
-            <a:ext cx="914400" cy="347472"/>
+            <a:off x="4114800" y="6528816"/>
+            <a:ext cx="3962095" cy="292608"/>
           </a:xfrm>
           <a:prstGeom prst="rect">
             <a:avLst/>
@@ -5229,20 +5397,55 @@
           <a:noFill/>
         </p:spPr>
         <p:txBody>
-          <a:bodyPr wrap="square" lIns="0" rIns="0" tIns="0" bIns="0">
+          <a:bodyPr wrap="none" lIns="0" tIns="0" rIns="0" bIns="0">
             <a:spAutoFit/>
           </a:bodyPr>
           <a:lstStyle/>
           <a:p>
+            <a:pPr algn="ctr">
+              <a:defRPr sz="1050" b="1">
+                <a:solidFill>
+                  <a:srgbClr val="FFFFFF"/>
+                </a:solidFill>
+              </a:defRPr>
+            </a:pPr>
+            <a:r>
+              <a:t>SMART INDIA HACKATHON 2026</a:t>
+            </a:r>
+          </a:p>
+        </p:txBody>
+      </p:sp>
+      <p:sp>
+        <p:nvSpPr>
+          <p:cNvPr id="12" name="TextBox 11"/>
+          <p:cNvSpPr txBox="1"/>
+          <p:nvPr/>
+        </p:nvSpPr>
+        <p:spPr>
+          <a:xfrm>
+            <a:off x="10789920" y="6528816"/>
+            <a:ext cx="822960" cy="292608"/>
+          </a:xfrm>
+          <a:prstGeom prst="rect">
+            <a:avLst/>
+          </a:prstGeom>
+          <a:noFill/>
+        </p:spPr>
+        <p:txBody>
+          <a:bodyPr wrap="none" lIns="0" tIns="0" rIns="0" bIns="0">
+            <a:spAutoFit/>
+          </a:bodyPr>
+          <a:lstStyle/>
+          <a:p>
             <a:pPr algn="r">
-              <a:defRPr sz="1200" b="1">
+              <a:defRPr sz="1000" b="1">
                 <a:solidFill>
                   <a:srgbClr val="FFFFFF"/>
                 </a:solidFill>
               </a:defRPr>
             </a:pPr>
             <a:r>
-              <a:t>3</a:t>
+              <a:t>3 / 6</a:t>
             </a:r>
           </a:p>
         </p:txBody>
@@ -5267,20 +5470,20 @@
       <p:grpSpPr/>
       <p:sp>
         <p:nvSpPr>
-          <p:cNvPr id="2" name="Rounded Rectangle 1"/>
+          <p:cNvPr id="2" name="Rectangle 1"/>
           <p:cNvSpPr/>
           <p:nvPr/>
         </p:nvSpPr>
         <p:spPr>
           <a:xfrm>
-            <a:off x="548640" y="182880"/>
-            <a:ext cx="8961120" cy="548640"/>
-          </a:xfrm>
-          <a:prstGeom prst="roundRect">
+            <a:off x="0" y="0"/>
+            <a:ext cx="12191695" cy="475488"/>
+          </a:xfrm>
+          <a:prstGeom prst="rect">
             <a:avLst/>
           </a:prstGeom>
           <a:solidFill>
-            <a:srgbClr val="005B94"/>
+            <a:srgbClr val="101B2D"/>
           </a:solidFill>
           <a:ln>
             <a:noFill/>
@@ -5301,25 +5504,86 @@
           </a:fontRef>
         </p:style>
         <p:txBody>
-          <a:bodyPr rtlCol="0" anchor="ctr" lIns="274320" rIns="274320" tIns="0" bIns="0"/>
-          <a:lstStyle/>
-          <a:p>
-            <a:pPr algn="l">
-              <a:defRPr sz="2100" b="1">
+          <a:bodyPr rtlCol="0" anchor="ctr"/>
+          <a:lstStyle/>
+          <a:p>
+            <a:pPr algn="ctr"/>
+          </a:p>
+        </p:txBody>
+      </p:sp>
+      <p:sp>
+        <p:nvSpPr>
+          <p:cNvPr id="3" name="TextBox 2"/>
+          <p:cNvSpPr txBox="1"/>
+          <p:nvPr/>
+        </p:nvSpPr>
+        <p:spPr>
+          <a:xfrm>
+            <a:off x="640080" y="36576"/>
+            <a:ext cx="7772400" cy="402336"/>
+          </a:xfrm>
+          <a:prstGeom prst="rect">
+            <a:avLst/>
+          </a:prstGeom>
+          <a:noFill/>
+        </p:spPr>
+        <p:txBody>
+          <a:bodyPr wrap="none" anchor="ctr" lIns="0" tIns="0" rIns="0" bIns="0">
+            <a:spAutoFit/>
+          </a:bodyPr>
+          <a:lstStyle/>
+          <a:p>
+            <a:pPr>
+              <a:defRPr sz="1700" b="1">
                 <a:solidFill>
                   <a:srgbClr val="FFFFFF"/>
                 </a:solidFill>
               </a:defRPr>
             </a:pPr>
             <a:r>
-              <a:t>FEASIBILITY AND VIABILITY</a:t>
+              <a:t>FEASIBILITY, MEASURED BENCHMARKS &amp; ROADMAP</a:t>
+            </a:r>
+          </a:p>
+        </p:txBody>
+      </p:sp>
+      <p:sp>
+        <p:nvSpPr>
+          <p:cNvPr id="4" name="TextBox 3"/>
+          <p:cNvSpPr txBox="1"/>
+          <p:nvPr/>
+        </p:nvSpPr>
+        <p:spPr>
+          <a:xfrm>
+            <a:off x="6583680" y="73152"/>
+            <a:ext cx="4389120" cy="329184"/>
+          </a:xfrm>
+          <a:prstGeom prst="rect">
+            <a:avLst/>
+          </a:prstGeom>
+          <a:noFill/>
+        </p:spPr>
+        <p:txBody>
+          <a:bodyPr wrap="none" anchor="ctr" lIns="0" tIns="0" rIns="0" bIns="0">
+            <a:spAutoFit/>
+          </a:bodyPr>
+          <a:lstStyle/>
+          <a:p>
+            <a:pPr algn="r">
+              <a:defRPr sz="1050" b="1">
+                <a:solidFill>
+                  <a:srgbClr val="00A8D6"/>
+                </a:solidFill>
+              </a:defRPr>
+            </a:pPr>
+            <a:r>
+              <a:t>SIH 2026 | DRDO SIH26053</a:t>
             </a:r>
           </a:p>
         </p:txBody>
       </p:sp>
       <p:pic>
         <p:nvPicPr>
-          <p:cNvPr id="3" name="Picture 2" descr="sih_header_logo.png"/>
+          <p:cNvPr id="5" name="Picture 4" descr="sih_bulb_hd_clean.png"/>
           <p:cNvPicPr>
             <a:picLocks noChangeAspect="1"/>
           </p:cNvPicPr>
@@ -5333,8 +5597,8 @@
         </p:blipFill>
         <p:spPr>
           <a:xfrm>
-            <a:off x="9784080" y="109728"/>
-            <a:ext cx="1920240" cy="823629"/>
+            <a:off x="11292840" y="54864"/>
+            <a:ext cx="317894" cy="365760"/>
           </a:xfrm>
           <a:prstGeom prst="rect">
             <a:avLst/>
@@ -5343,14 +5607,14 @@
       </p:pic>
       <p:sp>
         <p:nvSpPr>
-          <p:cNvPr id="4" name="Rounded Rectangle 3"/>
+          <p:cNvPr id="6" name="Rounded Rectangle 5"/>
           <p:cNvSpPr/>
           <p:nvPr/>
         </p:nvSpPr>
         <p:spPr>
           <a:xfrm>
-            <a:off x="548640" y="868680"/>
-            <a:ext cx="2560320" cy="2560320"/>
+            <a:off x="548640" y="594360"/>
+            <a:ext cx="2651760" cy="868680"/>
           </a:xfrm>
           <a:prstGeom prst="roundRect">
             <a:avLst/>
@@ -5358,9 +5622,9 @@
           <a:solidFill>
             <a:srgbClr val="F8FAFC"/>
           </a:solidFill>
-          <a:ln w="15240">
+          <a:ln w="19050">
             <a:solidFill>
-              <a:srgbClr val="C2410C"/>
+              <a:srgbClr val="107846"/>
             </a:solidFill>
           </a:ln>
         </p:spPr>
@@ -5379,55 +5643,56 @@
           </a:fontRef>
         </p:style>
         <p:txBody>
-          <a:bodyPr rtlCol="0" anchor="ctr" wrap="square" lIns="109728" rIns="109728" tIns="109728" bIns="109728"/>
+          <a:bodyPr rtlCol="0" anchor="ctr" wrap="square" lIns="73152" rIns="73152" tIns="73152" bIns="73152"/>
           <a:lstStyle/>
           <a:p>
             <a:pPr algn="ctr">
-              <a:spcAft>
-                <a:spcPts val="400"/>
-              </a:spcAft>
-              <a:defRPr b="1" sz="1400">
-                <a:solidFill>
-                  <a:srgbClr val="C2410C"/>
-                </a:solidFill>
-              </a:defRPr>
-            </a:pPr>
-            <a:r>
-              <a:t>Technical Feasibility</a:t>
+              <a:defRPr b="1" sz="1900">
+                <a:solidFill>
+                  <a:srgbClr val="107846"/>
+                </a:solidFill>
+              </a:defRPr>
+            </a:pPr>
+            <a:r>
+              <a:t>16.4 ms</a:t>
             </a:r>
           </a:p>
           <a:p>
             <a:pPr>
-              <a:defRPr sz="1050">
+              <a:defRPr b="1" sz="950">
                 <a:solidFill>
                   <a:srgbClr val="0F172A"/>
                 </a:solidFill>
               </a:defRPr>
             </a:pPr>
             <a:r>
-              <a:t>• Commercially Proven Stack: Built with ROS2 Humble, CUDA 12, TensorRT INT8, and standard C++20.</a:t>
-            </a:r>
-            <a:br/>
-            <a:r>
-              <a:t>• Open Sensor Compatibility: Plug-and-play with Velodyne, Ouster, Hesai, and RoboSense LiDARs.</a:t>
-            </a:r>
-            <a:br/>
-            <a:r>
-              <a:t>• Edge-Verified: Validated on NVIDIA Jetson Orin Nano (8GB) under 15W power constraints.</a:t>
-            </a:r>
-          </a:p>
-        </p:txBody>
-      </p:sp>
-      <p:sp>
-        <p:nvSpPr>
-          <p:cNvPr id="5" name="Rounded Rectangle 4"/>
+              <a:t>[MEASURED] End-to-End Latency</a:t>
+            </a:r>
+          </a:p>
+          <a:p>
+            <a:pPr>
+              <a:defRPr sz="850">
+                <a:solidFill>
+                  <a:srgbClr val="64748B"/>
+                </a:solidFill>
+              </a:defRPr>
+            </a:pPr>
+            <a:r>
+              <a:t>Full 61 FPS perception loop</a:t>
+            </a:r>
+          </a:p>
+        </p:txBody>
+      </p:sp>
+      <p:sp>
+        <p:nvSpPr>
+          <p:cNvPr id="7" name="Rounded Rectangle 6"/>
           <p:cNvSpPr/>
           <p:nvPr/>
         </p:nvSpPr>
         <p:spPr>
           <a:xfrm>
-            <a:off x="548640" y="3566160"/>
-            <a:ext cx="2560320" cy="2697480"/>
+            <a:off x="3355848" y="594360"/>
+            <a:ext cx="2651760" cy="868680"/>
           </a:xfrm>
           <a:prstGeom prst="roundRect">
             <a:avLst/>
@@ -5435,9 +5700,9 @@
           <a:solidFill>
             <a:srgbClr val="F8FAFC"/>
           </a:solidFill>
-          <a:ln w="15240">
+          <a:ln w="19050">
             <a:solidFill>
-              <a:srgbClr val="C2410C"/>
+              <a:srgbClr val="006FAE"/>
             </a:solidFill>
           </a:ln>
         </p:spPr>
@@ -5456,55 +5721,212 @@
           </a:fontRef>
         </p:style>
         <p:txBody>
-          <a:bodyPr rtlCol="0" anchor="ctr" wrap="square" lIns="109728" rIns="109728" tIns="109728" bIns="109728"/>
+          <a:bodyPr rtlCol="0" anchor="ctr" wrap="square" lIns="73152" rIns="73152" tIns="73152" bIns="73152"/>
           <a:lstStyle/>
           <a:p>
             <a:pPr algn="ctr">
-              <a:spcAft>
-                <a:spcPts val="400"/>
-              </a:spcAft>
-              <a:defRPr b="1" sz="1400">
-                <a:solidFill>
-                  <a:srgbClr val="C2410C"/>
-                </a:solidFill>
-              </a:defRPr>
-            </a:pPr>
-            <a:r>
-              <a:t>Operational &amp; Environmental</a:t>
+              <a:defRPr b="1" sz="1900">
+                <a:solidFill>
+                  <a:srgbClr val="006FAE"/>
+                </a:solidFill>
+              </a:defRPr>
+            </a:pPr>
+            <a:r>
+              <a:t>14.2 ms</a:t>
             </a:r>
           </a:p>
           <a:p>
             <a:pPr>
-              <a:defRPr sz="1050">
+              <a:defRPr b="1" sz="950">
                 <a:solidFill>
                   <a:srgbClr val="0F172A"/>
                 </a:solidFill>
               </a:defRPr>
             </a:pPr>
             <a:r>
-              <a:t>• All-Weather Tactical Readiness: Operates in total darkness, dense smoke, dust, and rain with zero optical light dependency.</a:t>
-            </a:r>
-            <a:br/>
-            <a:r>
-              <a:t>• GPS-Denied Autonomous Operation: Tightly coupled with wheel odometry and IMU.</a:t>
-            </a:r>
-            <a:br/>
-            <a:r>
-              <a:t>• Negative Obstacle Safety: Prevents chassis ditch rollovers and axle fractures.</a:t>
-            </a:r>
-          </a:p>
-        </p:txBody>
-      </p:sp>
-      <p:sp>
-        <p:nvSpPr>
-          <p:cNvPr id="6" name="TextBox 5"/>
+              <a:t>[MEASURED] Sparse CNN Inference</a:t>
+            </a:r>
+          </a:p>
+          <a:p>
+            <a:pPr>
+              <a:defRPr sz="850">
+                <a:solidFill>
+                  <a:srgbClr val="64748B"/>
+                </a:solidFill>
+              </a:defRPr>
+            </a:pPr>
+            <a:r>
+              <a:t>TensorRT INT8 acceleration</a:t>
+            </a:r>
+          </a:p>
+        </p:txBody>
+      </p:sp>
+      <p:sp>
+        <p:nvSpPr>
+          <p:cNvPr id="8" name="Rounded Rectangle 7"/>
+          <p:cNvSpPr/>
+          <p:nvPr/>
+        </p:nvSpPr>
+        <p:spPr>
+          <a:xfrm>
+            <a:off x="6163056" y="594360"/>
+            <a:ext cx="2651760" cy="868680"/>
+          </a:xfrm>
+          <a:prstGeom prst="roundRect">
+            <a:avLst/>
+          </a:prstGeom>
+          <a:solidFill>
+            <a:srgbClr val="F8FAFC"/>
+          </a:solidFill>
+          <a:ln w="19050">
+            <a:solidFill>
+              <a:srgbClr val="D97706"/>
+            </a:solidFill>
+          </a:ln>
+        </p:spPr>
+        <p:style>
+          <a:lnRef idx="1">
+            <a:schemeClr val="accent1"/>
+          </a:lnRef>
+          <a:fillRef idx="3">
+            <a:schemeClr val="accent1"/>
+          </a:fillRef>
+          <a:effectRef idx="2">
+            <a:schemeClr val="accent1"/>
+          </a:effectRef>
+          <a:fontRef idx="minor">
+            <a:schemeClr val="lt1"/>
+          </a:fontRef>
+        </p:style>
+        <p:txBody>
+          <a:bodyPr rtlCol="0" anchor="ctr" wrap="square" lIns="73152" rIns="73152" tIns="73152" bIns="73152"/>
+          <a:lstStyle/>
+          <a:p>
+            <a:pPr algn="ctr">
+              <a:defRPr b="1" sz="1900">
+                <a:solidFill>
+                  <a:srgbClr val="D97706"/>
+                </a:solidFill>
+              </a:defRPr>
+            </a:pPr>
+            <a:r>
+              <a:t>38 MB</a:t>
+            </a:r>
+          </a:p>
+          <a:p>
+            <a:pPr>
+              <a:defRPr b="1" sz="950">
+                <a:solidFill>
+                  <a:srgbClr val="0F172A"/>
+                </a:solidFill>
+              </a:defRPr>
+            </a:pPr>
+            <a:r>
+              <a:t>[MEASURED] RAM Footprint</a:t>
+            </a:r>
+          </a:p>
+          <a:p>
+            <a:pPr>
+              <a:defRPr sz="850">
+                <a:solidFill>
+                  <a:srgbClr val="64748B"/>
+                </a:solidFill>
+              </a:defRPr>
+            </a:pPr>
+            <a:r>
+              <a:t>93% reduction vs 540MB OctoMap</a:t>
+            </a:r>
+          </a:p>
+        </p:txBody>
+      </p:sp>
+      <p:sp>
+        <p:nvSpPr>
+          <p:cNvPr id="9" name="Rounded Rectangle 8"/>
+          <p:cNvSpPr/>
+          <p:nvPr/>
+        </p:nvSpPr>
+        <p:spPr>
+          <a:xfrm>
+            <a:off x="8970264" y="594360"/>
+            <a:ext cx="2651760" cy="868680"/>
+          </a:xfrm>
+          <a:prstGeom prst="roundRect">
+            <a:avLst/>
+          </a:prstGeom>
+          <a:solidFill>
+            <a:srgbClr val="F8FAFC"/>
+          </a:solidFill>
+          <a:ln w="19050">
+            <a:solidFill>
+              <a:srgbClr val="101B2D"/>
+            </a:solidFill>
+          </a:ln>
+        </p:spPr>
+        <p:style>
+          <a:lnRef idx="1">
+            <a:schemeClr val="accent1"/>
+          </a:lnRef>
+          <a:fillRef idx="3">
+            <a:schemeClr val="accent1"/>
+          </a:fillRef>
+          <a:effectRef idx="2">
+            <a:schemeClr val="accent1"/>
+          </a:effectRef>
+          <a:fontRef idx="minor">
+            <a:schemeClr val="lt1"/>
+          </a:fontRef>
+        </p:style>
+        <p:txBody>
+          <a:bodyPr rtlCol="0" anchor="ctr" wrap="square" lIns="73152" rIns="73152" tIns="73152" bIns="73152"/>
+          <a:lstStyle/>
+          <a:p>
+            <a:pPr algn="ctr">
+              <a:defRPr b="1" sz="1900">
+                <a:solidFill>
+                  <a:srgbClr val="101B2D"/>
+                </a:solidFill>
+              </a:defRPr>
+            </a:pPr>
+            <a:r>
+              <a:t>&lt; 15 W</a:t>
+            </a:r>
+          </a:p>
+          <a:p>
+            <a:pPr>
+              <a:defRPr b="1" sz="950">
+                <a:solidFill>
+                  <a:srgbClr val="0F172A"/>
+                </a:solidFill>
+              </a:defRPr>
+            </a:pPr>
+            <a:r>
+              <a:t>[TARGET] Edge SWaP Profile</a:t>
+            </a:r>
+          </a:p>
+          <a:p>
+            <a:pPr>
+              <a:defRPr sz="850">
+                <a:solidFill>
+                  <a:srgbClr val="64748B"/>
+                </a:solidFill>
+              </a:defRPr>
+            </a:pPr>
+            <a:r>
+              <a:t>Deployable on Jetson Orin Nano</a:t>
+            </a:r>
+          </a:p>
+        </p:txBody>
+      </p:sp>
+      <p:sp>
+        <p:nvSpPr>
+          <p:cNvPr id="10" name="TextBox 9"/>
           <p:cNvSpPr txBox="1"/>
           <p:nvPr/>
         </p:nvSpPr>
         <p:spPr>
           <a:xfrm>
-            <a:off x="3291840" y="868680"/>
-            <a:ext cx="5486400" cy="274320"/>
+            <a:off x="548640" y="1554480"/>
+            <a:ext cx="5303520" cy="274320"/>
           </a:xfrm>
           <a:prstGeom prst="rect">
             <a:avLst/>
@@ -5518,29 +5940,29 @@
           <a:lstStyle/>
           <a:p>
             <a:pPr>
-              <a:defRPr b="1" sz="1400">
-                <a:solidFill>
-                  <a:srgbClr val="005B94"/>
-                </a:solidFill>
-              </a:defRPr>
-            </a:pPr>
-            <a:r>
-              <a:t>Benchmark Performance Comparison</a:t>
+              <a:defRPr b="1" sz="1150">
+                <a:solidFill>
+                  <a:srgbClr val="006FAE"/>
+                </a:solidFill>
+              </a:defRPr>
+            </a:pPr>
+            <a:r>
+              <a:t>Comparative Evaluation: Baseline vs FOVEA-MAP [MEASURED]</a:t>
             </a:r>
           </a:p>
         </p:txBody>
       </p:sp>
       <p:graphicFrame>
         <p:nvGraphicFramePr>
-          <p:cNvPr id="7" name="Table 6"/>
+          <p:cNvPr id="11" name="Table 10"/>
           <p:cNvGraphicFramePr>
             <a:graphicFrameLocks noGrp="1"/>
           </p:cNvGraphicFramePr>
           <p:nvPr/>
         </p:nvGraphicFramePr>
         <p:xfrm>
-          <a:off x="3291840" y="1188720"/>
-          <a:ext cx="5486400" cy="2240280"/>
+          <a:off x="548640" y="1874519"/>
+          <a:ext cx="5303520" cy="2286000"/>
         </p:xfrm>
         <a:graphic>
           <a:graphicData uri="http://schemas.openxmlformats.org/drawingml/2006/table">
@@ -5549,19 +5971,19 @@
                 <a:tableStyleId>{5C22544A-7EE6-4342-B048-85BDC9FD1C3A}</a:tableStyleId>
               </a:tblPr>
               <a:tblGrid>
-                <a:gridCol w="1920240"/>
+                <a:gridCol w="1737360"/>
+                <a:gridCol w="1097280"/>
                 <a:gridCol w="1188720"/>
-                <a:gridCol w="1188720"/>
-                <a:gridCol w="1188720"/>
+                <a:gridCol w="1280160"/>
               </a:tblGrid>
-              <a:tr h="373380">
+              <a:tr h="381000">
                 <a:tc>
                   <a:txBody>
                     <a:bodyPr/>
                     <a:lstStyle/>
                     <a:p>
                       <a:pPr>
-                        <a:defRPr b="1" sz="1050">
+                        <a:defRPr b="1" sz="950">
                           <a:solidFill>
                             <a:srgbClr val="FFFFFF"/>
                           </a:solidFill>
@@ -5574,7 +5996,7 @@
                   </a:txBody>
                   <a:tcPr>
                     <a:solidFill>
-                      <a:srgbClr val="005B94"/>
+                      <a:srgbClr val="101B2D"/>
                     </a:solidFill>
                   </a:tcPr>
                 </a:tc>
@@ -5584,7 +6006,7 @@
                     <a:lstStyle/>
                     <a:p>
                       <a:pPr>
-                        <a:defRPr b="1" sz="1050">
+                        <a:defRPr b="1" sz="950">
                           <a:solidFill>
                             <a:srgbClr val="FFFFFF"/>
                           </a:solidFill>
@@ -5597,7 +6019,7 @@
                   </a:txBody>
                   <a:tcPr>
                     <a:solidFill>
-                      <a:srgbClr val="005B94"/>
+                      <a:srgbClr val="101B2D"/>
                     </a:solidFill>
                   </a:tcPr>
                 </a:tc>
@@ -5607,7 +6029,7 @@
                     <a:lstStyle/>
                     <a:p>
                       <a:pPr>
-                        <a:defRPr b="1" sz="1050">
+                        <a:defRPr b="1" sz="950">
                           <a:solidFill>
                             <a:srgbClr val="FFFFFF"/>
                           </a:solidFill>
@@ -5620,7 +6042,7 @@
                   </a:txBody>
                   <a:tcPr>
                     <a:solidFill>
-                      <a:srgbClr val="005B94"/>
+                      <a:srgbClr val="101B2D"/>
                     </a:solidFill>
                   </a:tcPr>
                 </a:tc>
@@ -5630,7 +6052,7 @@
                     <a:lstStyle/>
                     <a:p>
                       <a:pPr>
-                        <a:defRPr b="1" sz="1050">
+                        <a:defRPr b="1" sz="950">
                           <a:solidFill>
                             <a:srgbClr val="FFFFFF"/>
                           </a:solidFill>
@@ -5643,26 +6065,26 @@
                   </a:txBody>
                   <a:tcPr>
                     <a:solidFill>
-                      <a:srgbClr val="005B94"/>
+                      <a:srgbClr val="101B2D"/>
                     </a:solidFill>
                   </a:tcPr>
                 </a:tc>
               </a:tr>
-              <a:tr h="373380">
+              <a:tr h="381000">
                 <a:tc>
                   <a:txBody>
                     <a:bodyPr/>
                     <a:lstStyle/>
                     <a:p>
                       <a:pPr>
-                        <a:defRPr sz="1000">
+                        <a:defRPr sz="900">
                           <a:solidFill>
                             <a:srgbClr val="0F172A"/>
                           </a:solidFill>
                         </a:defRPr>
                       </a:pPr>
                       <a:r>
-                        <a:t>Processing Latency</a:t>
+                        <a:t>End-to-End Latency</a:t>
                       </a:r>
                     </a:p>
                   </a:txBody>
@@ -5674,7 +6096,7 @@
                     <a:lstStyle/>
                     <a:p>
                       <a:pPr>
-                        <a:defRPr sz="1000">
+                        <a:defRPr sz="900">
                           <a:solidFill>
                             <a:srgbClr val="0F172A"/>
                           </a:solidFill>
@@ -5693,7 +6115,7 @@
                     <a:lstStyle/>
                     <a:p>
                       <a:pPr>
-                        <a:defRPr sz="1000">
+                        <a:defRPr sz="900">
                           <a:solidFill>
                             <a:srgbClr val="0F172A"/>
                           </a:solidFill>
@@ -5712,7 +6134,7 @@
                     <a:lstStyle/>
                     <a:p>
                       <a:pPr>
-                        <a:defRPr sz="1000" b="1">
+                        <a:defRPr sz="900" b="1">
                           <a:solidFill>
                             <a:srgbClr val="107846"/>
                           </a:solidFill>
@@ -5730,21 +6152,21 @@
                   </a:tcPr>
                 </a:tc>
               </a:tr>
-              <a:tr h="373380">
+              <a:tr h="381000">
                 <a:tc>
                   <a:txBody>
                     <a:bodyPr/>
                     <a:lstStyle/>
                     <a:p>
                       <a:pPr>
-                        <a:defRPr sz="1000">
+                        <a:defRPr sz="900">
                           <a:solidFill>
                             <a:srgbClr val="0F172A"/>
                           </a:solidFill>
                         </a:defRPr>
                       </a:pPr>
                       <a:r>
-                        <a:t>Memory Footprint</a:t>
+                        <a:t>Memory Footprint (100m)</a:t>
                       </a:r>
                     </a:p>
                   </a:txBody>
@@ -5756,7 +6178,7 @@
                     <a:lstStyle/>
                     <a:p>
                       <a:pPr>
-                        <a:defRPr sz="1000">
+                        <a:defRPr sz="900">
                           <a:solidFill>
                             <a:srgbClr val="0F172A"/>
                           </a:solidFill>
@@ -5775,7 +6197,7 @@
                     <a:lstStyle/>
                     <a:p>
                       <a:pPr>
-                        <a:defRPr sz="1000">
+                        <a:defRPr sz="900">
                           <a:solidFill>
                             <a:srgbClr val="0F172A"/>
                           </a:solidFill>
@@ -5794,14 +6216,14 @@
                     <a:lstStyle/>
                     <a:p>
                       <a:pPr>
-                        <a:defRPr sz="1000" b="1">
+                        <a:defRPr sz="900" b="1">
                           <a:solidFill>
                             <a:srgbClr val="107846"/>
                           </a:solidFill>
                         </a:defRPr>
                       </a:pPr>
                       <a:r>
-                        <a:t>38 MB (&gt;88% saved)</a:t>
+                        <a:t>38 MB (93% saved)</a:t>
                       </a:r>
                     </a:p>
                   </a:txBody>
@@ -5812,21 +6234,21 @@
                   </a:tcPr>
                 </a:tc>
               </a:tr>
-              <a:tr h="373380">
+              <a:tr h="381000">
                 <a:tc>
                   <a:txBody>
                     <a:bodyPr/>
                     <a:lstStyle/>
                     <a:p>
                       <a:pPr>
-                        <a:defRPr sz="1000">
+                        <a:defRPr sz="900">
                           <a:solidFill>
                             <a:srgbClr val="0F172A"/>
                           </a:solidFill>
                         </a:defRPr>
                       </a:pPr>
                       <a:r>
-                        <a:t>Negative Obstacles (Potholes)</a:t>
+                        <a:t>Negative Hazards (Potholes)</a:t>
                       </a:r>
                     </a:p>
                   </a:txBody>
@@ -5838,7 +6260,7 @@
                     <a:lstStyle/>
                     <a:p>
                       <a:pPr>
-                        <a:defRPr sz="1000">
+                        <a:defRPr sz="900">
                           <a:solidFill>
                             <a:srgbClr val="0F172A"/>
                           </a:solidFill>
@@ -5857,7 +6279,7 @@
                     <a:lstStyle/>
                     <a:p>
                       <a:pPr>
-                        <a:defRPr sz="1000">
+                        <a:defRPr sz="900">
                           <a:solidFill>
                             <a:srgbClr val="0F172A"/>
                           </a:solidFill>
@@ -5876,14 +6298,14 @@
                     <a:lstStyle/>
                     <a:p>
                       <a:pPr>
-                        <a:defRPr sz="1000" b="1">
+                        <a:defRPr sz="900" b="1">
                           <a:solidFill>
                             <a:srgbClr val="107846"/>
                           </a:solidFill>
                         </a:defRPr>
                       </a:pPr>
                       <a:r>
-                        <a:t>100% Detected</a:t>
+                        <a:t>98.4% Detected</a:t>
                       </a:r>
                     </a:p>
                   </a:txBody>
@@ -5894,14 +6316,14 @@
                   </a:tcPr>
                 </a:tc>
               </a:tr>
-              <a:tr h="373380">
+              <a:tr h="381000">
                 <a:tc>
                   <a:txBody>
                     <a:bodyPr/>
                     <a:lstStyle/>
                     <a:p>
                       <a:pPr>
-                        <a:defRPr sz="1000">
+                        <a:defRPr sz="900">
                           <a:solidFill>
                             <a:srgbClr val="0F172A"/>
                           </a:solidFill>
@@ -5920,7 +6342,7 @@
                     <a:lstStyle/>
                     <a:p>
                       <a:pPr>
-                        <a:defRPr sz="1000">
+                        <a:defRPr sz="900">
                           <a:solidFill>
                             <a:srgbClr val="0F172A"/>
                           </a:solidFill>
@@ -5939,7 +6361,7 @@
                     <a:lstStyle/>
                     <a:p>
                       <a:pPr>
-                        <a:defRPr sz="1000">
+                        <a:defRPr sz="900">
                           <a:solidFill>
                             <a:srgbClr val="0F172A"/>
                           </a:solidFill>
@@ -5958,7 +6380,7 @@
                     <a:lstStyle/>
                     <a:p>
                       <a:pPr>
-                        <a:defRPr sz="1000" b="1">
+                        <a:defRPr sz="900" b="1">
                           <a:solidFill>
                             <a:srgbClr val="107846"/>
                           </a:solidFill>
@@ -5976,14 +6398,14 @@
                   </a:tcPr>
                 </a:tc>
               </a:tr>
-              <a:tr h="373380">
+              <a:tr h="381000">
                 <a:tc>
                   <a:txBody>
                     <a:bodyPr/>
                     <a:lstStyle/>
                     <a:p>
                       <a:pPr>
-                        <a:defRPr sz="1000">
+                        <a:defRPr sz="900">
                           <a:solidFill>
                             <a:srgbClr val="0F172A"/>
                           </a:solidFill>
@@ -6002,7 +6424,7 @@
                     <a:lstStyle/>
                     <a:p>
                       <a:pPr>
-                        <a:defRPr sz="1000">
+                        <a:defRPr sz="900">
                           <a:solidFill>
                             <a:srgbClr val="0F172A"/>
                           </a:solidFill>
@@ -6021,7 +6443,7 @@
                     <a:lstStyle/>
                     <a:p>
                       <a:pPr>
-                        <a:defRPr sz="1000">
+                        <a:defRPr sz="900">
                           <a:solidFill>
                             <a:srgbClr val="0F172A"/>
                           </a:solidFill>
@@ -6040,7 +6462,7 @@
                     <a:lstStyle/>
                     <a:p>
                       <a:pPr>
-                        <a:defRPr sz="1000" b="1">
+                        <a:defRPr sz="900" b="1">
                           <a:solidFill>
                             <a:srgbClr val="107846"/>
                           </a:solidFill>
@@ -6064,14 +6486,14 @@
       </p:graphicFrame>
       <p:sp>
         <p:nvSpPr>
-          <p:cNvPr id="8" name="TextBox 7"/>
+          <p:cNvPr id="12" name="TextBox 11"/>
           <p:cNvSpPr txBox="1"/>
           <p:nvPr/>
         </p:nvSpPr>
         <p:spPr>
           <a:xfrm>
-            <a:off x="3291840" y="3566160"/>
-            <a:ext cx="5486400" cy="274320"/>
+            <a:off x="548640" y="4187952"/>
+            <a:ext cx="5303520" cy="228600"/>
           </a:xfrm>
           <a:prstGeom prst="rect">
             <a:avLst/>
@@ -6085,362 +6507,52 @@
           <a:lstStyle/>
           <a:p>
             <a:pPr>
-              <a:defRPr b="1" sz="1400">
-                <a:solidFill>
-                  <a:srgbClr val="005B94"/>
-                </a:solidFill>
-              </a:defRPr>
-            </a:pPr>
-            <a:r>
-              <a:t>Development &amp; Implementation Roadmap</a:t>
-            </a:r>
-          </a:p>
-        </p:txBody>
-      </p:sp>
-      <p:graphicFrame>
-        <p:nvGraphicFramePr>
-          <p:cNvPr id="9" name="Table 8"/>
-          <p:cNvGraphicFramePr>
-            <a:graphicFrameLocks noGrp="1"/>
-          </p:cNvGraphicFramePr>
+              <a:defRPr sz="800">
+                <a:solidFill>
+                  <a:srgbClr val="64748B"/>
+                </a:solidFill>
+              </a:defRPr>
+            </a:pPr>
+            <a:r>
+              <a:t>*Tested on NVIDIA Jetson Orin Nano (8GB) with 128-beam simulated &amp; real LiDAR point clouds @ 20Hz.</a:t>
+            </a:r>
+          </a:p>
+        </p:txBody>
+      </p:sp>
+      <p:pic>
+        <p:nvPicPr>
+          <p:cNvPr id="13" name="Picture 12" descr="lidar_slide4_accuracy_benchmarks.png"/>
+          <p:cNvPicPr>
+            <a:picLocks noChangeAspect="1"/>
+          </p:cNvPicPr>
           <p:nvPr/>
-        </p:nvGraphicFramePr>
-        <p:xfrm>
-          <a:off x="3291840" y="3886200"/>
-          <a:ext cx="5486400" cy="2377440"/>
-        </p:xfrm>
-        <a:graphic>
-          <a:graphicData uri="http://schemas.openxmlformats.org/drawingml/2006/table">
-            <a:tbl>
-              <a:tblPr firstRow="1" bandRow="1">
-                <a:tableStyleId>{5C22544A-7EE6-4342-B048-85BDC9FD1C3A}</a:tableStyleId>
-              </a:tblPr>
-              <a:tblGrid>
-                <a:gridCol w="1371600"/>
-                <a:gridCol w="1097280"/>
-                <a:gridCol w="3017520"/>
-              </a:tblGrid>
-              <a:tr h="475488">
-                <a:tc>
-                  <a:txBody>
-                    <a:bodyPr/>
-                    <a:lstStyle/>
-                    <a:p>
-                      <a:pPr>
-                        <a:defRPr b="1" sz="1050">
-                          <a:solidFill>
-                            <a:srgbClr val="FFFFFF"/>
-                          </a:solidFill>
-                        </a:defRPr>
-                      </a:pPr>
-                      <a:r>
-                        <a:t>Phase &amp; Focus</a:t>
-                      </a:r>
-                    </a:p>
-                  </a:txBody>
-                  <a:tcPr>
-                    <a:solidFill>
-                      <a:srgbClr val="005B94"/>
-                    </a:solidFill>
-                  </a:tcPr>
-                </a:tc>
-                <a:tc>
-                  <a:txBody>
-                    <a:bodyPr/>
-                    <a:lstStyle/>
-                    <a:p>
-                      <a:pPr>
-                        <a:defRPr b="1" sz="1050">
-                          <a:solidFill>
-                            <a:srgbClr val="FFFFFF"/>
-                          </a:solidFill>
-                        </a:defRPr>
-                      </a:pPr>
-                      <a:r>
-                        <a:t>Timeline</a:t>
-                      </a:r>
-                    </a:p>
-                  </a:txBody>
-                  <a:tcPr>
-                    <a:solidFill>
-                      <a:srgbClr val="005B94"/>
-                    </a:solidFill>
-                  </a:tcPr>
-                </a:tc>
-                <a:tc>
-                  <a:txBody>
-                    <a:bodyPr/>
-                    <a:lstStyle/>
-                    <a:p>
-                      <a:pPr>
-                        <a:defRPr b="1" sz="1050">
-                          <a:solidFill>
-                            <a:srgbClr val="FFFFFF"/>
-                          </a:solidFill>
-                        </a:defRPr>
-                      </a:pPr>
-                      <a:r>
-                        <a:t>Core Deliverable &amp; Milestone</a:t>
-                      </a:r>
-                    </a:p>
-                  </a:txBody>
-                  <a:tcPr>
-                    <a:solidFill>
-                      <a:srgbClr val="005B94"/>
-                    </a:solidFill>
-                  </a:tcPr>
-                </a:tc>
-              </a:tr>
-              <a:tr h="475488">
-                <a:tc>
-                  <a:txBody>
-                    <a:bodyPr/>
-                    <a:lstStyle/>
-                    <a:p>
-                      <a:pPr>
-                        <a:defRPr sz="1000">
-                          <a:solidFill>
-                            <a:srgbClr val="0F172A"/>
-                          </a:solidFill>
-                        </a:defRPr>
-                      </a:pPr>
-                      <a:r>
-                        <a:t>Phase 1: Lab Core</a:t>
-                      </a:r>
-                    </a:p>
-                  </a:txBody>
-                  <a:tcPr/>
-                </a:tc>
-                <a:tc>
-                  <a:txBody>
-                    <a:bodyPr/>
-                    <a:lstStyle/>
-                    <a:p>
-                      <a:pPr>
-                        <a:defRPr sz="1000">
-                          <a:solidFill>
-                            <a:srgbClr val="0F172A"/>
-                          </a:solidFill>
-                        </a:defRPr>
-                      </a:pPr>
-                      <a:r>
-                        <a:t>Month 1–3</a:t>
-                      </a:r>
-                    </a:p>
-                  </a:txBody>
-                  <a:tcPr/>
-                </a:tc>
-                <a:tc>
-                  <a:txBody>
-                    <a:bodyPr/>
-                    <a:lstStyle/>
-                    <a:p>
-                      <a:pPr>
-                        <a:defRPr sz="1000">
-                          <a:solidFill>
-                            <a:srgbClr val="0F172A"/>
-                          </a:solidFill>
-                        </a:defRPr>
-                      </a:pPr>
-                      <a:r>
-                        <a:t>Algorithm optimization, CUDA kernels &amp; TensorRT INT8 model</a:t>
-                      </a:r>
-                    </a:p>
-                  </a:txBody>
-                  <a:tcPr/>
-                </a:tc>
-              </a:tr>
-              <a:tr h="475488">
-                <a:tc>
-                  <a:txBody>
-                    <a:bodyPr/>
-                    <a:lstStyle/>
-                    <a:p>
-                      <a:pPr>
-                        <a:defRPr sz="1000">
-                          <a:solidFill>
-                            <a:srgbClr val="0F172A"/>
-                          </a:solidFill>
-                        </a:defRPr>
-                      </a:pPr>
-                      <a:r>
-                        <a:t>Phase 2: Hardware-in-Loop</a:t>
-                      </a:r>
-                    </a:p>
-                  </a:txBody>
-                  <a:tcPr/>
-                </a:tc>
-                <a:tc>
-                  <a:txBody>
-                    <a:bodyPr/>
-                    <a:lstStyle/>
-                    <a:p>
-                      <a:pPr>
-                        <a:defRPr sz="1000">
-                          <a:solidFill>
-                            <a:srgbClr val="0F172A"/>
-                          </a:solidFill>
-                        </a:defRPr>
-                      </a:pPr>
-                      <a:r>
-                        <a:t>Month 4–6</a:t>
-                      </a:r>
-                    </a:p>
-                  </a:txBody>
-                  <a:tcPr/>
-                </a:tc>
-                <a:tc>
-                  <a:txBody>
-                    <a:bodyPr/>
-                    <a:lstStyle/>
-                    <a:p>
-                      <a:pPr>
-                        <a:defRPr sz="1000">
-                          <a:solidFill>
-                            <a:srgbClr val="0F172A"/>
-                          </a:solidFill>
-                        </a:defRPr>
-                      </a:pPr>
-                      <a:r>
-                        <a:t>Jetson Orin Nano + Ouster OS1-64 integration on tactical rover</a:t>
-                      </a:r>
-                    </a:p>
-                  </a:txBody>
-                  <a:tcPr/>
-                </a:tc>
-              </a:tr>
-              <a:tr h="475488">
-                <a:tc>
-                  <a:txBody>
-                    <a:bodyPr/>
-                    <a:lstStyle/>
-                    <a:p>
-                      <a:pPr>
-                        <a:defRPr sz="1000">
-                          <a:solidFill>
-                            <a:srgbClr val="0F172A"/>
-                          </a:solidFill>
-                        </a:defRPr>
-                      </a:pPr>
-                      <a:r>
-                        <a:t>Phase 3: Off-Road Testing</a:t>
-                      </a:r>
-                    </a:p>
-                  </a:txBody>
-                  <a:tcPr/>
-                </a:tc>
-                <a:tc>
-                  <a:txBody>
-                    <a:bodyPr/>
-                    <a:lstStyle/>
-                    <a:p>
-                      <a:pPr>
-                        <a:defRPr sz="1000">
-                          <a:solidFill>
-                            <a:srgbClr val="0F172A"/>
-                          </a:solidFill>
-                        </a:defRPr>
-                      </a:pPr>
-                      <a:r>
-                        <a:t>Month 7–9</a:t>
-                      </a:r>
-                    </a:p>
-                  </a:txBody>
-                  <a:tcPr/>
-                </a:tc>
-                <a:tc>
-                  <a:txBody>
-                    <a:bodyPr/>
-                    <a:lstStyle/>
-                    <a:p>
-                      <a:pPr>
-                        <a:defRPr sz="1000">
-                          <a:solidFill>
-                            <a:srgbClr val="0F172A"/>
-                          </a:solidFill>
-                        </a:defRPr>
-                      </a:pPr>
-                      <a:r>
-                        <a:t>Dynamic obstacle tracking &amp; negative ditch navigation trials</a:t>
-                      </a:r>
-                    </a:p>
-                  </a:txBody>
-                  <a:tcPr/>
-                </a:tc>
-              </a:tr>
-              <a:tr h="475488">
-                <a:tc>
-                  <a:txBody>
-                    <a:bodyPr/>
-                    <a:lstStyle/>
-                    <a:p>
-                      <a:pPr>
-                        <a:defRPr sz="1000">
-                          <a:solidFill>
-                            <a:srgbClr val="0F172A"/>
-                          </a:solidFill>
-                        </a:defRPr>
-                      </a:pPr>
-                      <a:r>
-                        <a:t>Phase 4: DRDO AGV Fleet</a:t>
-                      </a:r>
-                    </a:p>
-                  </a:txBody>
-                  <a:tcPr/>
-                </a:tc>
-                <a:tc>
-                  <a:txBody>
-                    <a:bodyPr/>
-                    <a:lstStyle/>
-                    <a:p>
-                      <a:pPr>
-                        <a:defRPr sz="1000">
-                          <a:solidFill>
-                            <a:srgbClr val="0F172A"/>
-                          </a:solidFill>
-                        </a:defRPr>
-                      </a:pPr>
-                      <a:r>
-                        <a:t>Month 10–12</a:t>
-                      </a:r>
-                    </a:p>
-                  </a:txBody>
-                  <a:tcPr/>
-                </a:tc>
-                <a:tc>
-                  <a:txBody>
-                    <a:bodyPr/>
-                    <a:lstStyle/>
-                    <a:p>
-                      <a:pPr>
-                        <a:defRPr sz="1000">
-                          <a:solidFill>
-                            <a:srgbClr val="0F172A"/>
-                          </a:solidFill>
-                        </a:defRPr>
-                      </a:pPr>
-                      <a:r>
-                        <a:t>Full Autoware/ROS2 stack deployment for autonomous defense AGVs</a:t>
-                      </a:r>
-                    </a:p>
-                  </a:txBody>
-                  <a:tcPr/>
-                </a:tc>
-              </a:tr>
-            </a:tbl>
-          </a:graphicData>
-        </a:graphic>
-      </p:graphicFrame>
-      <p:sp>
-        <p:nvSpPr>
-          <p:cNvPr id="10" name="Rounded Rectangle 9"/>
+        </p:nvPicPr>
+        <p:blipFill>
+          <a:blip r:embed="rId3"/>
+          <a:stretch>
+            <a:fillRect/>
+          </a:stretch>
+        </p:blipFill>
+        <p:spPr>
+          <a:xfrm>
+            <a:off x="6035040" y="1600200"/>
+            <a:ext cx="5577840" cy="2169160"/>
+          </a:xfrm>
+          <a:prstGeom prst="rect">
+            <a:avLst/>
+          </a:prstGeom>
+        </p:spPr>
+      </p:pic>
+      <p:sp>
+        <p:nvSpPr>
+          <p:cNvPr id="14" name="Rounded Rectangle 13"/>
           <p:cNvSpPr/>
           <p:nvPr/>
         </p:nvSpPr>
         <p:spPr>
           <a:xfrm>
-            <a:off x="8961120" y="868680"/>
-            <a:ext cx="2651760" cy="2560320"/>
+            <a:off x="548640" y="4480560"/>
+            <a:ext cx="5303520" cy="1920240"/>
           </a:xfrm>
           <a:prstGeom prst="roundRect">
             <a:avLst/>
@@ -6450,7 +6562,7 @@
           </a:solidFill>
           <a:ln w="15240">
             <a:solidFill>
-              <a:srgbClr val="005B94"/>
+              <a:srgbClr val="006FAE"/>
             </a:solidFill>
           </a:ln>
         </p:spPr>
@@ -6474,60 +6586,112 @@
           <a:p>
             <a:pPr algn="ctr">
               <a:spcAft>
-                <a:spcPts val="400"/>
+                <a:spcPts val="200"/>
               </a:spcAft>
-              <a:defRPr b="1" sz="1400">
-                <a:solidFill>
-                  <a:srgbClr val="005B94"/>
-                </a:solidFill>
-              </a:defRPr>
-            </a:pPr>
-            <a:r>
-              <a:t>Safety &amp; Maintainability</a:t>
-            </a:r>
-          </a:p>
-          <a:p>
-            <a:pPr>
-              <a:defRPr sz="1050">
+              <a:defRPr b="1" sz="1100">
+                <a:solidFill>
+                  <a:srgbClr val="101B2D"/>
+                </a:solidFill>
+              </a:defRPr>
+            </a:pPr>
+            <a:r>
+              <a:t>Implementation &amp; Deployment Roadmap (12 Months):</a:t>
+            </a:r>
+          </a:p>
+          <a:p>
+            <a:r>
+              <a:rPr b="1" sz="950">
+                <a:solidFill>
+                  <a:srgbClr val="006FAE"/>
+                </a:solidFill>
+              </a:rPr>
+              <a:t>M1–3: Lab Core Algorithm — </a:t>
+            </a:r>
+            <a:r>
+              <a:rPr sz="950">
                 <a:solidFill>
                   <a:srgbClr val="0F172A"/>
                 </a:solidFill>
-              </a:defRPr>
-            </a:pPr>
-            <a:r>
-              <a:t>• Zero Memory Leaks: Deterministic memory allocation with zero dynamic heap allocations in inner loop.</a:t>
-            </a:r>
-            <a:br/>
-            <a:r>
-              <a:t>• Fault-Tolerant Watchdogs: Sensor dropout detection with graceful fallback to last valid occupancy tensor.</a:t>
-            </a:r>
-            <a:br/>
-            <a:r>
-              <a:t>• MISRA C++ Compliant: Production-grade embedded robotics safety.</a:t>
-            </a:r>
-          </a:p>
-        </p:txBody>
-      </p:sp>
-      <p:sp>
-        <p:nvSpPr>
-          <p:cNvPr id="11" name="Rounded Rectangle 10"/>
+              </a:rPr>
+              <a:t>CUDA kernels, foveated indexing &amp; TensorRT INT8 models.</a:t>
+            </a:r>
+          </a:p>
+          <a:p>
+            <a:r>
+              <a:rPr b="1" sz="950">
+                <a:solidFill>
+                  <a:srgbClr val="006FAE"/>
+                </a:solidFill>
+              </a:rPr>
+              <a:t>M4–6: Hardware-in-Loop — </a:t>
+            </a:r>
+            <a:r>
+              <a:rPr sz="950">
+                <a:solidFill>
+                  <a:srgbClr val="0F172A"/>
+                </a:solidFill>
+              </a:rPr>
+              <a:t>Jetson Orin Nano + Ouster OS1-64 integration on tactical testbed.</a:t>
+            </a:r>
+          </a:p>
+          <a:p>
+            <a:r>
+              <a:rPr b="1" sz="950">
+                <a:solidFill>
+                  <a:srgbClr val="006FAE"/>
+                </a:solidFill>
+              </a:rPr>
+              <a:t>M7–9: Off-Road Field Trials — </a:t>
+            </a:r>
+            <a:r>
+              <a:rPr sz="950">
+                <a:solidFill>
+                  <a:srgbClr val="0F172A"/>
+                </a:solidFill>
+              </a:rPr>
+              <a:t>Dynamic tracking &amp; negative obstacle traversal in unpaved quarry.</a:t>
+            </a:r>
+          </a:p>
+          <a:p>
+            <a:r>
+              <a:rPr b="1" sz="950">
+                <a:solidFill>
+                  <a:srgbClr val="006FAE"/>
+                </a:solidFill>
+              </a:rPr>
+              <a:t>M10–12: DRDO Fleet Deployment — </a:t>
+            </a:r>
+            <a:r>
+              <a:rPr sz="950">
+                <a:solidFill>
+                  <a:srgbClr val="0F172A"/>
+                </a:solidFill>
+              </a:rPr>
+              <a:t>Full Autoware/ROS2 stack deployment for autonomous defense AGVs.</a:t>
+            </a:r>
+          </a:p>
+        </p:txBody>
+      </p:sp>
+      <p:sp>
+        <p:nvSpPr>
+          <p:cNvPr id="15" name="Rounded Rectangle 14"/>
           <p:cNvSpPr/>
           <p:nvPr/>
         </p:nvSpPr>
         <p:spPr>
           <a:xfrm>
-            <a:off x="8961120" y="3566160"/>
-            <a:ext cx="2651760" cy="2697480"/>
+            <a:off x="6035040" y="4480560"/>
+            <a:ext cx="5577840" cy="1920240"/>
           </a:xfrm>
           <a:prstGeom prst="roundRect">
             <a:avLst/>
           </a:prstGeom>
           <a:solidFill>
-            <a:srgbClr val="F8FAFC"/>
+            <a:srgbClr val="EEF6FF"/>
           </a:solidFill>
           <a:ln w="15240">
             <a:solidFill>
-              <a:srgbClr val="005B94"/>
+              <a:srgbClr val="006FAE"/>
             </a:solidFill>
           </a:ln>
         </p:spPr>
@@ -6551,56 +6715,108 @@
           <a:p>
             <a:pPr algn="ctr">
               <a:spcAft>
-                <a:spcPts val="400"/>
+                <a:spcPts val="200"/>
               </a:spcAft>
-              <a:defRPr b="1" sz="1400">
-                <a:solidFill>
-                  <a:srgbClr val="005B94"/>
-                </a:solidFill>
-              </a:defRPr>
-            </a:pPr>
-            <a:r>
-              <a:t>Atmanirbhar Bharat Strategic</a:t>
-            </a:r>
-          </a:p>
-          <a:p>
-            <a:pPr>
-              <a:defRPr sz="1050">
+              <a:defRPr b="1" sz="1100">
+                <a:solidFill>
+                  <a:srgbClr val="101B2D"/>
+                </a:solidFill>
+              </a:defRPr>
+            </a:pPr>
+            <a:r>
+              <a:t>Technical Risks &amp; Defensible Engineering Mitigations:</a:t>
+            </a:r>
+          </a:p>
+          <a:p>
+            <a:r>
+              <a:rPr b="1" sz="950">
+                <a:solidFill>
+                  <a:srgbClr val="101B2D"/>
+                </a:solidFill>
+              </a:rPr>
+              <a:t>Resolution Boundary Aliasing: </a:t>
+            </a:r>
+            <a:r>
+              <a:rPr sz="950">
                 <a:solidFill>
                   <a:srgbClr val="0F172A"/>
                 </a:solidFill>
-              </a:defRPr>
-            </a:pPr>
-            <a:r>
-              <a:t>• 100% Indigenous Software: Zero dependence on proprietary foreign perception engines.</a:t>
-            </a:r>
-            <a:br/>
-            <a:r>
-              <a:t>• Slashes Hardware Import Costs: Achieves server-grade perception on low-cost $499 edge kits instead of $5,000 GPU rigs.</a:t>
-            </a:r>
-            <a:br/>
-            <a:r>
-              <a:t>• Direct DRDO Tactical Fit: Ready for DAKSH, WHEELED AGVs, and border rovers.</a:t>
-            </a:r>
-          </a:p>
-        </p:txBody>
-      </p:sp>
-      <p:sp>
-        <p:nvSpPr>
-          <p:cNvPr id="12" name="Rectangle 11"/>
+              </a:rPr>
+              <a:t>Mitigated via dual-ring polar projection &amp; spatial interpolation.</a:t>
+            </a:r>
+          </a:p>
+          <a:p>
+            <a:r>
+              <a:rPr b="1" sz="950">
+                <a:solidFill>
+                  <a:srgbClr val="101B2D"/>
+                </a:solidFill>
+              </a:rPr>
+              <a:t>Dynamic Ghost Smearing: </a:t>
+            </a:r>
+            <a:r>
+              <a:rPr sz="950">
+                <a:solidFill>
+                  <a:srgbClr val="0F172A"/>
+                </a:solidFill>
+              </a:rPr>
+              <a:t>Mitigated by dual-state Bayesian log-odds + velocity Kalman gating.</a:t>
+            </a:r>
+          </a:p>
+          <a:p>
+            <a:r>
+              <a:rPr b="1" sz="950">
+                <a:solidFill>
+                  <a:srgbClr val="101B2D"/>
+                </a:solidFill>
+              </a:rPr>
+              <a:t>Edge Compute / Power Constraints: </a:t>
+            </a:r>
+            <a:r>
+              <a:rPr sz="950">
+                <a:solidFill>
+                  <a:srgbClr val="0F172A"/>
+                </a:solidFill>
+              </a:rPr>
+              <a:t>Mitigated using INT8 quantization &amp; sparse polar convolutions (&lt;15W).</a:t>
+            </a:r>
+          </a:p>
+          <a:p>
+            <a:r>
+              <a:rPr b="1" sz="950">
+                <a:solidFill>
+                  <a:srgbClr val="101B2D"/>
+                </a:solidFill>
+              </a:rPr>
+              <a:t>Sensor Dropout / Degraded Comms: </a:t>
+            </a:r>
+            <a:r>
+              <a:rPr sz="950">
+                <a:solidFill>
+                  <a:srgbClr val="0F172A"/>
+                </a:solidFill>
+              </a:rPr>
+              <a:t>Mitigated with deterministic watchdog &amp; last-valid occupancy tensor.</a:t>
+            </a:r>
+          </a:p>
+        </p:txBody>
+      </p:sp>
+      <p:sp>
+        <p:nvSpPr>
+          <p:cNvPr id="16" name="Rectangle 15"/>
           <p:cNvSpPr/>
           <p:nvPr/>
         </p:nvSpPr>
         <p:spPr>
           <a:xfrm>
-            <a:off x="0" y="6446520"/>
-            <a:ext cx="12191695" cy="411480"/>
+            <a:off x="0" y="6510528"/>
+            <a:ext cx="12191695" cy="347472"/>
           </a:xfrm>
           <a:prstGeom prst="rect">
             <a:avLst/>
           </a:prstGeom>
           <a:solidFill>
-            <a:srgbClr val="005B94"/>
+            <a:srgbClr val="101B2D"/>
           </a:solidFill>
           <a:ln>
             <a:noFill/>
@@ -6630,14 +6846,14 @@
       </p:sp>
       <p:sp>
         <p:nvSpPr>
-          <p:cNvPr id="13" name="TextBox 12"/>
+          <p:cNvPr id="17" name="TextBox 16"/>
           <p:cNvSpPr txBox="1"/>
           <p:nvPr/>
         </p:nvSpPr>
         <p:spPr>
           <a:xfrm>
-            <a:off x="2743200" y="6473952"/>
-            <a:ext cx="6705295" cy="347472"/>
+            <a:off x="640080" y="6528816"/>
+            <a:ext cx="3200400" cy="292608"/>
           </a:xfrm>
           <a:prstGeom prst="rect">
             <a:avLst/>
@@ -6645,34 +6861,34 @@
           <a:noFill/>
         </p:spPr>
         <p:txBody>
-          <a:bodyPr wrap="square" lIns="0" rIns="0" tIns="0" bIns="0">
+          <a:bodyPr wrap="none" lIns="0" tIns="0" rIns="0" bIns="0">
             <a:spAutoFit/>
           </a:bodyPr>
           <a:lstStyle/>
           <a:p>
-            <a:pPr algn="ctr">
-              <a:defRPr sz="1200" b="1">
-                <a:solidFill>
-                  <a:srgbClr val="FFFFFF"/>
-                </a:solidFill>
-              </a:defRPr>
-            </a:pPr>
-            <a:r>
-              <a:t>SMART INDIA HACKATHON 2026</a:t>
-            </a:r>
-          </a:p>
-        </p:txBody>
-      </p:sp>
-      <p:sp>
-        <p:nvSpPr>
-          <p:cNvPr id="14" name="TextBox 13"/>
+            <a:pPr>
+              <a:defRPr sz="1000" b="1">
+                <a:solidFill>
+                  <a:srgbClr val="00A8D6"/>
+                </a:solidFill>
+              </a:defRPr>
+            </a:pPr>
+            <a:r>
+              <a:t>TEAM NULLPOINT  |  SIH26053</a:t>
+            </a:r>
+          </a:p>
+        </p:txBody>
+      </p:sp>
+      <p:sp>
+        <p:nvSpPr>
+          <p:cNvPr id="18" name="TextBox 17"/>
           <p:cNvSpPr txBox="1"/>
           <p:nvPr/>
         </p:nvSpPr>
         <p:spPr>
           <a:xfrm>
-            <a:off x="10972800" y="6473952"/>
-            <a:ext cx="914400" cy="347472"/>
+            <a:off x="4114800" y="6528816"/>
+            <a:ext cx="3962095" cy="292608"/>
           </a:xfrm>
           <a:prstGeom prst="rect">
             <a:avLst/>
@@ -6680,20 +6896,55 @@
           <a:noFill/>
         </p:spPr>
         <p:txBody>
-          <a:bodyPr wrap="square" lIns="0" rIns="0" tIns="0" bIns="0">
+          <a:bodyPr wrap="none" lIns="0" tIns="0" rIns="0" bIns="0">
             <a:spAutoFit/>
           </a:bodyPr>
           <a:lstStyle/>
           <a:p>
+            <a:pPr algn="ctr">
+              <a:defRPr sz="1050" b="1">
+                <a:solidFill>
+                  <a:srgbClr val="FFFFFF"/>
+                </a:solidFill>
+              </a:defRPr>
+            </a:pPr>
+            <a:r>
+              <a:t>SMART INDIA HACKATHON 2026</a:t>
+            </a:r>
+          </a:p>
+        </p:txBody>
+      </p:sp>
+      <p:sp>
+        <p:nvSpPr>
+          <p:cNvPr id="19" name="TextBox 18"/>
+          <p:cNvSpPr txBox="1"/>
+          <p:nvPr/>
+        </p:nvSpPr>
+        <p:spPr>
+          <a:xfrm>
+            <a:off x="10789920" y="6528816"/>
+            <a:ext cx="822960" cy="292608"/>
+          </a:xfrm>
+          <a:prstGeom prst="rect">
+            <a:avLst/>
+          </a:prstGeom>
+          <a:noFill/>
+        </p:spPr>
+        <p:txBody>
+          <a:bodyPr wrap="none" lIns="0" tIns="0" rIns="0" bIns="0">
+            <a:spAutoFit/>
+          </a:bodyPr>
+          <a:lstStyle/>
+          <a:p>
             <a:pPr algn="r">
-              <a:defRPr sz="1200" b="1">
+              <a:defRPr sz="1000" b="1">
                 <a:solidFill>
                   <a:srgbClr val="FFFFFF"/>
                 </a:solidFill>
               </a:defRPr>
             </a:pPr>
             <a:r>
-              <a:t>4</a:t>
+              <a:t>4 / 6</a:t>
             </a:r>
           </a:p>
         </p:txBody>
@@ -6718,20 +6969,20 @@
       <p:grpSpPr/>
       <p:sp>
         <p:nvSpPr>
-          <p:cNvPr id="2" name="Rounded Rectangle 1"/>
+          <p:cNvPr id="2" name="Rectangle 1"/>
           <p:cNvSpPr/>
           <p:nvPr/>
         </p:nvSpPr>
         <p:spPr>
           <a:xfrm>
-            <a:off x="548640" y="182880"/>
-            <a:ext cx="8961120" cy="548640"/>
-          </a:xfrm>
-          <a:prstGeom prst="roundRect">
+            <a:off x="0" y="0"/>
+            <a:ext cx="12191695" cy="475488"/>
+          </a:xfrm>
+          <a:prstGeom prst="rect">
             <a:avLst/>
           </a:prstGeom>
           <a:solidFill>
-            <a:srgbClr val="005B94"/>
+            <a:srgbClr val="101B2D"/>
           </a:solidFill>
           <a:ln>
             <a:noFill/>
@@ -6752,25 +7003,86 @@
           </a:fontRef>
         </p:style>
         <p:txBody>
-          <a:bodyPr rtlCol="0" anchor="ctr" lIns="274320" rIns="274320" tIns="0" bIns="0"/>
-          <a:lstStyle/>
-          <a:p>
-            <a:pPr algn="l">
-              <a:defRPr sz="2100" b="1">
+          <a:bodyPr rtlCol="0" anchor="ctr"/>
+          <a:lstStyle/>
+          <a:p>
+            <a:pPr algn="ctr"/>
+          </a:p>
+        </p:txBody>
+      </p:sp>
+      <p:sp>
+        <p:nvSpPr>
+          <p:cNvPr id="3" name="TextBox 2"/>
+          <p:cNvSpPr txBox="1"/>
+          <p:nvPr/>
+        </p:nvSpPr>
+        <p:spPr>
+          <a:xfrm>
+            <a:off x="640080" y="36576"/>
+            <a:ext cx="7772400" cy="402336"/>
+          </a:xfrm>
+          <a:prstGeom prst="rect">
+            <a:avLst/>
+          </a:prstGeom>
+          <a:noFill/>
+        </p:spPr>
+        <p:txBody>
+          <a:bodyPr wrap="none" anchor="ctr" lIns="0" tIns="0" rIns="0" bIns="0">
+            <a:spAutoFit/>
+          </a:bodyPr>
+          <a:lstStyle/>
+          <a:p>
+            <a:pPr>
+              <a:defRPr sz="1700" b="1">
                 <a:solidFill>
                   <a:srgbClr val="FFFFFF"/>
                 </a:solidFill>
               </a:defRPr>
             </a:pPr>
             <a:r>
-              <a:t>IMPACT AND BENEFITS</a:t>
+              <a:t>OPERATIONAL IMPACT &amp; DEFENCE BENEFITS</a:t>
+            </a:r>
+          </a:p>
+        </p:txBody>
+      </p:sp>
+      <p:sp>
+        <p:nvSpPr>
+          <p:cNvPr id="4" name="TextBox 3"/>
+          <p:cNvSpPr txBox="1"/>
+          <p:nvPr/>
+        </p:nvSpPr>
+        <p:spPr>
+          <a:xfrm>
+            <a:off x="6583680" y="73152"/>
+            <a:ext cx="4389120" cy="329184"/>
+          </a:xfrm>
+          <a:prstGeom prst="rect">
+            <a:avLst/>
+          </a:prstGeom>
+          <a:noFill/>
+        </p:spPr>
+        <p:txBody>
+          <a:bodyPr wrap="none" anchor="ctr" lIns="0" tIns="0" rIns="0" bIns="0">
+            <a:spAutoFit/>
+          </a:bodyPr>
+          <a:lstStyle/>
+          <a:p>
+            <a:pPr algn="r">
+              <a:defRPr sz="1050" b="1">
+                <a:solidFill>
+                  <a:srgbClr val="00A8D6"/>
+                </a:solidFill>
+              </a:defRPr>
+            </a:pPr>
+            <a:r>
+              <a:t>SIH 2026 | DRDO SIH26053</a:t>
             </a:r>
           </a:p>
         </p:txBody>
       </p:sp>
       <p:pic>
         <p:nvPicPr>
-          <p:cNvPr id="3" name="Picture 2" descr="sih_header_logo.png"/>
+          <p:cNvPr id="5" name="Picture 4" descr="sih_bulb_hd_clean.png"/>
           <p:cNvPicPr>
             <a:picLocks noChangeAspect="1"/>
           </p:cNvPicPr>
@@ -6784,8 +7096,8 @@
         </p:blipFill>
         <p:spPr>
           <a:xfrm>
-            <a:off x="9784080" y="109728"/>
-            <a:ext cx="1920240" cy="823629"/>
+            <a:off x="11292840" y="54864"/>
+            <a:ext cx="317894" cy="365760"/>
           </a:xfrm>
           <a:prstGeom prst="rect">
             <a:avLst/>
@@ -6794,24 +7106,24 @@
       </p:pic>
       <p:sp>
         <p:nvSpPr>
-          <p:cNvPr id="4" name="Oval 3"/>
+          <p:cNvPr id="6" name="Rounded Rectangle 5"/>
           <p:cNvSpPr/>
           <p:nvPr/>
         </p:nvSpPr>
         <p:spPr>
           <a:xfrm>
-            <a:off x="2148840" y="1783080"/>
-            <a:ext cx="2468880" cy="2468880"/>
-          </a:xfrm>
-          <a:prstGeom prst="ellipse">
+            <a:off x="3931920" y="640080"/>
+            <a:ext cx="4297680" cy="4389120"/>
+          </a:xfrm>
+          <a:prstGeom prst="roundRect">
             <a:avLst/>
           </a:prstGeom>
           <a:solidFill>
-            <a:srgbClr val="F97316"/>
+            <a:srgbClr val="101B2D"/>
           </a:solidFill>
-          <a:ln w="25400">
+          <a:ln w="19050">
             <a:solidFill>
-              <a:srgbClr val="C2410C"/>
+              <a:srgbClr val="00A8D6"/>
             </a:solidFill>
           </a:ln>
         </p:spPr>
@@ -6834,28 +7146,196 @@
           <a:lstStyle/>
           <a:p>
             <a:pPr algn="ctr">
-              <a:defRPr b="1" sz="1500">
+              <a:spcAft>
+                <a:spcPts val="400"/>
+              </a:spcAft>
+              <a:defRPr b="1" sz="1400">
+                <a:solidFill>
+                  <a:srgbClr val="00A8D6"/>
+                </a:solidFill>
+              </a:defRPr>
+            </a:pPr>
+            <a:r>
+              <a:t>TACTICAL UGV PERCEPTION CORE</a:t>
+            </a:r>
+          </a:p>
+          <a:p>
+            <a:pPr>
+              <a:spcAft>
+                <a:spcPts val="400"/>
+              </a:spcAft>
+            </a:pPr>
+            <a:r>
+              <a:rPr b="1" sz="1050">
                 <a:solidFill>
                   <a:srgbClr val="FFFFFF"/>
                 </a:solidFill>
-              </a:defRPr>
-            </a:pPr>
-            <a:r>
-              <a:t>Potential Impact on Targeted Audience</a:t>
-            </a:r>
-          </a:p>
-        </p:txBody>
-      </p:sp>
-      <p:sp>
-        <p:nvSpPr>
-          <p:cNvPr id="5" name="Rounded Rectangle 4"/>
+              </a:rPr>
+              <a:t>🎯 Primary Target: DRDO &amp; Armed Forces
+</a:t>
+            </a:r>
+            <a:r>
+              <a:rPr sz="950">
+                <a:solidFill>
+                  <a:srgbClr val="E2E8F0"/>
+                </a:solidFill>
+              </a:rPr>
+              <a:t>Autonomous reconnaissance, perimeter patrols, and casualty evacuation in forward conflict zones without human exposure.</a:t>
+            </a:r>
+          </a:p>
+          <a:p>
+            <a:pPr>
+              <a:spcAft>
+                <a:spcPts val="400"/>
+              </a:spcAft>
+            </a:pPr>
+            <a:r>
+              <a:rPr b="1" sz="1050">
+                <a:solidFill>
+                  <a:srgbClr val="FFFFFF"/>
+                </a:solidFill>
+              </a:rPr>
+              <a:t>🛡️ Negative Hazard Awareness
+</a:t>
+            </a:r>
+            <a:r>
+              <a:rPr sz="950">
+                <a:solidFill>
+                  <a:srgbClr val="E2E8F0"/>
+                </a:solidFill>
+              </a:rPr>
+              <a:t>Explicit detection of trenches, shell craters, and roadside drop-offs prevents chassis rollovers and wheel entrapment.</a:t>
+            </a:r>
+          </a:p>
+          <a:p>
+            <a:pPr>
+              <a:spcAft>
+                <a:spcPts val="400"/>
+              </a:spcAft>
+            </a:pPr>
+            <a:r>
+              <a:rPr b="1" sz="1050">
+                <a:solidFill>
+                  <a:srgbClr val="FFFFFF"/>
+                </a:solidFill>
+              </a:rPr>
+              <a:t>📡 GPS-Denied Operational Readiness
+</a:t>
+            </a:r>
+            <a:r>
+              <a:rPr sz="950">
+                <a:solidFill>
+                  <a:srgbClr val="E2E8F0"/>
+                </a:solidFill>
+              </a:rPr>
+              <a:t>Tightly coupled LiDAR odometry and multi-layer elevation mapping enables total autonomy in tunnels, forests, and electronic warfare zones.</a:t>
+            </a:r>
+          </a:p>
+          <a:p>
+            <a:pPr>
+              <a:spcAft>
+                <a:spcPts val="400"/>
+              </a:spcAft>
+            </a:pPr>
+            <a:r>
+              <a:rPr b="1" sz="1050">
+                <a:solidFill>
+                  <a:srgbClr val="FFFFFF"/>
+                </a:solidFill>
+              </a:rPr>
+              <a:t>⚡ High-Speed Reactive Control
+</a:t>
+            </a:r>
+            <a:r>
+              <a:rPr sz="950">
+                <a:solidFill>
+                  <a:srgbClr val="E2E8F0"/>
+                </a:solidFill>
+              </a:rPr>
+              <a:t>61 FPS throughput (&lt;16.4ms latency) enables safe tactical rover sprint speeds exceeding 30 km/h on unpaved terrain.</a:t>
+            </a:r>
+          </a:p>
+        </p:txBody>
+      </p:sp>
+      <p:sp>
+        <p:nvSpPr>
+          <p:cNvPr id="7" name="Rounded Rectangle 6"/>
           <p:cNvSpPr/>
           <p:nvPr/>
         </p:nvSpPr>
         <p:spPr>
           <a:xfrm>
-            <a:off x="548640" y="1005840"/>
-            <a:ext cx="2468880" cy="1371600"/>
+            <a:off x="548640" y="640080"/>
+            <a:ext cx="3200400" cy="2148840"/>
+          </a:xfrm>
+          <a:prstGeom prst="roundRect">
+            <a:avLst/>
+          </a:prstGeom>
+          <a:solidFill>
+            <a:srgbClr val="EEF6FF"/>
+          </a:solidFill>
+          <a:ln w="15240">
+            <a:solidFill>
+              <a:srgbClr val="006FAE"/>
+            </a:solidFill>
+          </a:ln>
+        </p:spPr>
+        <p:style>
+          <a:lnRef idx="1">
+            <a:schemeClr val="accent1"/>
+          </a:lnRef>
+          <a:fillRef idx="3">
+            <a:schemeClr val="accent1"/>
+          </a:fillRef>
+          <a:effectRef idx="2">
+            <a:schemeClr val="accent1"/>
+          </a:effectRef>
+          <a:fontRef idx="minor">
+            <a:schemeClr val="lt1"/>
+          </a:fontRef>
+        </p:style>
+        <p:txBody>
+          <a:bodyPr rtlCol="0" anchor="ctr" wrap="square" lIns="109728" rIns="109728" tIns="109728" bIns="109728"/>
+          <a:lstStyle/>
+          <a:p>
+            <a:pPr algn="ctr">
+              <a:spcAft>
+                <a:spcPts val="300"/>
+              </a:spcAft>
+              <a:defRPr b="1" sz="1200">
+                <a:solidFill>
+                  <a:srgbClr val="006FAE"/>
+                </a:solidFill>
+              </a:defRPr>
+            </a:pPr>
+            <a:r>
+              <a:t>🌐 Secondary: Disaster Response &amp; Urban SAR</a:t>
+            </a:r>
+          </a:p>
+          <a:p>
+            <a:pPr>
+              <a:defRPr sz="1050">
+                <a:solidFill>
+                  <a:srgbClr val="0F172A"/>
+                </a:solidFill>
+              </a:defRPr>
+            </a:pPr>
+            <a:r>
+              <a:t>Rapid navigation through collapsed structures, post-earthquake rubble fields, and void spaces with zero GPS dependency.</a:t>
+            </a:r>
+          </a:p>
+        </p:txBody>
+      </p:sp>
+      <p:sp>
+        <p:nvSpPr>
+          <p:cNvPr id="8" name="Rounded Rectangle 7"/>
+          <p:cNvSpPr/>
+          <p:nvPr/>
+        </p:nvSpPr>
+        <p:spPr>
+          <a:xfrm>
+            <a:off x="548640" y="2880360"/>
+            <a:ext cx="3200400" cy="2148840"/>
           </a:xfrm>
           <a:prstGeom prst="roundRect">
             <a:avLst/>
@@ -6863,9 +7343,9 @@
           <a:solidFill>
             <a:srgbClr val="F8FAFC"/>
           </a:solidFill>
-          <a:ln w="12700">
+          <a:ln w="15240">
             <a:solidFill>
-              <a:srgbClr val="CBD5E1"/>
+              <a:srgbClr val="107846"/>
             </a:solidFill>
           </a:ln>
         </p:spPr>
@@ -6884,47 +7364,47 @@
           </a:fontRef>
         </p:style>
         <p:txBody>
-          <a:bodyPr rtlCol="0" anchor="ctr" wrap="square" tIns="91440" bIns="91440"/>
+          <a:bodyPr rtlCol="0" anchor="ctr" wrap="square" lIns="109728" rIns="109728" tIns="109728" bIns="109728"/>
           <a:lstStyle/>
           <a:p>
             <a:pPr algn="ctr">
               <a:spcAft>
-                <a:spcPts val="200"/>
+                <a:spcPts val="300"/>
               </a:spcAft>
               <a:defRPr b="1" sz="1200">
                 <a:solidFill>
-                  <a:srgbClr val="005B94"/>
-                </a:solidFill>
-              </a:defRPr>
-            </a:pPr>
-            <a:r>
-              <a:t>🎯 Armed Forces &amp; DRDO</a:t>
+                  <a:srgbClr val="107846"/>
+                </a:solidFill>
+              </a:defRPr>
+            </a:pPr>
+            <a:r>
+              <a:t>🌐 Tertiary: Off-Road Autonomy &amp; Heavy Mining</a:t>
             </a:r>
           </a:p>
           <a:p>
             <a:pPr>
-              <a:defRPr sz="1000">
+              <a:defRPr sz="1050">
                 <a:solidFill>
                   <a:srgbClr val="0F172A"/>
                 </a:solidFill>
               </a:defRPr>
             </a:pPr>
             <a:r>
-              <a:t>Autonomous reconnaissance, perimeter surveillance, and border casualty evacuation in high-risk conflict zones.</a:t>
-            </a:r>
-          </a:p>
-        </p:txBody>
-      </p:sp>
-      <p:sp>
-        <p:nvSpPr>
-          <p:cNvPr id="6" name="Rounded Rectangle 5"/>
+              <a:t>Autonomous haulage on unpaved quarry tracks, open-pit mines, and agricultural tractors with zero ditch accidents.</a:t>
+            </a:r>
+          </a:p>
+        </p:txBody>
+      </p:sp>
+      <p:sp>
+        <p:nvSpPr>
+          <p:cNvPr id="9" name="Rounded Rectangle 8"/>
           <p:cNvSpPr/>
           <p:nvPr/>
         </p:nvSpPr>
         <p:spPr>
           <a:xfrm>
-            <a:off x="3931920" y="1005840"/>
-            <a:ext cx="2468880" cy="1371600"/>
+            <a:off x="8412480" y="640080"/>
+            <a:ext cx="3200400" cy="2148840"/>
           </a:xfrm>
           <a:prstGeom prst="roundRect">
             <a:avLst/>
@@ -6932,9 +7412,9 @@
           <a:solidFill>
             <a:srgbClr val="F8FAFC"/>
           </a:solidFill>
-          <a:ln w="12700">
+          <a:ln w="15240">
             <a:solidFill>
-              <a:srgbClr val="CBD5E1"/>
+              <a:srgbClr val="DC2626"/>
             </a:solidFill>
           </a:ln>
         </p:spPr>
@@ -6953,47 +7433,47 @@
           </a:fontRef>
         </p:style>
         <p:txBody>
-          <a:bodyPr rtlCol="0" anchor="ctr" wrap="square" tIns="91440" bIns="91440"/>
+          <a:bodyPr rtlCol="0" anchor="ctr" wrap="square" lIns="109728" rIns="109728" tIns="109728" bIns="109728"/>
           <a:lstStyle/>
           <a:p>
             <a:pPr algn="ctr">
               <a:spcAft>
-                <a:spcPts val="200"/>
+                <a:spcPts val="300"/>
               </a:spcAft>
               <a:defRPr b="1" sz="1200">
                 <a:solidFill>
-                  <a:srgbClr val="005B94"/>
-                </a:solidFill>
-              </a:defRPr>
-            </a:pPr>
-            <a:r>
-              <a:t>🎯 Autonomous AGVs &amp; Shuttles</a:t>
+                  <a:srgbClr val="DC2626"/>
+                </a:solidFill>
+              </a:defRPr>
+            </a:pPr>
+            <a:r>
+              <a:t>“ Warfighter Safety &amp; Exposure</a:t>
             </a:r>
           </a:p>
           <a:p>
             <a:pPr>
-              <a:defRPr sz="1000">
+              <a:defRPr sz="1050">
                 <a:solidFill>
                   <a:srgbClr val="0F172A"/>
                 </a:solidFill>
               </a:defRPr>
             </a:pPr>
             <a:r>
-              <a:t>Low-cost high-speed navigation for urban smart transit, autonomous logistics, and industrial delivery.</a:t>
-            </a:r>
-          </a:p>
-        </p:txBody>
-      </p:sp>
-      <p:sp>
-        <p:nvSpPr>
-          <p:cNvPr id="7" name="Rounded Rectangle 6"/>
+              <a:t>Significantly reduces human exposure in high-threat forward areas by delegating dangerous scouting sorties to autonomous unmanned ground vehicles.</a:t>
+            </a:r>
+          </a:p>
+        </p:txBody>
+      </p:sp>
+      <p:sp>
+        <p:nvSpPr>
+          <p:cNvPr id="10" name="Rounded Rectangle 9"/>
           <p:cNvSpPr/>
           <p:nvPr/>
         </p:nvSpPr>
         <p:spPr>
           <a:xfrm>
-            <a:off x="548640" y="4206240"/>
-            <a:ext cx="2468880" cy="1371600"/>
+            <a:off x="8412480" y="2880360"/>
+            <a:ext cx="3200400" cy="2148840"/>
           </a:xfrm>
           <a:prstGeom prst="roundRect">
             <a:avLst/>
@@ -7001,9 +7481,9 @@
           <a:solidFill>
             <a:srgbClr val="F8FAFC"/>
           </a:solidFill>
-          <a:ln w="12700">
+          <a:ln w="15240">
             <a:solidFill>
-              <a:srgbClr val="CBD5E1"/>
+              <a:srgbClr val="006FAE"/>
             </a:solidFill>
           </a:ln>
         </p:spPr>
@@ -7022,57 +7502,57 @@
           </a:fontRef>
         </p:style>
         <p:txBody>
-          <a:bodyPr rtlCol="0" anchor="ctr" wrap="square" tIns="91440" bIns="91440"/>
+          <a:bodyPr rtlCol="0" anchor="ctr" wrap="square" lIns="109728" rIns="109728" tIns="109728" bIns="109728"/>
           <a:lstStyle/>
           <a:p>
             <a:pPr algn="ctr">
               <a:spcAft>
-                <a:spcPts val="200"/>
+                <a:spcPts val="300"/>
               </a:spcAft>
               <a:defRPr b="1" sz="1200">
                 <a:solidFill>
-                  <a:srgbClr val="005B94"/>
-                </a:solidFill>
-              </a:defRPr>
-            </a:pPr>
-            <a:r>
-              <a:t>🎯 Disaster Search &amp; Rescue</a:t>
+                  <a:srgbClr val="006FAE"/>
+                </a:solidFill>
+              </a:defRPr>
+            </a:pPr>
+            <a:r>
+              <a:t>“ Domestic Defense Perception Stack</a:t>
             </a:r>
           </a:p>
           <a:p>
             <a:pPr>
-              <a:defRPr sz="1000">
+              <a:defRPr sz="1050">
                 <a:solidFill>
                   <a:srgbClr val="0F172A"/>
                 </a:solidFill>
               </a:defRPr>
             </a:pPr>
             <a:r>
-              <a:t>Reliable obstacle traversal through collapsed structures, post-earthquake rubble, and debris fields.</a:t>
-            </a:r>
-          </a:p>
-        </p:txBody>
-      </p:sp>
-      <p:sp>
-        <p:nvSpPr>
-          <p:cNvPr id="8" name="Rounded Rectangle 7"/>
+              <a:t>100% open architecture built with C++20, CUDA, and ROS2 eliminates dependence on proprietary foreign perception runtimes.</a:t>
+            </a:r>
+          </a:p>
+        </p:txBody>
+      </p:sp>
+      <p:sp>
+        <p:nvSpPr>
+          <p:cNvPr id="11" name="Rounded Rectangle 10"/>
           <p:cNvSpPr/>
           <p:nvPr/>
         </p:nvSpPr>
         <p:spPr>
           <a:xfrm>
-            <a:off x="3931920" y="4206240"/>
-            <a:ext cx="2468880" cy="1371600"/>
+            <a:off x="548640" y="5166360"/>
+            <a:ext cx="11064240" cy="1188720"/>
           </a:xfrm>
           <a:prstGeom prst="roundRect">
             <a:avLst/>
           </a:prstGeom>
           <a:solidFill>
-            <a:srgbClr val="F8FAFC"/>
+            <a:srgbClr val="EEF6FF"/>
           </a:solidFill>
-          <a:ln w="12700">
+          <a:ln w="15240">
             <a:solidFill>
-              <a:srgbClr val="CBD5E1"/>
+              <a:srgbClr val="006FAE"/>
             </a:solidFill>
           </a:ln>
         </p:spPr>
@@ -7091,21 +7571,21 @@
           </a:fontRef>
         </p:style>
         <p:txBody>
-          <a:bodyPr rtlCol="0" anchor="ctr" wrap="square" tIns="91440" bIns="91440"/>
+          <a:bodyPr rtlCol="0" anchor="ctr" wrap="square" lIns="109728" rIns="109728" tIns="109728" bIns="109728"/>
           <a:lstStyle/>
           <a:p>
             <a:pPr algn="ctr">
               <a:spcAft>
                 <a:spcPts val="200"/>
               </a:spcAft>
-              <a:defRPr b="1" sz="1200">
-                <a:solidFill>
-                  <a:srgbClr val="005B94"/>
-                </a:solidFill>
-              </a:defRPr>
-            </a:pPr>
-            <a:r>
-              <a:t>🎯 Mining &amp; Off-Road Industry</a:t>
+              <a:defRPr b="1" sz="1100">
+                <a:solidFill>
+                  <a:srgbClr val="101B2D"/>
+                </a:solidFill>
+              </a:defRPr>
+            </a:pPr>
+            <a:r>
+              <a:t>Measurable Operational Advantages for Tactical Vehicles:</a:t>
             </a:r>
           </a:p>
           <a:p>
@@ -7117,32 +7597,38 @@
               </a:defRPr>
             </a:pPr>
             <a:r>
-              <a:t>Safe navigation through open-pit mines, quarries, and unpaved haulage tracks with zero ditch rollovers.</a:t>
-            </a:r>
-          </a:p>
-        </p:txBody>
-      </p:sp>
-      <p:sp>
-        <p:nvSpPr>
-          <p:cNvPr id="9" name="Rounded Rectangle 8"/>
+              <a:t>• 5cm Near-Field Precision: Reliably distinguishes 16cm curbs and -18cm potholes directly in front of the vehicle.</a:t>
+            </a:r>
+            <a:br/>
+            <a:r>
+              <a:t>• 100m Perception Horizon: Ensures forward obstacle awareness at 50cm cell size with zero compute explosion.</a:t>
+            </a:r>
+            <a:br/>
+            <a:r>
+              <a:t>• &lt;15W Edge SWaP Profile: Enables high-speed autonomous navigation on compact battery-powered tactical ground rovers.</a:t>
+            </a:r>
+          </a:p>
+        </p:txBody>
+      </p:sp>
+      <p:sp>
+        <p:nvSpPr>
+          <p:cNvPr id="12" name="Rectangle 11"/>
           <p:cNvSpPr/>
           <p:nvPr/>
         </p:nvSpPr>
         <p:spPr>
           <a:xfrm>
-            <a:off x="6766560" y="1005840"/>
-            <a:ext cx="4846320" cy="1417320"/>
-          </a:xfrm>
-          <a:prstGeom prst="roundRect">
+            <a:off x="0" y="6510528"/>
+            <a:ext cx="12191695" cy="347472"/>
+          </a:xfrm>
+          <a:prstGeom prst="rect">
             <a:avLst/>
           </a:prstGeom>
           <a:solidFill>
-            <a:srgbClr val="FFFFFF"/>
+            <a:srgbClr val="101B2D"/>
           </a:solidFill>
-          <a:ln w="19050">
-            <a:solidFill>
-              <a:srgbClr val="005B94"/>
-            </a:solidFill>
+          <a:ln>
+            <a:noFill/>
           </a:ln>
         </p:spPr>
         <p:style>
@@ -7160,265 +7646,6 @@
           </a:fontRef>
         </p:style>
         <p:txBody>
-          <a:bodyPr rtlCol="0" anchor="ctr" wrap="square" lIns="137160" rIns="137160" tIns="137160" bIns="137160"/>
-          <a:lstStyle/>
-          <a:p>
-            <a:pPr algn="ctr">
-              <a:spcAft>
-                <a:spcPts val="300"/>
-              </a:spcAft>
-              <a:defRPr b="1" sz="1400">
-                <a:solidFill>
-                  <a:srgbClr val="005B94"/>
-                </a:solidFill>
-              </a:defRPr>
-            </a:pPr>
-            <a:r>
-              <a:t>“ Military &amp; Strategic Impact</a:t>
-            </a:r>
-          </a:p>
-          <a:p>
-            <a:pPr>
-              <a:defRPr sz="1100">
-                <a:solidFill>
-                  <a:srgbClr val="0F172A"/>
-                </a:solidFill>
-              </a:defRPr>
-            </a:pPr>
-            <a:r>
-              <a:t>Eliminates warfighter casualties by enabling fully unmanned scout rovers to navigate extreme forward terrains, unmapped minefields, and dense tactical ambush environments with zero GPS dependence.</a:t>
-            </a:r>
-          </a:p>
-        </p:txBody>
-      </p:sp>
-      <p:sp>
-        <p:nvSpPr>
-          <p:cNvPr id="10" name="Rounded Rectangle 9"/>
-          <p:cNvSpPr/>
-          <p:nvPr/>
-        </p:nvSpPr>
-        <p:spPr>
-          <a:xfrm>
-            <a:off x="6766560" y="2560320"/>
-            <a:ext cx="4846320" cy="1417320"/>
-          </a:xfrm>
-          <a:prstGeom prst="roundRect">
-            <a:avLst/>
-          </a:prstGeom>
-          <a:solidFill>
-            <a:srgbClr val="FFFFFF"/>
-          </a:solidFill>
-          <a:ln w="19050">
-            <a:solidFill>
-              <a:srgbClr val="0284C7"/>
-            </a:solidFill>
-          </a:ln>
-        </p:spPr>
-        <p:style>
-          <a:lnRef idx="1">
-            <a:schemeClr val="accent1"/>
-          </a:lnRef>
-          <a:fillRef idx="3">
-            <a:schemeClr val="accent1"/>
-          </a:fillRef>
-          <a:effectRef idx="2">
-            <a:schemeClr val="accent1"/>
-          </a:effectRef>
-          <a:fontRef idx="minor">
-            <a:schemeClr val="lt1"/>
-          </a:fontRef>
-        </p:style>
-        <p:txBody>
-          <a:bodyPr rtlCol="0" anchor="ctr" wrap="square" lIns="137160" rIns="137160" tIns="137160" bIns="137160"/>
-          <a:lstStyle/>
-          <a:p>
-            <a:pPr algn="ctr">
-              <a:spcAft>
-                <a:spcPts val="300"/>
-              </a:spcAft>
-              <a:defRPr b="1" sz="1400">
-                <a:solidFill>
-                  <a:srgbClr val="0284C7"/>
-                </a:solidFill>
-              </a:defRPr>
-            </a:pPr>
-            <a:r>
-              <a:t>“ Economic &amp; Computational Impact</a:t>
-            </a:r>
-          </a:p>
-          <a:p>
-            <a:pPr>
-              <a:defRPr sz="1100">
-                <a:solidFill>
-                  <a:srgbClr val="0F172A"/>
-                </a:solidFill>
-              </a:defRPr>
-            </a:pPr>
-            <a:r>
-              <a:t>Slashes onboard compute payload weight and power by &gt;65%. Eliminates expensive industrial servers by delivering 60+ FPS performance on embedded edge hardware under 15W.</a:t>
-            </a:r>
-          </a:p>
-        </p:txBody>
-      </p:sp>
-      <p:sp>
-        <p:nvSpPr>
-          <p:cNvPr id="11" name="Rounded Rectangle 10"/>
-          <p:cNvSpPr/>
-          <p:nvPr/>
-        </p:nvSpPr>
-        <p:spPr>
-          <a:xfrm>
-            <a:off x="6766560" y="4114800"/>
-            <a:ext cx="4846320" cy="1417320"/>
-          </a:xfrm>
-          <a:prstGeom prst="roundRect">
-            <a:avLst/>
-          </a:prstGeom>
-          <a:solidFill>
-            <a:srgbClr val="FFFFFF"/>
-          </a:solidFill>
-          <a:ln w="19050">
-            <a:solidFill>
-              <a:srgbClr val="107846"/>
-            </a:solidFill>
-          </a:ln>
-        </p:spPr>
-        <p:style>
-          <a:lnRef idx="1">
-            <a:schemeClr val="accent1"/>
-          </a:lnRef>
-          <a:fillRef idx="3">
-            <a:schemeClr val="accent1"/>
-          </a:fillRef>
-          <a:effectRef idx="2">
-            <a:schemeClr val="accent1"/>
-          </a:effectRef>
-          <a:fontRef idx="minor">
-            <a:schemeClr val="lt1"/>
-          </a:fontRef>
-        </p:style>
-        <p:txBody>
-          <a:bodyPr rtlCol="0" anchor="ctr" wrap="square" lIns="137160" rIns="137160" tIns="137160" bIns="137160"/>
-          <a:lstStyle/>
-          <a:p>
-            <a:pPr algn="ctr">
-              <a:spcAft>
-                <a:spcPts val="300"/>
-              </a:spcAft>
-              <a:defRPr b="1" sz="1400">
-                <a:solidFill>
-                  <a:srgbClr val="107846"/>
-                </a:solidFill>
-              </a:defRPr>
-            </a:pPr>
-            <a:r>
-              <a:t>“ Operational Safety &amp; Reliability</a:t>
-            </a:r>
-          </a:p>
-          <a:p>
-            <a:pPr>
-              <a:defRPr sz="1100">
-                <a:solidFill>
-                  <a:srgbClr val="0F172A"/>
-                </a:solidFill>
-              </a:defRPr>
-            </a:pPr>
-            <a:r>
-              <a:t>100% negative obstacle detection (ditches, potholes, drop-offs) drastically reduces ground vehicle roll-overs, wheel entrapments, and chassis fractures during high-speed tactical sorties.</a:t>
-            </a:r>
-          </a:p>
-        </p:txBody>
-      </p:sp>
-      <p:sp>
-        <p:nvSpPr>
-          <p:cNvPr id="12" name="Rounded Rectangle 11"/>
-          <p:cNvSpPr/>
-          <p:nvPr/>
-        </p:nvSpPr>
-        <p:spPr>
-          <a:xfrm>
-            <a:off x="548640" y="5806440"/>
-            <a:ext cx="11064240" cy="502920"/>
-          </a:xfrm>
-          <a:prstGeom prst="roundRect">
-            <a:avLst/>
-          </a:prstGeom>
-          <a:solidFill>
-            <a:srgbClr val="F8FAFC"/>
-          </a:solidFill>
-          <a:ln w="12700">
-            <a:solidFill>
-              <a:srgbClr val="CBD5E1"/>
-            </a:solidFill>
-          </a:ln>
-        </p:spPr>
-        <p:style>
-          <a:lnRef idx="1">
-            <a:schemeClr val="accent1"/>
-          </a:lnRef>
-          <a:fillRef idx="3">
-            <a:schemeClr val="accent1"/>
-          </a:fillRef>
-          <a:effectRef idx="2">
-            <a:schemeClr val="accent1"/>
-          </a:effectRef>
-          <a:fontRef idx="minor">
-            <a:schemeClr val="lt1"/>
-          </a:fontRef>
-        </p:style>
-        <p:txBody>
-          <a:bodyPr rtlCol="0" anchor="ctr" wrap="square" tIns="73152"/>
-          <a:lstStyle/>
-          <a:p>
-            <a:pPr algn="ctr">
-              <a:defRPr b="1" sz="1300">
-                <a:solidFill>
-                  <a:srgbClr val="0F172A"/>
-                </a:solidFill>
-              </a:defRPr>
-            </a:pPr>
-            <a:r>
-              <a:t>“India's breakthrough foveated 2.5D LiDAR perception engine — delivering military-grade situational awareness with unprecedented edge efficiency.”</a:t>
-            </a:r>
-          </a:p>
-        </p:txBody>
-      </p:sp>
-      <p:sp>
-        <p:nvSpPr>
-          <p:cNvPr id="13" name="Rectangle 12"/>
-          <p:cNvSpPr/>
-          <p:nvPr/>
-        </p:nvSpPr>
-        <p:spPr>
-          <a:xfrm>
-            <a:off x="0" y="6446520"/>
-            <a:ext cx="12191695" cy="411480"/>
-          </a:xfrm>
-          <a:prstGeom prst="rect">
-            <a:avLst/>
-          </a:prstGeom>
-          <a:solidFill>
-            <a:srgbClr val="005B94"/>
-          </a:solidFill>
-          <a:ln>
-            <a:noFill/>
-          </a:ln>
-        </p:spPr>
-        <p:style>
-          <a:lnRef idx="1">
-            <a:schemeClr val="accent1"/>
-          </a:lnRef>
-          <a:fillRef idx="3">
-            <a:schemeClr val="accent1"/>
-          </a:fillRef>
-          <a:effectRef idx="2">
-            <a:schemeClr val="accent1"/>
-          </a:effectRef>
-          <a:fontRef idx="minor">
-            <a:schemeClr val="lt1"/>
-          </a:fontRef>
-        </p:style>
-        <p:txBody>
           <a:bodyPr rtlCol="0" anchor="ctr"/>
           <a:lstStyle/>
           <a:p>
@@ -7428,14 +7655,14 @@
       </p:sp>
       <p:sp>
         <p:nvSpPr>
-          <p:cNvPr id="14" name="TextBox 13"/>
+          <p:cNvPr id="13" name="TextBox 12"/>
           <p:cNvSpPr txBox="1"/>
           <p:nvPr/>
         </p:nvSpPr>
         <p:spPr>
           <a:xfrm>
-            <a:off x="2743200" y="6473952"/>
-            <a:ext cx="6705295" cy="347472"/>
+            <a:off x="640080" y="6528816"/>
+            <a:ext cx="3200400" cy="292608"/>
           </a:xfrm>
           <a:prstGeom prst="rect">
             <a:avLst/>
@@ -7443,34 +7670,34 @@
           <a:noFill/>
         </p:spPr>
         <p:txBody>
-          <a:bodyPr wrap="square" lIns="0" rIns="0" tIns="0" bIns="0">
+          <a:bodyPr wrap="none" lIns="0" tIns="0" rIns="0" bIns="0">
             <a:spAutoFit/>
           </a:bodyPr>
           <a:lstStyle/>
           <a:p>
-            <a:pPr algn="ctr">
-              <a:defRPr sz="1200" b="1">
-                <a:solidFill>
-                  <a:srgbClr val="FFFFFF"/>
-                </a:solidFill>
-              </a:defRPr>
-            </a:pPr>
-            <a:r>
-              <a:t>SMART INDIA HACKATHON 2026</a:t>
-            </a:r>
-          </a:p>
-        </p:txBody>
-      </p:sp>
-      <p:sp>
-        <p:nvSpPr>
-          <p:cNvPr id="15" name="TextBox 14"/>
+            <a:pPr>
+              <a:defRPr sz="1000" b="1">
+                <a:solidFill>
+                  <a:srgbClr val="00A8D6"/>
+                </a:solidFill>
+              </a:defRPr>
+            </a:pPr>
+            <a:r>
+              <a:t>TEAM NULLPOINT  |  SIH26053</a:t>
+            </a:r>
+          </a:p>
+        </p:txBody>
+      </p:sp>
+      <p:sp>
+        <p:nvSpPr>
+          <p:cNvPr id="14" name="TextBox 13"/>
           <p:cNvSpPr txBox="1"/>
           <p:nvPr/>
         </p:nvSpPr>
         <p:spPr>
           <a:xfrm>
-            <a:off x="10972800" y="6473952"/>
-            <a:ext cx="914400" cy="347472"/>
+            <a:off x="4114800" y="6528816"/>
+            <a:ext cx="3962095" cy="292608"/>
           </a:xfrm>
           <a:prstGeom prst="rect">
             <a:avLst/>
@@ -7478,20 +7705,55 @@
           <a:noFill/>
         </p:spPr>
         <p:txBody>
-          <a:bodyPr wrap="square" lIns="0" rIns="0" tIns="0" bIns="0">
+          <a:bodyPr wrap="none" lIns="0" tIns="0" rIns="0" bIns="0">
             <a:spAutoFit/>
           </a:bodyPr>
           <a:lstStyle/>
           <a:p>
+            <a:pPr algn="ctr">
+              <a:defRPr sz="1050" b="1">
+                <a:solidFill>
+                  <a:srgbClr val="FFFFFF"/>
+                </a:solidFill>
+              </a:defRPr>
+            </a:pPr>
+            <a:r>
+              <a:t>SMART INDIA HACKATHON 2026</a:t>
+            </a:r>
+          </a:p>
+        </p:txBody>
+      </p:sp>
+      <p:sp>
+        <p:nvSpPr>
+          <p:cNvPr id="15" name="TextBox 14"/>
+          <p:cNvSpPr txBox="1"/>
+          <p:nvPr/>
+        </p:nvSpPr>
+        <p:spPr>
+          <a:xfrm>
+            <a:off x="10789920" y="6528816"/>
+            <a:ext cx="822960" cy="292608"/>
+          </a:xfrm>
+          <a:prstGeom prst="rect">
+            <a:avLst/>
+          </a:prstGeom>
+          <a:noFill/>
+        </p:spPr>
+        <p:txBody>
+          <a:bodyPr wrap="none" lIns="0" tIns="0" rIns="0" bIns="0">
+            <a:spAutoFit/>
+          </a:bodyPr>
+          <a:lstStyle/>
+          <a:p>
             <a:pPr algn="r">
-              <a:defRPr sz="1200" b="1">
+              <a:defRPr sz="1000" b="1">
                 <a:solidFill>
                   <a:srgbClr val="FFFFFF"/>
                 </a:solidFill>
               </a:defRPr>
             </a:pPr>
             <a:r>
-              <a:t>5</a:t>
+              <a:t>5 / 6</a:t>
             </a:r>
           </a:p>
         </p:txBody>
@@ -7516,20 +7778,20 @@
       <p:grpSpPr/>
       <p:sp>
         <p:nvSpPr>
-          <p:cNvPr id="2" name="Rounded Rectangle 1"/>
+          <p:cNvPr id="2" name="Rectangle 1"/>
           <p:cNvSpPr/>
           <p:nvPr/>
         </p:nvSpPr>
         <p:spPr>
           <a:xfrm>
-            <a:off x="548640" y="182880"/>
-            <a:ext cx="8961120" cy="548640"/>
-          </a:xfrm>
-          <a:prstGeom prst="roundRect">
+            <a:off x="0" y="0"/>
+            <a:ext cx="12191695" cy="475488"/>
+          </a:xfrm>
+          <a:prstGeom prst="rect">
             <a:avLst/>
           </a:prstGeom>
           <a:solidFill>
-            <a:srgbClr val="005B94"/>
+            <a:srgbClr val="101B2D"/>
           </a:solidFill>
           <a:ln>
             <a:noFill/>
@@ -7550,25 +7812,86 @@
           </a:fontRef>
         </p:style>
         <p:txBody>
-          <a:bodyPr rtlCol="0" anchor="ctr" lIns="274320" rIns="274320" tIns="0" bIns="0"/>
-          <a:lstStyle/>
-          <a:p>
-            <a:pPr algn="l">
-              <a:defRPr sz="2100" b="1">
+          <a:bodyPr rtlCol="0" anchor="ctr"/>
+          <a:lstStyle/>
+          <a:p>
+            <a:pPr algn="ctr"/>
+          </a:p>
+        </p:txBody>
+      </p:sp>
+      <p:sp>
+        <p:nvSpPr>
+          <p:cNvPr id="3" name="TextBox 2"/>
+          <p:cNvSpPr txBox="1"/>
+          <p:nvPr/>
+        </p:nvSpPr>
+        <p:spPr>
+          <a:xfrm>
+            <a:off x="640080" y="36576"/>
+            <a:ext cx="7772400" cy="402336"/>
+          </a:xfrm>
+          <a:prstGeom prst="rect">
+            <a:avLst/>
+          </a:prstGeom>
+          <a:noFill/>
+        </p:spPr>
+        <p:txBody>
+          <a:bodyPr wrap="none" anchor="ctr" lIns="0" tIns="0" rIns="0" bIns="0">
+            <a:spAutoFit/>
+          </a:bodyPr>
+          <a:lstStyle/>
+          <a:p>
+            <a:pPr>
+              <a:defRPr sz="1700" b="1">
                 <a:solidFill>
                   <a:srgbClr val="FFFFFF"/>
                 </a:solidFill>
               </a:defRPr>
             </a:pPr>
             <a:r>
-              <a:t>RESEARCH AND REFERENCES</a:t>
+              <a:t>PRIOR ART, TECHNICAL VALIDATION &amp; REFERENCES</a:t>
+            </a:r>
+          </a:p>
+        </p:txBody>
+      </p:sp>
+      <p:sp>
+        <p:nvSpPr>
+          <p:cNvPr id="4" name="TextBox 3"/>
+          <p:cNvSpPr txBox="1"/>
+          <p:nvPr/>
+        </p:nvSpPr>
+        <p:spPr>
+          <a:xfrm>
+            <a:off x="6583680" y="73152"/>
+            <a:ext cx="4389120" cy="329184"/>
+          </a:xfrm>
+          <a:prstGeom prst="rect">
+            <a:avLst/>
+          </a:prstGeom>
+          <a:noFill/>
+        </p:spPr>
+        <p:txBody>
+          <a:bodyPr wrap="none" anchor="ctr" lIns="0" tIns="0" rIns="0" bIns="0">
+            <a:spAutoFit/>
+          </a:bodyPr>
+          <a:lstStyle/>
+          <a:p>
+            <a:pPr algn="r">
+              <a:defRPr sz="1050" b="1">
+                <a:solidFill>
+                  <a:srgbClr val="00A8D6"/>
+                </a:solidFill>
+              </a:defRPr>
+            </a:pPr>
+            <a:r>
+              <a:t>SIH 2026 | DRDO SIH26053</a:t>
             </a:r>
           </a:p>
         </p:txBody>
       </p:sp>
       <p:pic>
         <p:nvPicPr>
-          <p:cNvPr id="3" name="Picture 2" descr="sih_header_logo.png"/>
+          <p:cNvPr id="5" name="Picture 4" descr="sih_bulb_hd_clean.png"/>
           <p:cNvPicPr>
             <a:picLocks noChangeAspect="1"/>
           </p:cNvPicPr>
@@ -7582,245 +7905,499 @@
         </p:blipFill>
         <p:spPr>
           <a:xfrm>
-            <a:off x="9784080" y="109728"/>
-            <a:ext cx="1920240" cy="823629"/>
+            <a:off x="11292840" y="54864"/>
+            <a:ext cx="317894" cy="365760"/>
           </a:xfrm>
           <a:prstGeom prst="rect">
             <a:avLst/>
           </a:prstGeom>
         </p:spPr>
       </p:pic>
-      <p:pic>
-        <p:nvPicPr>
-          <p:cNvPr id="4" name="Picture 3" descr="lidar_slide5_tam_sam_som.png"/>
-          <p:cNvPicPr>
-            <a:picLocks noChangeAspect="1"/>
-          </p:cNvPicPr>
+      <p:sp>
+        <p:nvSpPr>
+          <p:cNvPr id="6" name="TextBox 5"/>
+          <p:cNvSpPr txBox="1"/>
           <p:nvPr/>
-        </p:nvPicPr>
-        <p:blipFill>
-          <a:blip r:embed="rId3"/>
-          <a:stretch>
-            <a:fillRect/>
-          </a:stretch>
-        </p:blipFill>
-        <p:spPr>
-          <a:xfrm>
-            <a:off x="548640" y="1005840"/>
-            <a:ext cx="3474720" cy="2895600"/>
+        </p:nvSpPr>
+        <p:spPr>
+          <a:xfrm>
+            <a:off x="548640" y="594360"/>
+            <a:ext cx="11064240" cy="274320"/>
           </a:xfrm>
           <a:prstGeom prst="rect">
             <a:avLst/>
           </a:prstGeom>
-        </p:spPr>
-      </p:pic>
-      <p:sp>
-        <p:nvSpPr>
-          <p:cNvPr id="5" name="Rounded Rectangle 4"/>
-          <p:cNvSpPr/>
+          <a:noFill/>
+        </p:spPr>
+        <p:txBody>
+          <a:bodyPr wrap="none">
+            <a:spAutoFit/>
+          </a:bodyPr>
+          <a:lstStyle/>
+          <a:p>
+            <a:pPr>
+              <a:defRPr b="1" sz="1300">
+                <a:solidFill>
+                  <a:srgbClr val="006FAE"/>
+                </a:solidFill>
+              </a:defRPr>
+            </a:pPr>
+            <a:r>
+              <a:t>Prior Art Analysis &amp; FOVEA-MAP Technical Innovation</a:t>
+            </a:r>
+          </a:p>
+        </p:txBody>
+      </p:sp>
+      <p:graphicFrame>
+        <p:nvGraphicFramePr>
+          <p:cNvPr id="7" name="Table 6"/>
+          <p:cNvGraphicFramePr>
+            <a:graphicFrameLocks noGrp="1"/>
+          </p:cNvGraphicFramePr>
           <p:nvPr/>
-        </p:nvSpPr>
-        <p:spPr>
-          <a:xfrm>
-            <a:off x="4206240" y="1005840"/>
-            <a:ext cx="2377440" cy="2103120"/>
-          </a:xfrm>
-          <a:prstGeom prst="roundRect">
-            <a:avLst/>
-          </a:prstGeom>
-          <a:solidFill>
-            <a:srgbClr val="F8FAFC"/>
-          </a:solidFill>
-          <a:ln w="15240">
-            <a:solidFill>
-              <a:srgbClr val="005B94"/>
-            </a:solidFill>
-          </a:ln>
-        </p:spPr>
-        <p:style>
-          <a:lnRef idx="1">
-            <a:schemeClr val="accent1"/>
-          </a:lnRef>
-          <a:fillRef idx="3">
-            <a:schemeClr val="accent1"/>
-          </a:fillRef>
-          <a:effectRef idx="2">
-            <a:schemeClr val="accent1"/>
-          </a:effectRef>
-          <a:fontRef idx="minor">
-            <a:schemeClr val="lt1"/>
-          </a:fontRef>
-        </p:style>
-        <p:txBody>
-          <a:bodyPr rtlCol="0" anchor="ctr" wrap="square" lIns="109728" rIns="109728" tIns="109728" bIns="109728"/>
-          <a:lstStyle/>
-          <a:p>
-            <a:pPr algn="ctr">
-              <a:spcAft>
-                <a:spcPts val="400"/>
-              </a:spcAft>
-              <a:defRPr b="1" sz="1200">
-                <a:solidFill>
-                  <a:srgbClr val="005B94"/>
-                </a:solidFill>
-              </a:defRPr>
-            </a:pPr>
-            <a:r>
-              <a:t>TAM – Total Addressable Market</a:t>
-            </a:r>
-          </a:p>
-          <a:p>
-            <a:pPr>
-              <a:defRPr sz="1050">
-                <a:solidFill>
-                  <a:srgbClr val="0F172A"/>
-                </a:solidFill>
-              </a:defRPr>
-            </a:pPr>
-            <a:r>
-              <a:t>$6.2 Billion global market for autonomous defense vehicles, tactical robotics, and smart vehicle LiDAR perception systems by 2030 (22.4% CAGR).</a:t>
-            </a:r>
-          </a:p>
-        </p:txBody>
-      </p:sp>
-      <p:sp>
-        <p:nvSpPr>
-          <p:cNvPr id="6" name="Rounded Rectangle 5"/>
-          <p:cNvSpPr/>
-          <p:nvPr/>
-        </p:nvSpPr>
-        <p:spPr>
-          <a:xfrm>
-            <a:off x="6766559" y="1005840"/>
-            <a:ext cx="2377440" cy="2103120"/>
-          </a:xfrm>
-          <a:prstGeom prst="roundRect">
-            <a:avLst/>
-          </a:prstGeom>
-          <a:solidFill>
-            <a:srgbClr val="F8FAFC"/>
-          </a:solidFill>
-          <a:ln w="15240">
-            <a:solidFill>
-              <a:srgbClr val="005B94"/>
-            </a:solidFill>
-          </a:ln>
-        </p:spPr>
-        <p:style>
-          <a:lnRef idx="1">
-            <a:schemeClr val="accent1"/>
-          </a:lnRef>
-          <a:fillRef idx="3">
-            <a:schemeClr val="accent1"/>
-          </a:fillRef>
-          <a:effectRef idx="2">
-            <a:schemeClr val="accent1"/>
-          </a:effectRef>
-          <a:fontRef idx="minor">
-            <a:schemeClr val="lt1"/>
-          </a:fontRef>
-        </p:style>
-        <p:txBody>
-          <a:bodyPr rtlCol="0" anchor="ctr" wrap="square" lIns="109728" rIns="109728" tIns="109728" bIns="109728"/>
-          <a:lstStyle/>
-          <a:p>
-            <a:pPr algn="ctr">
-              <a:spcAft>
-                <a:spcPts val="400"/>
-              </a:spcAft>
-              <a:defRPr b="1" sz="1200">
-                <a:solidFill>
-                  <a:srgbClr val="005B94"/>
-                </a:solidFill>
-              </a:defRPr>
-            </a:pPr>
-            <a:r>
-              <a:t>SAM – Serviceable Available Market</a:t>
-            </a:r>
-          </a:p>
-          <a:p>
-            <a:pPr>
-              <a:defRPr sz="1050">
-                <a:solidFill>
-                  <a:srgbClr val="0F172A"/>
-                </a:solidFill>
-              </a:defRPr>
-            </a:pPr>
-            <a:r>
-              <a:t>$1.15 Billion Indian defense modernization, paramilitary border patrol vehicles, and domestic industrial AGVs under Make in India initiatives.</a:t>
-            </a:r>
-          </a:p>
-        </p:txBody>
-      </p:sp>
-      <p:sp>
-        <p:nvSpPr>
-          <p:cNvPr id="7" name="Rounded Rectangle 6"/>
-          <p:cNvSpPr/>
-          <p:nvPr/>
-        </p:nvSpPr>
-        <p:spPr>
-          <a:xfrm>
-            <a:off x="9326880" y="1005840"/>
-            <a:ext cx="2377440" cy="2103120"/>
-          </a:xfrm>
-          <a:prstGeom prst="roundRect">
-            <a:avLst/>
-          </a:prstGeom>
-          <a:solidFill>
-            <a:srgbClr val="F8FAFC"/>
-          </a:solidFill>
-          <a:ln w="15240">
-            <a:solidFill>
-              <a:srgbClr val="005B94"/>
-            </a:solidFill>
-          </a:ln>
-        </p:spPr>
-        <p:style>
-          <a:lnRef idx="1">
-            <a:schemeClr val="accent1"/>
-          </a:lnRef>
-          <a:fillRef idx="3">
-            <a:schemeClr val="accent1"/>
-          </a:fillRef>
-          <a:effectRef idx="2">
-            <a:schemeClr val="accent1"/>
-          </a:effectRef>
-          <a:fontRef idx="minor">
-            <a:schemeClr val="lt1"/>
-          </a:fontRef>
-        </p:style>
-        <p:txBody>
-          <a:bodyPr rtlCol="0" anchor="ctr" wrap="square" lIns="109728" rIns="109728" tIns="109728" bIns="109728"/>
-          <a:lstStyle/>
-          <a:p>
-            <a:pPr algn="ctr">
-              <a:spcAft>
-                <a:spcPts val="400"/>
-              </a:spcAft>
-              <a:defRPr b="1" sz="1200">
-                <a:solidFill>
-                  <a:srgbClr val="005B94"/>
-                </a:solidFill>
-              </a:defRPr>
-            </a:pPr>
-            <a:r>
-              <a:t>SOM – Serviceable Obtainable Market</a:t>
-            </a:r>
-          </a:p>
-          <a:p>
-            <a:pPr>
-              <a:defRPr sz="1050">
-                <a:solidFill>
-                  <a:srgbClr val="0F172A"/>
-                </a:solidFill>
-              </a:defRPr>
-            </a:pPr>
-            <a:r>
-              <a:t>$85 Million initial 3-year serviceable market across Indian Army border rovers, DRDO AGV programs, and high-value mining automation fleets.</a:t>
-            </a:r>
-          </a:p>
-        </p:txBody>
-      </p:sp>
+        </p:nvGraphicFramePr>
+        <p:xfrm>
+          <a:off x="548640" y="914400"/>
+          <a:ext cx="11064240" cy="2194560"/>
+        </p:xfrm>
+        <a:graphic>
+          <a:graphicData uri="http://schemas.openxmlformats.org/drawingml/2006/table">
+            <a:tbl>
+              <a:tblPr firstRow="1" bandRow="1">
+                <a:tableStyleId>{5C22544A-7EE6-4342-B048-85BDC9FD1C3A}</a:tableStyleId>
+              </a:tblPr>
+              <a:tblGrid>
+                <a:gridCol w="2011680"/>
+                <a:gridCol w="2103120"/>
+                <a:gridCol w="2926080"/>
+                <a:gridCol w="4023360"/>
+              </a:tblGrid>
+              <a:tr h="438912">
+                <a:tc>
+                  <a:txBody>
+                    <a:bodyPr/>
+                    <a:lstStyle/>
+                    <a:p>
+                      <a:pPr>
+                        <a:defRPr b="1" sz="1000">
+                          <a:solidFill>
+                            <a:srgbClr val="FFFFFF"/>
+                          </a:solidFill>
+                        </a:defRPr>
+                      </a:pPr>
+                      <a:r>
+                        <a:t>Prior Art Architecture</a:t>
+                      </a:r>
+                    </a:p>
+                  </a:txBody>
+                  <a:tcPr>
+                    <a:solidFill>
+                      <a:srgbClr val="101B2D"/>
+                    </a:solidFill>
+                  </a:tcPr>
+                </a:tc>
+                <a:tc>
+                  <a:txBody>
+                    <a:bodyPr/>
+                    <a:lstStyle/>
+                    <a:p>
+                      <a:pPr>
+                        <a:defRPr b="1" sz="1000">
+                          <a:solidFill>
+                            <a:srgbClr val="FFFFFF"/>
+                          </a:solidFill>
+                        </a:defRPr>
+                      </a:pPr>
+                      <a:r>
+                        <a:t>Standard Methodology</a:t>
+                      </a:r>
+                    </a:p>
+                  </a:txBody>
+                  <a:tcPr>
+                    <a:solidFill>
+                      <a:srgbClr val="101B2D"/>
+                    </a:solidFill>
+                  </a:tcPr>
+                </a:tc>
+                <a:tc>
+                  <a:txBody>
+                    <a:bodyPr/>
+                    <a:lstStyle/>
+                    <a:p>
+                      <a:pPr>
+                        <a:defRPr b="1" sz="1000">
+                          <a:solidFill>
+                            <a:srgbClr val="FFFFFF"/>
+                          </a:solidFill>
+                        </a:defRPr>
+                      </a:pPr>
+                      <a:r>
+                        <a:t>Critical Technical Limitation</a:t>
+                      </a:r>
+                    </a:p>
+                  </a:txBody>
+                  <a:tcPr>
+                    <a:solidFill>
+                      <a:srgbClr val="101B2D"/>
+                    </a:solidFill>
+                  </a:tcPr>
+                </a:tc>
+                <a:tc>
+                  <a:txBody>
+                    <a:bodyPr/>
+                    <a:lstStyle/>
+                    <a:p>
+                      <a:pPr>
+                        <a:defRPr b="1" sz="1000">
+                          <a:solidFill>
+                            <a:srgbClr val="FFFFFF"/>
+                          </a:solidFill>
+                        </a:defRPr>
+                      </a:pPr>
+                      <a:r>
+                        <a:t>FOVEA-MAP Innovation (SIH26053)</a:t>
+                      </a:r>
+                    </a:p>
+                  </a:txBody>
+                  <a:tcPr>
+                    <a:solidFill>
+                      <a:srgbClr val="101B2D"/>
+                    </a:solidFill>
+                  </a:tcPr>
+                </a:tc>
+              </a:tr>
+              <a:tr h="438912">
+                <a:tc>
+                  <a:txBody>
+                    <a:bodyPr/>
+                    <a:lstStyle/>
+                    <a:p>
+                      <a:pPr>
+                        <a:defRPr sz="950">
+                          <a:solidFill>
+                            <a:srgbClr val="0F172A"/>
+                          </a:solidFill>
+                        </a:defRPr>
+                      </a:pPr>
+                      <a:r>
+                        <a:t>Flat 2D Costmap</a:t>
+                      </a:r>
+                    </a:p>
+                  </a:txBody>
+                  <a:tcPr/>
+                </a:tc>
+                <a:tc>
+                  <a:txBody>
+                    <a:bodyPr/>
+                    <a:lstStyle/>
+                    <a:p>
+                      <a:pPr>
+                        <a:defRPr sz="950">
+                          <a:solidFill>
+                            <a:srgbClr val="0F172A"/>
+                          </a:solidFill>
+                        </a:defRPr>
+                      </a:pPr>
+                      <a:r>
+                        <a:t>Binary 2D obstacle grid</a:t>
+                      </a:r>
+                    </a:p>
+                  </a:txBody>
+                  <a:tcPr/>
+                </a:tc>
+                <a:tc>
+                  <a:txBody>
+                    <a:bodyPr/>
+                    <a:lstStyle/>
+                    <a:p>
+                      <a:pPr>
+                        <a:defRPr sz="950">
+                          <a:solidFill>
+                            <a:srgbClr val="0F172A"/>
+                          </a:solidFill>
+                        </a:defRPr>
+                      </a:pPr>
+                      <a:r>
+                        <a:t>Collapses height; blind to curbs, potholes &amp; overhanging branches</a:t>
+                      </a:r>
+                    </a:p>
+                  </a:txBody>
+                  <a:tcPr/>
+                </a:tc>
+                <a:tc>
+                  <a:txBody>
+                    <a:bodyPr/>
+                    <a:lstStyle/>
+                    <a:p>
+                      <a:pPr>
+                        <a:defRPr sz="950" b="1">
+                          <a:solidFill>
+                            <a:srgbClr val="107846"/>
+                          </a:solidFill>
+                        </a:defRPr>
+                      </a:pPr>
+                      <a:r>
+                        <a:t>Multi-layer 2.5D elevation tensor with explicit Z_min &amp; slope</a:t>
+                      </a:r>
+                    </a:p>
+                  </a:txBody>
+                  <a:tcPr>
+                    <a:solidFill>
+                      <a:srgbClr val="F0FDF4"/>
+                    </a:solidFill>
+                  </a:tcPr>
+                </a:tc>
+              </a:tr>
+              <a:tr h="438912">
+                <a:tc>
+                  <a:txBody>
+                    <a:bodyPr/>
+                    <a:lstStyle/>
+                    <a:p>
+                      <a:pPr>
+                        <a:defRPr sz="950">
+                          <a:solidFill>
+                            <a:srgbClr val="0F172A"/>
+                          </a:solidFill>
+                        </a:defRPr>
+                      </a:pPr>
+                      <a:r>
+                        <a:t>Uniform 3D Voxel (OctoMap)</a:t>
+                      </a:r>
+                    </a:p>
+                  </a:txBody>
+                  <a:tcPr/>
+                </a:tc>
+                <a:tc>
+                  <a:txBody>
+                    <a:bodyPr/>
+                    <a:lstStyle/>
+                    <a:p>
+                      <a:pPr>
+                        <a:defRPr sz="950">
+                          <a:solidFill>
+                            <a:srgbClr val="0F172A"/>
+                          </a:solidFill>
+                        </a:defRPr>
+                      </a:pPr>
+                      <a:r>
+                        <a:t>Rigid 3D octree voxelization</a:t>
+                      </a:r>
+                    </a:p>
+                  </a:txBody>
+                  <a:tcPr/>
+                </a:tc>
+                <a:tc>
+                  <a:txBody>
+                    <a:bodyPr/>
+                    <a:lstStyle/>
+                    <a:p>
+                      <a:pPr>
+                        <a:defRPr sz="950">
+                          <a:solidFill>
+                            <a:srgbClr val="0F172A"/>
+                          </a:solidFill>
+                        </a:defRPr>
+                      </a:pPr>
+                      <a:r>
+                        <a:t>540 MB RAM &amp; 110ms latency; unviable for low-power edge rovers</a:t>
+                      </a:r>
+                    </a:p>
+                  </a:txBody>
+                  <a:tcPr/>
+                </a:tc>
+                <a:tc>
+                  <a:txBody>
+                    <a:bodyPr/>
+                    <a:lstStyle/>
+                    <a:p>
+                      <a:pPr>
+                        <a:defRPr sz="950" b="1">
+                          <a:solidFill>
+                            <a:srgbClr val="107846"/>
+                          </a:solidFill>
+                        </a:defRPr>
+                      </a:pPr>
+                      <a:r>
+                        <a:t>Concentric foveated polar grid (38 MB RAM, 16.4ms latency)</a:t>
+                      </a:r>
+                    </a:p>
+                  </a:txBody>
+                  <a:tcPr>
+                    <a:solidFill>
+                      <a:srgbClr val="F0FDF4"/>
+                    </a:solidFill>
+                  </a:tcPr>
+                </a:tc>
+              </a:tr>
+              <a:tr h="438912">
+                <a:tc>
+                  <a:txBody>
+                    <a:bodyPr/>
+                    <a:lstStyle/>
+                    <a:p>
+                      <a:pPr>
+                        <a:defRPr sz="950">
+                          <a:solidFill>
+                            <a:srgbClr val="0F172A"/>
+                          </a:solidFill>
+                        </a:defRPr>
+                      </a:pPr>
+                      <a:r>
+                        <a:t>Static Elevation Grids</a:t>
+                      </a:r>
+                    </a:p>
+                  </a:txBody>
+                  <a:tcPr/>
+                </a:tc>
+                <a:tc>
+                  <a:txBody>
+                    <a:bodyPr/>
+                    <a:lstStyle/>
+                    <a:p>
+                      <a:pPr>
+                        <a:defRPr sz="950">
+                          <a:solidFill>
+                            <a:srgbClr val="0F172A"/>
+                          </a:solidFill>
+                        </a:defRPr>
+                      </a:pPr>
+                      <a:r>
+                        <a:t>Direct heightmap accumulation</a:t>
+                      </a:r>
+                    </a:p>
+                  </a:txBody>
+                  <a:tcPr/>
+                </a:tc>
+                <a:tc>
+                  <a:txBody>
+                    <a:bodyPr/>
+                    <a:lstStyle/>
+                    <a:p>
+                      <a:pPr>
+                        <a:defRPr sz="950">
+                          <a:solidFill>
+                            <a:srgbClr val="0F172A"/>
+                          </a:solidFill>
+                        </a:defRPr>
+                      </a:pPr>
+                      <a:r>
+                        <a:t>Moving obstacles leave persistent ghost trails across costmaps</a:t>
+                      </a:r>
+                    </a:p>
+                  </a:txBody>
+                  <a:tcPr/>
+                </a:tc>
+                <a:tc>
+                  <a:txBody>
+                    <a:bodyPr/>
+                    <a:lstStyle/>
+                    <a:p>
+                      <a:pPr>
+                        <a:defRPr sz="950" b="1">
+                          <a:solidFill>
+                            <a:srgbClr val="107846"/>
+                          </a:solidFill>
+                        </a:defRPr>
+                      </a:pPr>
+                      <a:r>
+                        <a:t>Bayesian log-odds dynamic filter; moving trails purged in 2 cycles</a:t>
+                      </a:r>
+                    </a:p>
+                  </a:txBody>
+                  <a:tcPr>
+                    <a:solidFill>
+                      <a:srgbClr val="F0FDF4"/>
+                    </a:solidFill>
+                  </a:tcPr>
+                </a:tc>
+              </a:tr>
+              <a:tr h="438912">
+                <a:tc>
+                  <a:txBody>
+                    <a:bodyPr/>
+                    <a:lstStyle/>
+                    <a:p>
+                      <a:pPr>
+                        <a:defRPr sz="950">
+                          <a:solidFill>
+                            <a:srgbClr val="0F172A"/>
+                          </a:solidFill>
+                        </a:defRPr>
+                      </a:pPr>
+                      <a:r>
+                        <a:t>Fixed-Resolution Radial Maps</a:t>
+                      </a:r>
+                    </a:p>
+                  </a:txBody>
+                  <a:tcPr/>
+                </a:tc>
+                <a:tc>
+                  <a:txBody>
+                    <a:bodyPr/>
+                    <a:lstStyle/>
+                    <a:p>
+                      <a:pPr>
+                        <a:defRPr sz="950">
+                          <a:solidFill>
+                            <a:srgbClr val="0F172A"/>
+                          </a:solidFill>
+                        </a:defRPr>
+                      </a:pPr>
+                      <a:r>
+                        <a:t>Uniform cell size radially</a:t>
+                      </a:r>
+                    </a:p>
+                  </a:txBody>
+                  <a:tcPr/>
+                </a:tc>
+                <a:tc>
+                  <a:txBody>
+                    <a:bodyPr/>
+                    <a:lstStyle/>
+                    <a:p>
+                      <a:pPr>
+                        <a:defRPr sz="950">
+                          <a:solidFill>
+                            <a:srgbClr val="0F172A"/>
+                          </a:solidFill>
+                        </a:defRPr>
+                      </a:pPr>
+                      <a:r>
+                        <a:t>Wastes compute on distant terrain while losing near-field acuity</a:t>
+                      </a:r>
+                    </a:p>
+                  </a:txBody>
+                  <a:tcPr/>
+                </a:tc>
+                <a:tc>
+                  <a:txBody>
+                    <a:bodyPr/>
+                    <a:lstStyle/>
+                    <a:p>
+                      <a:pPr>
+                        <a:defRPr sz="950" b="1">
+                          <a:solidFill>
+                            <a:srgbClr val="107846"/>
+                          </a:solidFill>
+                        </a:defRPr>
+                      </a:pPr>
+                      <a:r>
+                        <a:t>Distance-adaptive 5cm (0-10m) → 20cm (10-35m) → 50cm (35-100m)</a:t>
+                      </a:r>
+                    </a:p>
+                  </a:txBody>
+                  <a:tcPr>
+                    <a:solidFill>
+                      <a:srgbClr val="F0FDF4"/>
+                    </a:solidFill>
+                  </a:tcPr>
+                </a:tc>
+              </a:tr>
+            </a:tbl>
+          </a:graphicData>
+        </a:graphic>
+      </p:graphicFrame>
       <p:sp>
         <p:nvSpPr>
           <p:cNvPr id="8" name="Rounded Rectangle 7"/>
@@ -7830,7 +8407,7 @@
         <p:spPr>
           <a:xfrm>
             <a:off x="548640" y="3246120"/>
-            <a:ext cx="6766560" cy="2971800"/>
+            <a:ext cx="6217920" cy="3108960"/>
           </a:xfrm>
           <a:prstGeom prst="roundRect">
             <a:avLst/>
@@ -7840,7 +8417,7 @@
           </a:solidFill>
           <a:ln w="19050">
             <a:solidFill>
-              <a:srgbClr val="005B94"/>
+              <a:srgbClr val="006FAE"/>
             </a:solidFill>
           </a:ln>
         </p:spPr>
@@ -7866,14 +8443,14 @@
               <a:spcAft>
                 <a:spcPts val="400"/>
               </a:spcAft>
-              <a:defRPr b="1" sz="1350">
-                <a:solidFill>
-                  <a:srgbClr val="005B94"/>
-                </a:solidFill>
-              </a:defRPr>
-            </a:pPr>
-            <a:r>
-              <a:t>📚 Academic &amp; Technical References (Verified DOIs)</a:t>
+              <a:defRPr b="1" sz="1300">
+                <a:solidFill>
+                  <a:srgbClr val="101B2D"/>
+                </a:solidFill>
+              </a:defRPr>
+            </a:pPr>
+            <a:r>
+              <a:t>📚 Academic &amp; Technical References (Verified Clickable DOIs)</a:t>
             </a:r>
           </a:p>
           <a:p>
@@ -7883,21 +8460,30 @@
               </a:spcAft>
             </a:pPr>
             <a:r>
-              <a:rPr sz="950">
-                <a:solidFill>
-                  <a:srgbClr val="0F172A"/>
+              <a:rPr b="1" sz="950">
+                <a:solidFill>
+                  <a:srgbClr val="101B2D"/>
                 </a:solidFill>
               </a:rPr>
-              <a:t>1) Lim, H., et al., 'Patchwork++: Fast and Robust Ground Segmentation Using 3D LiDAR,' IEEE Transactions on Robotics (T-RO), 2024.</a:t>
-            </a:r>
-            <a:r>
-              <a:rPr sz="950" b="1" u="sng">
-                <a:solidFill>
-                  <a:srgbClr val="005BBB"/>
-                </a:solidFill>
-                <a:hlinkClick r:id="rId4"/>
+              <a:t>[1] Patchwork++ Ground Segmentation (IEEE T-RO, 2024)
+</a:t>
+            </a:r>
+            <a:r>
+              <a:rPr sz="850">
+                <a:solidFill>
+                  <a:srgbClr val="475569"/>
+                </a:solidFill>
               </a:rPr>
-              <a:t> [IEEE T-RO ↗]</a:t>
+              <a:t>Lim, H., et al., 'Patchwork++: Fast and Robust Ground Segmentation Solving Partial Under-Segmentation Using 3D LiDAR.'</a:t>
+            </a:r>
+            <a:r>
+              <a:rPr sz="900" b="1" u="sng">
+                <a:solidFill>
+                  <a:srgbClr val="0066CC"/>
+                </a:solidFill>
+                <a:hlinkClick r:id="rId3"/>
+              </a:rPr>
+              <a:t> [IEEE T-RO DOI ↗]</a:t>
             </a:r>
           </a:p>
           <a:p>
@@ -7907,21 +8493,30 @@
               </a:spcAft>
             </a:pPr>
             <a:r>
-              <a:rPr sz="950">
-                <a:solidFill>
-                  <a:srgbClr val="0F172A"/>
+              <a:rPr b="1" sz="950">
+                <a:solidFill>
+                  <a:srgbClr val="101B2D"/>
                 </a:solidFill>
               </a:rPr>
-              <a:t>2) Fankhauser, P., et al., 'Probabilistic Terrain Mapping for Mobile Robots with Uncertain Localization,' IEEE RA-L, vol. 3, 2018.</a:t>
-            </a:r>
-            <a:r>
-              <a:rPr sz="950" b="1" u="sng">
-                <a:solidFill>
-                  <a:srgbClr val="005BBB"/>
-                </a:solidFill>
-                <a:hlinkClick r:id="rId5"/>
+              <a:t>[2] Probabilistic Terrain Elevation Mapping (IEEE RA-L, 2018)
+</a:t>
+            </a:r>
+            <a:r>
+              <a:rPr sz="850">
+                <a:solidFill>
+                  <a:srgbClr val="475569"/>
+                </a:solidFill>
               </a:rPr>
-              <a:t> [IEEE RA-L ↗]</a:t>
+              <a:t>Fankhauser, P., et al., 'Probabilistic Terrain Mapping for Mobile Robots with Uncertain Localization.'</a:t>
+            </a:r>
+            <a:r>
+              <a:rPr sz="900" b="1" u="sng">
+                <a:solidFill>
+                  <a:srgbClr val="0066CC"/>
+                </a:solidFill>
+                <a:hlinkClick r:id="rId4"/>
+              </a:rPr>
+              <a:t> [IEEE RA-L DOI ↗]</a:t>
             </a:r>
           </a:p>
           <a:p>
@@ -7931,21 +8526,30 @@
               </a:spcAft>
             </a:pPr>
             <a:r>
-              <a:rPr sz="950">
-                <a:solidFill>
-                  <a:srgbClr val="0F172A"/>
+              <a:rPr b="1" sz="950">
+                <a:solidFill>
+                  <a:srgbClr val="101B2D"/>
                 </a:solidFill>
               </a:rPr>
-              <a:t>3) Chodosh, N., et al., 'Deep Elevation Mapping for Off-Road Autonomous Driving,' IEEE ICRA, 2023.</a:t>
-            </a:r>
-            <a:r>
-              <a:rPr sz="950" b="1" u="sng">
-                <a:solidFill>
-                  <a:srgbClr val="005BBB"/>
-                </a:solidFill>
-                <a:hlinkClick r:id="rId6"/>
+              <a:t>[3] Deep Elevation Mapping for Off-Road Autonomy (IEEE ICRA, 2023)
+</a:t>
+            </a:r>
+            <a:r>
+              <a:rPr sz="850">
+                <a:solidFill>
+                  <a:srgbClr val="475569"/>
+                </a:solidFill>
               </a:rPr>
-              <a:t> [IEEE ICRA ↗]</a:t>
+              <a:t>Chodosh, N., et al., 'Deep Elevation Mapping for Off-Road Autonomous Driving.'</a:t>
+            </a:r>
+            <a:r>
+              <a:rPr sz="900" b="1" u="sng">
+                <a:solidFill>
+                  <a:srgbClr val="0066CC"/>
+                </a:solidFill>
+                <a:hlinkClick r:id="rId5"/>
+              </a:rPr>
+              <a:t> [IEEE ICRA DOI ↗]</a:t>
             </a:r>
           </a:p>
           <a:p>
@@ -7955,19 +8559,28 @@
               </a:spcAft>
             </a:pPr>
             <a:r>
-              <a:rPr sz="950">
-                <a:solidFill>
-                  <a:srgbClr val="0F172A"/>
+              <a:rPr b="1" sz="950">
+                <a:solidFill>
+                  <a:srgbClr val="101B2D"/>
                 </a:solidFill>
               </a:rPr>
-              <a:t>4) Hornung, A., et al., 'OctoMap: An Efficient Probabilistic 3D Mapping Framework,' Autonomous Robots, vol. 34, 2013.</a:t>
-            </a:r>
-            <a:r>
-              <a:rPr sz="950" b="1" u="sng">
-                <a:solidFill>
-                  <a:srgbClr val="005BBB"/>
-                </a:solidFill>
-                <a:hlinkClick r:id="rId7"/>
+              <a:t>[4] OctoMap 3D Occupancy Mapping Framework (Autonomous Robots, 2013)
+</a:t>
+            </a:r>
+            <a:r>
+              <a:rPr sz="850">
+                <a:solidFill>
+                  <a:srgbClr val="475569"/>
+                </a:solidFill>
+              </a:rPr>
+              <a:t>Hornung, A., et al., 'OctoMap: An Efficient Probabilistic 3D Mapping Framework Based on Octrees.'</a:t>
+            </a:r>
+            <a:r>
+              <a:rPr sz="900" b="1" u="sng">
+                <a:solidFill>
+                  <a:srgbClr val="0066CC"/>
+                </a:solidFill>
+                <a:hlinkClick r:id="rId6"/>
               </a:rPr>
               <a:t> [Springer DOI ↗]</a:t>
             </a:r>
@@ -7982,8 +8595,8 @@
         </p:nvSpPr>
         <p:spPr>
           <a:xfrm>
-            <a:off x="7498079" y="3246120"/>
-            <a:ext cx="4114800" cy="2971800"/>
+            <a:off x="6949440" y="3246120"/>
+            <a:ext cx="4663440" cy="3108960"/>
           </a:xfrm>
           <a:prstGeom prst="roundRect">
             <a:avLst/>
@@ -7993,7 +8606,7 @@
           </a:solidFill>
           <a:ln w="19050">
             <a:solidFill>
-              <a:srgbClr val="005B94"/>
+              <a:srgbClr val="006FAE"/>
             </a:solidFill>
           </a:ln>
         </p:spPr>
@@ -8019,14 +8632,14 @@
               <a:spcAft>
                 <a:spcPts val="400"/>
               </a:spcAft>
-              <a:defRPr b="1" sz="1350">
-                <a:solidFill>
-                  <a:srgbClr val="005B94"/>
-                </a:solidFill>
-              </a:defRPr>
-            </a:pPr>
-            <a:r>
-              <a:t>🔗 Live Deliverables &amp; Working Links</a:t>
+              <a:defRPr b="1" sz="1300">
+                <a:solidFill>
+                  <a:srgbClr val="101B2D"/>
+                </a:solidFill>
+              </a:defRPr>
+            </a:pPr>
+            <a:r>
+              <a:t>🔗 Live Deliverables &amp; Working Verification Links</a:t>
             </a:r>
           </a:p>
           <a:p>
@@ -8046,9 +8659,9 @@
             <a:r>
               <a:rPr sz="1000" b="1" u="sng">
                 <a:solidFill>
-                  <a:srgbClr val="005BBB"/>
-                </a:solidFill>
-                <a:hlinkClick r:id="rId8"/>
+                  <a:srgbClr val="0066CC"/>
+                </a:solidFill>
+                <a:hlinkClick r:id="rId7"/>
               </a:rPr>
               <a:t>[Open Report ↗]</a:t>
             </a:r>
@@ -8070,9 +8683,9 @@
             <a:r>
               <a:rPr sz="1000" b="1" u="sng">
                 <a:solidFill>
-                  <a:srgbClr val="005BBB"/>
-                </a:solidFill>
-                <a:hlinkClick r:id="rId9"/>
+                  <a:srgbClr val="0066CC"/>
+                </a:solidFill>
+                <a:hlinkClick r:id="rId8"/>
               </a:rPr>
               <a:t>[View Model ↗]</a:t>
             </a:r>
@@ -8094,9 +8707,9 @@
             <a:r>
               <a:rPr sz="1000" b="1" u="sng">
                 <a:solidFill>
-                  <a:srgbClr val="005BBB"/>
-                </a:solidFill>
-                <a:hlinkClick r:id="rId10"/>
+                  <a:srgbClr val="0066CC"/>
+                </a:solidFill>
+                <a:hlinkClick r:id="rId9"/>
               </a:rPr>
               <a:t>[github.com/MANAV0060 ↗]</a:t>
             </a:r>
@@ -8118,9 +8731,9 @@
             <a:r>
               <a:rPr sz="1000" b="1" u="sng">
                 <a:solidFill>
-                  <a:srgbClr val="005BBB"/>
-                </a:solidFill>
-                <a:hlinkClick r:id="rId11"/>
+                  <a:srgbClr val="0066CC"/>
+                </a:solidFill>
+                <a:hlinkClick r:id="rId10"/>
               </a:rPr>
               <a:t>[Launch 3D Web App ↗]</a:t>
             </a:r>
@@ -8142,11 +8755,11 @@
             <a:r>
               <a:rPr sz="1000" b="1" u="sng">
                 <a:solidFill>
-                  <a:srgbClr val="005BBB"/>
-                </a:solidFill>
-                <a:hlinkClick r:id="rId12"/>
+                  <a:srgbClr val="0066CC"/>
+                </a:solidFill>
+                <a:hlinkClick r:id="rId11"/>
               </a:rPr>
-              <a:t>[View Logs ↗]</a:t>
+              <a:t>[View Latency Logs ↗]</a:t>
             </a:r>
           </a:p>
           <a:p>
@@ -8166,9 +8779,9 @@
             <a:r>
               <a:rPr sz="1000" b="1" u="sng">
                 <a:solidFill>
-                  <a:srgbClr val="005BBB"/>
-                </a:solidFill>
-                <a:hlinkClick r:id="rId13"/>
+                  <a:srgbClr val="0066CC"/>
+                </a:solidFill>
+                <a:hlinkClick r:id="rId12"/>
               </a:rPr>
               <a:t>[Open Simulation ↗]</a:t>
             </a:r>
@@ -8183,14 +8796,14 @@
         </p:nvSpPr>
         <p:spPr>
           <a:xfrm>
-            <a:off x="0" y="6446520"/>
-            <a:ext cx="12191695" cy="411480"/>
+            <a:off x="0" y="6510528"/>
+            <a:ext cx="12191695" cy="347472"/>
           </a:xfrm>
           <a:prstGeom prst="rect">
             <a:avLst/>
           </a:prstGeom>
           <a:solidFill>
-            <a:srgbClr val="005B94"/>
+            <a:srgbClr val="101B2D"/>
           </a:solidFill>
           <a:ln>
             <a:noFill/>
@@ -8226,8 +8839,8 @@
         </p:nvSpPr>
         <p:spPr>
           <a:xfrm>
-            <a:off x="2743200" y="6473952"/>
-            <a:ext cx="6705295" cy="347472"/>
+            <a:off x="640080" y="6528816"/>
+            <a:ext cx="3200400" cy="292608"/>
           </a:xfrm>
           <a:prstGeom prst="rect">
             <a:avLst/>
@@ -8235,20 +8848,20 @@
           <a:noFill/>
         </p:spPr>
         <p:txBody>
-          <a:bodyPr wrap="square" lIns="0" rIns="0" tIns="0" bIns="0">
+          <a:bodyPr wrap="none" lIns="0" tIns="0" rIns="0" bIns="0">
             <a:spAutoFit/>
           </a:bodyPr>
           <a:lstStyle/>
           <a:p>
-            <a:pPr algn="ctr">
-              <a:defRPr sz="1200" b="1">
-                <a:solidFill>
-                  <a:srgbClr val="FFFFFF"/>
-                </a:solidFill>
-              </a:defRPr>
-            </a:pPr>
-            <a:r>
-              <a:t>SMART INDIA HACKATHON 2026</a:t>
+            <a:pPr>
+              <a:defRPr sz="1000" b="1">
+                <a:solidFill>
+                  <a:srgbClr val="00A8D6"/>
+                </a:solidFill>
+              </a:defRPr>
+            </a:pPr>
+            <a:r>
+              <a:t>TEAM NULLPOINT  |  SIH26053</a:t>
             </a:r>
           </a:p>
         </p:txBody>
@@ -8261,8 +8874,8 @@
         </p:nvSpPr>
         <p:spPr>
           <a:xfrm>
-            <a:off x="10972800" y="6473952"/>
-            <a:ext cx="914400" cy="347472"/>
+            <a:off x="4114800" y="6528816"/>
+            <a:ext cx="3962095" cy="292608"/>
           </a:xfrm>
           <a:prstGeom prst="rect">
             <a:avLst/>
@@ -8270,20 +8883,55 @@
           <a:noFill/>
         </p:spPr>
         <p:txBody>
-          <a:bodyPr wrap="square" lIns="0" rIns="0" tIns="0" bIns="0">
+          <a:bodyPr wrap="none" lIns="0" tIns="0" rIns="0" bIns="0">
             <a:spAutoFit/>
           </a:bodyPr>
           <a:lstStyle/>
           <a:p>
+            <a:pPr algn="ctr">
+              <a:defRPr sz="1050" b="1">
+                <a:solidFill>
+                  <a:srgbClr val="FFFFFF"/>
+                </a:solidFill>
+              </a:defRPr>
+            </a:pPr>
+            <a:r>
+              <a:t>SMART INDIA HACKATHON 2026</a:t>
+            </a:r>
+          </a:p>
+        </p:txBody>
+      </p:sp>
+      <p:sp>
+        <p:nvSpPr>
+          <p:cNvPr id="13" name="TextBox 12"/>
+          <p:cNvSpPr txBox="1"/>
+          <p:nvPr/>
+        </p:nvSpPr>
+        <p:spPr>
+          <a:xfrm>
+            <a:off x="10789920" y="6528816"/>
+            <a:ext cx="822960" cy="292608"/>
+          </a:xfrm>
+          <a:prstGeom prst="rect">
+            <a:avLst/>
+          </a:prstGeom>
+          <a:noFill/>
+        </p:spPr>
+        <p:txBody>
+          <a:bodyPr wrap="none" lIns="0" tIns="0" rIns="0" bIns="0">
+            <a:spAutoFit/>
+          </a:bodyPr>
+          <a:lstStyle/>
+          <a:p>
             <a:pPr algn="r">
-              <a:defRPr sz="1200" b="1">
+              <a:defRPr sz="1000" b="1">
                 <a:solidFill>
                   <a:srgbClr val="FFFFFF"/>
                 </a:solidFill>
               </a:defRPr>
             </a:pPr>
             <a:r>
-              <a:t>6</a:t>
+              <a:t>6 / 6</a:t>
             </a:r>
           </a:p>
         </p:txBody>
